--- a/docs/papers/thesis/thesis_presentation_zh.pptx
+++ b/docs/papers/thesis/thesis_presentation_zh.pptx
@@ -21981,7 +21981,7 @@
                 </a:solidFill>
                 <a:latin typeface="PingFang TC"/>
               </a:rPr>
-              <a:t>synthetic full-field：8 組標準情境、truth-adjusted sensors、IDW 與消融</a:t>
+              <a:t>E1-E3：synthetic full-field、IDW baseline、ablation</a:t>
             </a:r>
           </a:p>
           <a:p>
@@ -22003,7 +22003,7 @@
                 </a:solidFill>
                 <a:latin typeface="PingFang TC"/>
               </a:rPr>
-              <a:t>hybrid residual：no-Fourier 對照與 LOO cross-validation</a:t>
+              <a:t>E4：非連網裝置影響學習與推薦排序</a:t>
             </a:r>
           </a:p>
           <a:p>
@@ -22025,7 +22025,7 @@
                 </a:solidFill>
                 <a:latin typeface="PingFang TC"/>
               </a:rPr>
-              <a:t>window matrix：48 組外部邊界條件敏感度</a:t>
+              <a:t>E5：window matrix 48 組外部邊界條件</a:t>
             </a:r>
           </a:p>
           <a:p>
@@ -22047,7 +22047,7 @@
                 </a:solidFill>
                 <a:latin typeface="PingFang TC"/>
               </a:rPr>
-              <a:t>真實 bedroom_01 快照：28 筆，檢查 pillow 位置</a:t>
+              <a:t>E6：hybrid no-Fourier 對照與 LOO cross-validation</a:t>
             </a:r>
           </a:p>
           <a:p>
@@ -22069,7 +22069,7 @@
                 </a:solidFill>
                 <a:latin typeface="PingFang TC"/>
               </a:rPr>
-              <a:t>public datasets：只作 task-aligned benchmark，不當 full-field 基準</a:t>
+              <a:t>E7：bedroom_01 28 筆，pillow hold-out</a:t>
             </a:r>
           </a:p>
           <a:p>
@@ -22091,7 +22091,7 @@
                 </a:solidFill>
                 <a:latin typeface="PingFang TC"/>
               </a:rPr>
-              <a:t>推薦排序：目前是 counterfactual simulation；有效性需介入實驗</a:t>
+              <a:t>E8 protocol、E9 public benchmark；demo 不是量化實驗</a:t>
             </a:r>
           </a:p>
         </p:txBody>

--- a/docs/papers/thesis/thesis_presentation_zh.pptx
+++ b/docs/papers/thesis/thesis_presentation_zh.pptx
@@ -18487,7 +18487,7 @@
                 </a:solidFill>
                 <a:latin typeface="PingFang TC"/>
               </a:rPr>
-              <a:t>溫度/濕度可做 Fourier low-pass；照度保留快速跳變</a:t>
+              <a:t>溫濕度響應較平滑可低通；照度因光源/遮蔽需保留快速跳變</a:t>
             </a:r>
           </a:p>
         </p:txBody>
@@ -21402,73 +21402,139 @@
                 </a:solidFill>
                 <a:latin typeface="PingFang TC"/>
               </a:rPr>
-              <a:t>MCP / Gemma</a:t>
-            </a:r>
-          </a:p>
-          <a:p>
-            <a:pPr>
-              <a:spcAft>
-                <a:spcPts val="300"/>
-              </a:spcAft>
-              <a:defRPr sz="1200">
-                <a:solidFill>
-                  <a:srgbClr val="192028"/>
-                </a:solidFill>
-                <a:latin typeface="PingFang TC"/>
-              </a:defRPr>
-            </a:pPr>
-            <a:r>
-              <a:rPr sz="1200" b="0">
-                <a:solidFill>
-                  <a:srgbClr val="192028"/>
-                </a:solidFill>
-                <a:latin typeface="PingFang TC"/>
-              </a:rPr>
-              <a:t>本地 stdio MCP server</a:t>
-            </a:r>
-          </a:p>
-          <a:p>
-            <a:pPr>
-              <a:spcAft>
-                <a:spcPts val="300"/>
-              </a:spcAft>
-              <a:defRPr sz="1200">
-                <a:solidFill>
-                  <a:srgbClr val="192028"/>
-                </a:solidFill>
-                <a:latin typeface="PingFang TC"/>
-              </a:defRPr>
-            </a:pPr>
-            <a:r>
-              <a:rPr sz="1200" b="0">
-                <a:solidFill>
-                  <a:srgbClr val="192028"/>
-                </a:solidFill>
-                <a:latin typeface="PingFang TC"/>
-              </a:rPr>
-              <a:t>提供 scenario, ranking, point sample, baseline, impacts, window tools</a:t>
-            </a:r>
-          </a:p>
-          <a:p>
-            <a:pPr>
-              <a:spcAft>
-                <a:spcPts val="300"/>
-              </a:spcAft>
-              <a:defRPr sz="1200">
-                <a:solidFill>
-                  <a:srgbClr val="192028"/>
-                </a:solidFill>
-                <a:latin typeface="PingFang TC"/>
-              </a:defRPr>
-            </a:pPr>
-            <a:r>
-              <a:rPr sz="1200" b="0">
-                <a:solidFill>
-                  <a:srgbClr val="192028"/>
-                </a:solidFill>
-                <a:latin typeface="PingFang TC"/>
-              </a:rPr>
-              <a:t>Gemma 透過 bridge 做 tool calling</a:t>
+              <a:t>MCP：工具化介面</a:t>
+            </a:r>
+          </a:p>
+          <a:p>
+            <a:pPr>
+              <a:spcAft>
+                <a:spcPts val="300"/>
+              </a:spcAft>
+              <a:defRPr sz="1200">
+                <a:solidFill>
+                  <a:srgbClr val="192028"/>
+                </a:solidFill>
+                <a:latin typeface="PingFang TC"/>
+              </a:defRPr>
+            </a:pPr>
+            <a:r>
+              <a:rPr sz="1200" b="0">
+                <a:solidFill>
+                  <a:srgbClr val="192028"/>
+                </a:solidFill>
+                <a:latin typeface="PingFang TC"/>
+              </a:rPr>
+              <a:t>MCP 不做預測；只提供 AI 可呼叫 runtime tools</a:t>
+            </a:r>
+          </a:p>
+          <a:p>
+            <a:pPr>
+              <a:spcAft>
+                <a:spcPts val="300"/>
+              </a:spcAft>
+              <a:defRPr sz="1200">
+                <a:solidFill>
+                  <a:srgbClr val="192028"/>
+                </a:solidFill>
+                <a:latin typeface="PingFang TC"/>
+              </a:defRPr>
+            </a:pPr>
+            <a:r>
+              <a:rPr sz="1200" b="0">
+                <a:solidFill>
+                  <a:srgbClr val="192028"/>
+                </a:solidFill>
+                <a:latin typeface="PingFang TC"/>
+              </a:rPr>
+              <a:t>initialize：註冊環境、設備、家具與 baseline</a:t>
+            </a:r>
+          </a:p>
+          <a:p>
+            <a:pPr>
+              <a:spcAft>
+                <a:spcPts val="300"/>
+              </a:spcAft>
+              <a:defRPr sz="1200">
+                <a:solidFill>
+                  <a:srgbClr val="192028"/>
+                </a:solidFill>
+                <a:latin typeface="PingFang TC"/>
+              </a:defRPr>
+            </a:pPr>
+            <a:r>
+              <a:rPr sz="1200" b="0">
+                <a:solidFill>
+                  <a:srgbClr val="192028"/>
+                </a:solidFill>
+                <a:latin typeface="PingFang TC"/>
+              </a:rPr>
+              <a:t>sample point：查指定座標在特定時間/穩定態的三因子</a:t>
+            </a:r>
+          </a:p>
+          <a:p>
+            <a:pPr>
+              <a:spcAft>
+                <a:spcPts val="300"/>
+              </a:spcAft>
+              <a:defRPr sz="1200">
+                <a:solidFill>
+                  <a:srgbClr val="192028"/>
+                </a:solidFill>
+                <a:latin typeface="PingFang TC"/>
+              </a:defRPr>
+            </a:pPr>
+            <a:r>
+              <a:rPr sz="1200" b="0">
+                <a:solidFill>
+                  <a:srgbClr val="192028"/>
+                </a:solidFill>
+                <a:latin typeface="PingFang TC"/>
+              </a:rPr>
+              <a:t>learn impacts：建立 before/after 觀測紀錄再學係數</a:t>
+            </a:r>
+          </a:p>
+          <a:p>
+            <a:pPr>
+              <a:spcAft>
+                <a:spcPts val="300"/>
+              </a:spcAft>
+              <a:defRPr sz="1200">
+                <a:solidFill>
+                  <a:srgbClr val="192028"/>
+                </a:solidFill>
+                <a:latin typeface="PingFang TC"/>
+              </a:defRPr>
+            </a:pPr>
+            <a:r>
+              <a:rPr sz="1200" b="0">
+                <a:solidFill>
+                  <a:srgbClr val="192028"/>
+                </a:solidFill>
+                <a:latin typeface="PingFang TC"/>
+              </a:rPr>
+              <a:t>window direct：直接輸入外部溫濕度、日照與開窗比例</a:t>
+            </a:r>
+          </a:p>
+          <a:p>
+            <a:pPr>
+              <a:spcAft>
+                <a:spcPts val="300"/>
+              </a:spcAft>
+              <a:defRPr sz="1200">
+                <a:solidFill>
+                  <a:srgbClr val="192028"/>
+                </a:solidFill>
+                <a:latin typeface="PingFang TC"/>
+              </a:defRPr>
+            </a:pPr>
+            <a:r>
+              <a:rPr sz="1200" b="0">
+                <a:solidFill>
+                  <a:srgbClr val="192028"/>
+                </a:solidFill>
+                <a:latin typeface="PingFang TC"/>
+              </a:rPr>
+              <a:t>rank actions：針對指定座標與目標排序註冊設備操作</a:t>
             </a:r>
           </a:p>
         </p:txBody>

--- a/docs/papers/thesis/thesis_presentation_zh.pptx
+++ b/docs/papers/thesis/thesis_presentation_zh.pptx
@@ -21063,14 +21063,14 @@
                 </a:solidFill>
                 <a:latin typeface="PingFang TC"/>
               </a:rPr>
-              <a:t>感測器校正與影響學習</a:t>
+              <a:t>模型學習、推論與推薦資料流</a:t>
             </a:r>
           </a:p>
         </p:txBody>
       </p:sp>
       <p:pic>
         <p:nvPicPr>
-          <p:cNvPr id="4" name="Picture 3" descr="感測器校正與學習流程.png"/>
+          <p:cNvPr id="4" name="Picture 3" descr="模型學習推論與推薦資料流.png"/>
           <p:cNvPicPr>
             <a:picLocks noChangeAspect="1"/>
           </p:cNvPicPr>
@@ -21084,8 +21084,8 @@
         </p:blipFill>
         <p:spPr>
           <a:xfrm>
-            <a:off x="640080" y="1234440"/>
-            <a:ext cx="5760720" cy="4800600"/>
+            <a:off x="411480" y="1024128"/>
+            <a:ext cx="11384280" cy="5230368"/>
           </a:xfrm>
           <a:prstGeom prst="rect">
             <a:avLst/>
@@ -21095,117 +21095,6 @@
       <p:sp>
         <p:nvSpPr>
           <p:cNvPr id="5" name="TextBox 4"/>
-          <p:cNvSpPr txBox="1"/>
-          <p:nvPr/>
-        </p:nvSpPr>
-        <p:spPr>
-          <a:xfrm>
-            <a:off x="6583680" y="1417320"/>
-            <a:ext cx="4572000" cy="4572000"/>
-          </a:xfrm>
-          <a:prstGeom prst="rect">
-            <a:avLst/>
-          </a:prstGeom>
-          <a:noFill/>
-        </p:spPr>
-        <p:txBody>
-          <a:bodyPr wrap="square">
-            <a:spAutoFit/>
-          </a:bodyPr>
-          <a:lstStyle/>
-          <a:p>
-            <a:pPr>
-              <a:spcAft>
-                <a:spcPts val="800"/>
-              </a:spcAft>
-              <a:defRPr sz="1700">
-                <a:solidFill>
-                  <a:srgbClr val="192028"/>
-                </a:solidFill>
-                <a:latin typeface="PingFang TC"/>
-              </a:defRPr>
-            </a:pPr>
-            <a:r>
-              <a:rPr sz="1700" b="0">
-                <a:solidFill>
-                  <a:srgbClr val="192028"/>
-                </a:solidFill>
-                <a:latin typeface="PingFang TC"/>
-              </a:rPr>
-              <a:t>先用 8 顆角落感測器比較預測值與觀測值</a:t>
-            </a:r>
-          </a:p>
-          <a:p>
-            <a:pPr>
-              <a:spcAft>
-                <a:spcPts val="800"/>
-              </a:spcAft>
-              <a:defRPr sz="1700">
-                <a:solidFill>
-                  <a:srgbClr val="192028"/>
-                </a:solidFill>
-                <a:latin typeface="PingFang TC"/>
-              </a:defRPr>
-            </a:pPr>
-            <a:r>
-              <a:rPr sz="1700" b="0">
-                <a:solidFill>
-                  <a:srgbClr val="192028"/>
-                </a:solidFill>
-                <a:latin typeface="PingFang TC"/>
-              </a:rPr>
-              <a:t>用殘差校準 active device power scale</a:t>
-            </a:r>
-          </a:p>
-          <a:p>
-            <a:pPr>
-              <a:spcAft>
-                <a:spcPts val="800"/>
-              </a:spcAft>
-              <a:defRPr sz="1700">
-                <a:solidFill>
-                  <a:srgbClr val="192028"/>
-                </a:solidFill>
-                <a:latin typeface="PingFang TC"/>
-              </a:defRPr>
-            </a:pPr>
-            <a:r>
-              <a:rPr sz="1700" b="0">
-                <a:solidFill>
-                  <a:srgbClr val="192028"/>
-                </a:solidFill>
-                <a:latin typeface="PingFang TC"/>
-              </a:rPr>
-              <a:t>再擬合 trilinear residual correction</a:t>
-            </a:r>
-          </a:p>
-          <a:p>
-            <a:pPr>
-              <a:spcAft>
-                <a:spcPts val="800"/>
-              </a:spcAft>
-              <a:defRPr sz="1700">
-                <a:solidFill>
-                  <a:srgbClr val="192028"/>
-                </a:solidFill>
-                <a:latin typeface="PingFang TC"/>
-              </a:defRPr>
-            </a:pPr>
-            <a:r>
-              <a:rPr sz="1700" b="0">
-                <a:solidFill>
-                  <a:srgbClr val="192028"/>
-                </a:solidFill>
-                <a:latin typeface="PingFang TC"/>
-              </a:rPr>
-              <a:t>before/after observations 另外用來學非連網裝置影響係數</a:t>
-            </a:r>
-          </a:p>
-        </p:txBody>
-      </p:sp>
-      <p:sp>
-        <p:nvSpPr>
-          <p:cNvPr id="6" name="TextBox 5"/>
           <p:cNvSpPr txBox="1"/>
           <p:nvPr/>
         </p:nvSpPr>
@@ -21446,7 +21335,7 @@
                 </a:solidFill>
                 <a:latin typeface="PingFang TC"/>
               </a:rPr>
-              <a:t>initialize：註冊環境、設備、家具與 baseline</a:t>
+              <a:t>initialize：設定 scenario、baseline、外部邊界、設備/家具、時間與 estimator</a:t>
             </a:r>
           </a:p>
           <a:p>

--- a/docs/papers/thesis/thesis_presentation_zh.pptx
+++ b/docs/papers/thesis/thesis_presentation_zh.pptx
@@ -20923,7 +20923,7 @@
                 </a:solidFill>
                 <a:latin typeface="PingFang TC"/>
               </a:rPr>
-              <a:t>控制推薦在 target zone 上評分與排序</a:t>
+              <a:t>推薦必須先有 sample / cluster 與三因子目標</a:t>
             </a:r>
           </a:p>
         </p:txBody>
@@ -21423,7 +21423,7 @@
                 </a:solidFill>
                 <a:latin typeface="PingFang TC"/>
               </a:rPr>
-              <a:t>rank actions：針對指定座標與目標排序註冊設備操作</a:t>
+              <a:t>rank actions：指定座標 sample + T/H/L 目標後才排序註冊設備操作</a:t>
             </a:r>
           </a:p>
         </p:txBody>

--- a/docs/papers/thesis/thesis_presentation_zh.pptx
+++ b/docs/papers/thesis/thesis_presentation_zh.pptx
@@ -3897,7 +3897,7 @@
                 </a:solidFill>
                 <a:latin typeface="Noto Sans TC"/>
               </a:rPr>
-              <a:t>• Illuminance: 2.0835</a:t>
+              <a:t>• Illuminance: 2.0269</a:t>
             </a:r>
           </a:p>
         </p:txBody>
@@ -4168,8 +4168,8 @@
         </p:blipFill>
         <p:spPr>
           <a:xfrm>
-            <a:off x="4297680" y="1737360"/>
-            <a:ext cx="3474720" cy="3474720"/>
+            <a:off x="4297680" y="1750872"/>
+            <a:ext cx="3474720" cy="3447694"/>
           </a:xfrm>
           <a:prstGeom prst="rect">
             <a:avLst/>
@@ -4192,8 +4192,8 @@
         </p:blipFill>
         <p:spPr>
           <a:xfrm>
-            <a:off x="7955279" y="1737360"/>
-            <a:ext cx="3474720" cy="3474720"/>
+            <a:off x="7955279" y="1750872"/>
+            <a:ext cx="3474720" cy="3447694"/>
           </a:xfrm>
           <a:prstGeom prst="rect">
             <a:avLst/>
@@ -4630,7 +4630,7 @@
                 </a:solidFill>
                 <a:latin typeface="Noto Sans TC"/>
               </a:rPr>
-              <a:t>• Default hybrid MAE: T=0.0023, H=0.0041, L=0.1675</a:t>
+              <a:t>• Default hybrid MAE: T=0.0020, H=0.0051, L=0.1370</a:t>
             </a:r>
           </a:p>
           <a:p>
@@ -4655,7 +4655,7 @@
                 </a:solidFill>
                 <a:latin typeface="Noto Sans TC"/>
               </a:rPr>
-              <a:t>• No-Fourier hybrid MAE: T=0.0022, H=0.0045, L=0.1675</a:t>
+              <a:t>• No-Fourier hybrid MAE: T=0.0021, H=0.0057, L=0.1370</a:t>
             </a:r>
           </a:p>
           <a:p>
@@ -4680,7 +4680,7 @@
                 </a:solidFill>
                 <a:latin typeface="Noto Sans TC"/>
               </a:rPr>
-              <a:t>• LOO avg hybrid MAE: T=0.0017, H=0.0055, L=0.1581</a:t>
+              <a:t>• LOO avg hybrid MAE: T=0.0017, H=0.0059, L=0.1407</a:t>
             </a:r>
           </a:p>
           <a:p>
@@ -4705,7 +4705,7 @@
                 </a:solidFill>
                 <a:latin typeface="Noto Sans TC"/>
               </a:rPr>
-              <a:t>• LOO reduction: T 96.41%, H 96.88%, L 92.41%</a:t>
+              <a:t>• LOO reduction: T 96.41%, H 96.66%, L 93.06%</a:t>
             </a:r>
           </a:p>
         </p:txBody>
@@ -5516,7 +5516,7 @@
                 </a:solidFill>
                 <a:latin typeface="Noto Sans TC"/>
               </a:rPr>
-              <a:t>• 真實臥室快照校正後 pillow MAE: T=0.1676, H=0.3939, L=21.3753</a:t>
+              <a:t>• 真實臥室快照校正後 pillow MAE: T=0.1676, H=0.3939, L=16.6450</a:t>
             </a:r>
           </a:p>
           <a:p>
@@ -6026,7 +6026,7 @@
                 </a:solidFill>
                 <a:latin typeface="Noto Sans TC"/>
               </a:rPr>
-              <a:t>• 各資料來源支援的 claim boundary 已拆開說明</a:t>
+              <a:t>• 各資料來源支援的驗證範圍已拆開說明</a:t>
             </a:r>
           </a:p>
           <a:p>
@@ -6620,7 +6620,7 @@
                 </a:solidFill>
                 <a:latin typeface="Noto Sans TC"/>
               </a:rPr>
-              <a:t>公式、符號意義、限制與可主張範圍</a:t>
+              <a:t>公式、符號意義、假設與限制</a:t>
             </a:r>
           </a:p>
         </p:txBody>
@@ -7122,7 +7122,7 @@
                 </a:solidFill>
                 <a:latin typeface="Noto Sans TC"/>
               </a:rPr>
-              <a:t>主張邊界</a:t>
+              <a:t>適用範圍</a:t>
             </a:r>
           </a:p>
         </p:txBody>
@@ -7156,15 +7156,15 @@
               <a:spcAft>
                 <a:spcPts val="400"/>
               </a:spcAft>
-              <a:defRPr sz="1200">
-                <a:solidFill>
-                  <a:srgbClr val="1E2733"/>
-                </a:solidFill>
-                <a:latin typeface="Noto Sans TC"/>
-              </a:defRPr>
-            </a:pPr>
-            <a:r>
-              <a:rPr sz="1200" b="0">
+              <a:defRPr sz="1100">
+                <a:solidFill>
+                  <a:srgbClr val="1E2733"/>
+                </a:solidFill>
+                <a:latin typeface="Noto Sans TC"/>
+              </a:defRPr>
+            </a:pPr>
+            <a:r>
+              <a:rPr sz="1100" b="0">
                 <a:solidFill>
                   <a:srgbClr val="1E2733"/>
                 </a:solidFill>
@@ -7181,15 +7181,15 @@
               <a:spcAft>
                 <a:spcPts val="400"/>
               </a:spcAft>
-              <a:defRPr sz="1200">
-                <a:solidFill>
-                  <a:srgbClr val="1E2733"/>
-                </a:solidFill>
-                <a:latin typeface="Noto Sans TC"/>
-              </a:defRPr>
-            </a:pPr>
-            <a:r>
-              <a:rPr sz="1200" b="0">
+              <a:defRPr sz="1100">
+                <a:solidFill>
+                  <a:srgbClr val="1E2733"/>
+                </a:solidFill>
+                <a:latin typeface="Noto Sans TC"/>
+              </a:defRPr>
+            </a:pPr>
+            <a:r>
+              <a:rPr sz="1100" b="0">
                 <a:solidFill>
                   <a:srgbClr val="1E2733"/>
                 </a:solidFill>
@@ -7206,15 +7206,15 @@
               <a:spcAft>
                 <a:spcPts val="400"/>
               </a:spcAft>
-              <a:defRPr sz="1200">
-                <a:solidFill>
-                  <a:srgbClr val="1E2733"/>
-                </a:solidFill>
-                <a:latin typeface="Noto Sans TC"/>
-              </a:defRPr>
-            </a:pPr>
-            <a:r>
-              <a:rPr sz="1200" b="0">
+              <a:defRPr sz="1100">
+                <a:solidFill>
+                  <a:srgbClr val="1E2733"/>
+                </a:solidFill>
+                <a:latin typeface="Noto Sans TC"/>
+              </a:defRPr>
+            </a:pPr>
+            <a:r>
+              <a:rPr sz="1100" b="0">
                 <a:solidFill>
                   <a:srgbClr val="1E2733"/>
                 </a:solidFill>
@@ -7231,15 +7231,15 @@
               <a:spcAft>
                 <a:spcPts val="400"/>
               </a:spcAft>
-              <a:defRPr sz="1200">
-                <a:solidFill>
-                  <a:srgbClr val="1E2733"/>
-                </a:solidFill>
-                <a:latin typeface="Noto Sans TC"/>
-              </a:defRPr>
-            </a:pPr>
-            <a:r>
-              <a:rPr sz="1200" b="0">
+              <a:defRPr sz="1100">
+                <a:solidFill>
+                  <a:srgbClr val="1E2733"/>
+                </a:solidFill>
+                <a:latin typeface="Noto Sans TC"/>
+              </a:defRPr>
+            </a:pPr>
+            <a:r>
+              <a:rPr sz="1100" b="0">
                 <a:solidFill>
                   <a:srgbClr val="1E2733"/>
                 </a:solidFill>
@@ -7256,21 +7256,46 @@
               <a:spcAft>
                 <a:spcPts val="400"/>
               </a:spcAft>
-              <a:defRPr sz="1200">
-                <a:solidFill>
-                  <a:srgbClr val="1E2733"/>
-                </a:solidFill>
-                <a:latin typeface="Noto Sans TC"/>
-              </a:defRPr>
-            </a:pPr>
-            <a:r>
-              <a:rPr sz="1200" b="0">
-                <a:solidFill>
-                  <a:srgbClr val="1E2733"/>
-                </a:solidFill>
-                <a:latin typeface="Noto Sans TC"/>
-              </a:rPr>
-              <a:t>• 所以報告時要用「估計／推估」，不要說「量測到」</a:t>
+              <a:defRPr sz="1100">
+                <a:solidFill>
+                  <a:srgbClr val="1E2733"/>
+                </a:solidFill>
+                <a:latin typeface="Noto Sans TC"/>
+              </a:defRPr>
+            </a:pPr>
+            <a:r>
+              <a:rPr sz="1100" b="0">
+                <a:solidFill>
+                  <a:srgbClr val="1E2733"/>
+                </a:solidFill>
+                <a:latin typeface="Noto Sans TC"/>
+              </a:rPr>
+              <a:t>• 其他採樣點為模型估計值，非直接量測值</a:t>
+            </a:r>
+          </a:p>
+          <a:p>
+            <a:pPr>
+              <a:lnSpc>
+                <a:spcPct val="114000"/>
+              </a:lnSpc>
+              <a:spcAft>
+                <a:spcPts val="400"/>
+              </a:spcAft>
+              <a:defRPr sz="1100">
+                <a:solidFill>
+                  <a:srgbClr val="1E2733"/>
+                </a:solidFill>
+                <a:latin typeface="Noto Sans TC"/>
+              </a:defRPr>
+            </a:pPr>
+            <a:r>
+              <a:rPr sz="1100" b="0">
+                <a:solidFill>
+                  <a:srgbClr val="1E2733"/>
+                </a:solidFill>
+                <a:latin typeface="Noto Sans TC"/>
+              </a:rPr>
+              <a:t>• 數值例：p=(2,1,1.2), t=10 min → (T,H,L)=(27.4°C,60%,280 lux)</a:t>
             </a:r>
           </a:p>
         </p:txBody>
@@ -7489,7 +7514,7 @@
                 </a:solidFill>
                 <a:latin typeface="Noto Sans TC"/>
               </a:rPr>
-              <a:t>公式、符號意義、限制與可主張範圍</a:t>
+              <a:t>公式、符號意義、假設與限制</a:t>
             </a:r>
           </a:p>
         </p:txBody>
@@ -8114,7 +8139,61 @@
                 </a:solidFill>
                 <a:latin typeface="Noto Sans TC"/>
               </a:rPr>
-              <a:t>• 但 N_T、N_H、N_L 的物理項目分開設計</a:t>
+              <a:t>• 但 N</a:t>
+            </a:r>
+            <a:r>
+              <a:rPr sz="800" baseline="-25000">
+                <a:solidFill>
+                  <a:srgbClr val="1E2733"/>
+                </a:solidFill>
+                <a:latin typeface="Noto Sans TC"/>
+              </a:rPr>
+              <a:t>T</a:t>
+            </a:r>
+            <a:r>
+              <a:rPr sz="1200" b="0">
+                <a:solidFill>
+                  <a:srgbClr val="1E2733"/>
+                </a:solidFill>
+                <a:latin typeface="Noto Sans TC"/>
+              </a:rPr>
+              <a:t>、N</a:t>
+            </a:r>
+            <a:r>
+              <a:rPr sz="800" baseline="-25000">
+                <a:solidFill>
+                  <a:srgbClr val="1E2733"/>
+                </a:solidFill>
+                <a:latin typeface="Noto Sans TC"/>
+              </a:rPr>
+              <a:t>H</a:t>
+            </a:r>
+            <a:r>
+              <a:rPr sz="1200" b="0">
+                <a:solidFill>
+                  <a:srgbClr val="1E2733"/>
+                </a:solidFill>
+                <a:latin typeface="Noto Sans TC"/>
+              </a:rPr>
+              <a:t>、N</a:t>
+            </a:r>
+            <a:r>
+              <a:rPr sz="800" baseline="-25000">
+                <a:solidFill>
+                  <a:srgbClr val="1E2733"/>
+                </a:solidFill>
+                <a:latin typeface="Noto Sans TC"/>
+              </a:rPr>
+              <a:t>L</a:t>
+            </a:r>
+            <a:r>
+              <a:rPr sz="1200" b="0">
+                <a:solidFill>
+                  <a:srgbClr val="1E2733"/>
+                </a:solidFill>
+                <a:latin typeface="Noto Sans TC"/>
+              </a:rPr>
+              <a:t> 的物理項目分開設計</a:t>
             </a:r>
           </a:p>
           <a:p>
@@ -8140,6 +8219,85 @@
                 <a:latin typeface="Noto Sans TC"/>
               </a:rPr>
               <a:t>• 這能回應「不能把同一套 bulk/local 硬套三種物理量」</a:t>
+            </a:r>
+          </a:p>
+          <a:p>
+            <a:pPr>
+              <a:lnSpc>
+                <a:spcPct val="114000"/>
+              </a:lnSpc>
+              <a:spcAft>
+                <a:spcPts val="400"/>
+              </a:spcAft>
+              <a:defRPr sz="1200">
+                <a:solidFill>
+                  <a:srgbClr val="1E2733"/>
+                </a:solidFill>
+                <a:latin typeface="Noto Sans TC"/>
+              </a:defRPr>
+            </a:pPr>
+            <a:r>
+              <a:rPr sz="1200" b="0">
+                <a:solidFill>
+                  <a:srgbClr val="1E2733"/>
+                </a:solidFill>
+                <a:latin typeface="Noto Sans TC"/>
+              </a:rPr>
+              <a:t>• 數值例：N</a:t>
+            </a:r>
+            <a:r>
+              <a:rPr sz="800" baseline="-25000">
+                <a:solidFill>
+                  <a:srgbClr val="1E2733"/>
+                </a:solidFill>
+                <a:latin typeface="Noto Sans TC"/>
+              </a:rPr>
+              <a:t>T</a:t>
+            </a:r>
+            <a:r>
+              <a:rPr sz="1200" b="0">
+                <a:solidFill>
+                  <a:srgbClr val="1E2733"/>
+                </a:solidFill>
+                <a:latin typeface="Noto Sans TC"/>
+              </a:rPr>
+              <a:t>=27.0, C</a:t>
+            </a:r>
+            <a:r>
+              <a:rPr sz="800" baseline="-25000">
+                <a:solidFill>
+                  <a:srgbClr val="1E2733"/>
+                </a:solidFill>
+                <a:latin typeface="Noto Sans TC"/>
+              </a:rPr>
+              <a:t>T</a:t>
+            </a:r>
+            <a:r>
+              <a:rPr sz="1200" b="0">
+                <a:solidFill>
+                  <a:srgbClr val="1E2733"/>
+                </a:solidFill>
+                <a:latin typeface="Noto Sans TC"/>
+              </a:rPr>
+              <a:t>=-0.4 → F̂</a:t>
+            </a:r>
+            <a:r>
+              <a:rPr sz="800" baseline="-25000">
+                <a:solidFill>
+                  <a:srgbClr val="1E2733"/>
+                </a:solidFill>
+                <a:latin typeface="Noto Sans TC"/>
+              </a:rPr>
+              <a:t>T</a:t>
+            </a:r>
+            <a:r>
+              <a:rPr sz="1200" b="0">
+                <a:solidFill>
+                  <a:srgbClr val="1E2733"/>
+                </a:solidFill>
+                <a:latin typeface="Noto Sans TC"/>
+              </a:rPr>
+              <a:t>=26.6°C</a:t>
             </a:r>
           </a:p>
         </p:txBody>
@@ -8358,7 +8516,7 @@
                 </a:solidFill>
                 <a:latin typeface="Noto Sans TC"/>
               </a:rPr>
-              <a:t>公式、符號意義、限制與可主張範圍</a:t>
+              <a:t>公式、符號意義、假設與限制</a:t>
             </a:r>
           </a:p>
         </p:txBody>
@@ -9009,6 +9167,31 @@
                 <a:latin typeface="Noto Sans TC"/>
               </a:rPr>
               <a:t>• 所有設備影響都是在 b₀ 上加減偏移</a:t>
+            </a:r>
+          </a:p>
+          <a:p>
+            <a:pPr>
+              <a:lnSpc>
+                <a:spcPct val="114000"/>
+              </a:lnSpc>
+              <a:spcAft>
+                <a:spcPts val="400"/>
+              </a:spcAft>
+              <a:defRPr sz="1200">
+                <a:solidFill>
+                  <a:srgbClr val="1E2733"/>
+                </a:solidFill>
+                <a:latin typeface="Noto Sans TC"/>
+              </a:defRPr>
+            </a:pPr>
+            <a:r>
+              <a:rPr sz="1200" b="0">
+                <a:solidFill>
+                  <a:srgbClr val="1E2733"/>
+                </a:solidFill>
+                <a:latin typeface="Noto Sans TC"/>
+              </a:rPr>
+              <a:t>• 數值例：b₀=(29°C,67%,90 lux)</a:t>
             </a:r>
           </a:p>
         </p:txBody>
@@ -9227,7 +9410,7 @@
                 </a:solidFill>
                 <a:latin typeface="Noto Sans TC"/>
               </a:rPr>
-              <a:t>公式、符號意義、限制與可主張範圍</a:t>
+              <a:t>公式、符號意義、假設與限制</a:t>
             </a:r>
           </a:p>
         </p:txBody>
@@ -9452,7 +9635,25 @@
                 </a:solidFill>
                 <a:latin typeface="Cambria Math"/>
               </a:rPr>
-              <a:t>T₀ = (1/|S|) ∑ₛ∈S Oₜ(pₛ, t</a:t>
+              <a:t>T₀ = (1/|S|) ∑ₛ∈S O</a:t>
+            </a:r>
+            <a:r>
+              <a:rPr sz="1000" baseline="-25000">
+                <a:solidFill>
+                  <a:srgbClr val="1E2733"/>
+                </a:solidFill>
+                <a:latin typeface="Cambria Math"/>
+              </a:rPr>
+              <a:t>T</a:t>
+            </a:r>
+            <a:r>
+              <a:rPr sz="1400" b="0">
+                <a:solidFill>
+                  <a:srgbClr val="1E2733"/>
+                </a:solidFill>
+                <a:latin typeface="Cambria Math"/>
+              </a:rPr>
+              <a:t>(pₛ, t</a:t>
             </a:r>
             <a:r>
               <a:rPr sz="1000" baseline="-25000">
@@ -9495,7 +9696,25 @@
                 </a:solidFill>
                 <a:latin typeface="Cambria Math"/>
               </a:rPr>
-              <a:t>H₀ = (1/|S|) ∑ₛ∈S Oₕ(pₛ, t</a:t>
+              <a:t>H₀ = (1/|S|) ∑ₛ∈S O</a:t>
+            </a:r>
+            <a:r>
+              <a:rPr sz="1000" baseline="-25000">
+                <a:solidFill>
+                  <a:srgbClr val="1E2733"/>
+                </a:solidFill>
+                <a:latin typeface="Cambria Math"/>
+              </a:rPr>
+              <a:t>H</a:t>
+            </a:r>
+            <a:r>
+              <a:rPr sz="1400" b="0">
+                <a:solidFill>
+                  <a:srgbClr val="1E2733"/>
+                </a:solidFill>
+                <a:latin typeface="Cambria Math"/>
+              </a:rPr>
+              <a:t>(pₛ, t</a:t>
             </a:r>
             <a:r>
               <a:rPr sz="1000" baseline="-25000">
@@ -9538,7 +9757,25 @@
                 </a:solidFill>
                 <a:latin typeface="Cambria Math"/>
               </a:rPr>
-              <a:t>L₀ = (1/|S|) ∑ₛ∈S Oₗ(pₛ, t</a:t>
+              <a:t>L₀ = (1/|S|) ∑ₛ∈S O</a:t>
+            </a:r>
+            <a:r>
+              <a:rPr sz="1000" baseline="-25000">
+                <a:solidFill>
+                  <a:srgbClr val="1E2733"/>
+                </a:solidFill>
+                <a:latin typeface="Cambria Math"/>
+              </a:rPr>
+              <a:t>L</a:t>
+            </a:r>
+            <a:r>
+              <a:rPr sz="1400" b="0">
+                <a:solidFill>
+                  <a:srgbClr val="1E2733"/>
+                </a:solidFill>
+                <a:latin typeface="Cambria Math"/>
+              </a:rPr>
+              <a:t>(pₛ, t</a:t>
             </a:r>
             <a:r>
               <a:rPr sz="1000" baseline="-25000">
@@ -9949,7 +10186,32 @@
                 </a:solidFill>
                 <a:latin typeface="Noto Sans TC"/>
               </a:rPr>
-              <a:t>• 報告時要明確說出資料來源是哪一種</a:t>
+              <a:t>• baseline 資料來源需在情境設定中明確標示</a:t>
+            </a:r>
+          </a:p>
+          <a:p>
+            <a:pPr>
+              <a:lnSpc>
+                <a:spcPct val="114000"/>
+              </a:lnSpc>
+              <a:spcAft>
+                <a:spcPts val="400"/>
+              </a:spcAft>
+              <a:defRPr sz="1200">
+                <a:solidFill>
+                  <a:srgbClr val="1E2733"/>
+                </a:solidFill>
+                <a:latin typeface="Noto Sans TC"/>
+              </a:defRPr>
+            </a:pPr>
+            <a:r>
+              <a:rPr sz="1200" b="0">
+                <a:solidFill>
+                  <a:srgbClr val="1E2733"/>
+                </a:solidFill>
+                <a:latin typeface="Noto Sans TC"/>
+              </a:rPr>
+              <a:t>• 數值例：ΣT=232°C, |S|=8 → T₀=29°C</a:t>
             </a:r>
           </a:p>
         </p:txBody>
@@ -10168,7 +10430,7 @@
                 </a:solidFill>
                 <a:latin typeface="Noto Sans TC"/>
               </a:rPr>
-              <a:t>公式、符號意義、限制與可主張範圍</a:t>
+              <a:t>公式、符號意義、假設與限制</a:t>
             </a:r>
           </a:p>
         </p:txBody>
@@ -10819,6 +11081,31 @@
                 <a:latin typeface="Noto Sans TC"/>
               </a:rPr>
               <a:t>• 所以高度不是三種變數完全相同地使用</a:t>
+            </a:r>
+          </a:p>
+          <a:p>
+            <a:pPr>
+              <a:lnSpc>
+                <a:spcPct val="114000"/>
+              </a:lnSpc>
+              <a:spcAft>
+                <a:spcPts val="400"/>
+              </a:spcAft>
+              <a:defRPr sz="1200">
+                <a:solidFill>
+                  <a:srgbClr val="1E2733"/>
+                </a:solidFill>
+                <a:latin typeface="Noto Sans TC"/>
+              </a:defRPr>
+            </a:pPr>
+            <a:r>
+              <a:rPr sz="1200" b="0">
+                <a:solidFill>
+                  <a:srgbClr val="1E2733"/>
+                </a:solidFill>
+                <a:latin typeface="Noto Sans TC"/>
+              </a:rPr>
+              <a:t>• 數值例：z=1.2 m, Hᵣ=3 m → ζ=-0.1</a:t>
             </a:r>
           </a:p>
         </p:txBody>
@@ -12047,7 +12334,7 @@
                 </a:solidFill>
                 <a:latin typeface="Noto Sans TC"/>
               </a:rPr>
-              <a:t>公式、符號意義、限制與可主張範圍</a:t>
+              <a:t>公式、符號意義、假設與限制</a:t>
             </a:r>
           </a:p>
         </p:txBody>
@@ -12698,6 +12985,31 @@
                 <a:latin typeface="Noto Sans TC"/>
               </a:rPr>
               <a:t>• 目標是表達主要時間趨勢</a:t>
+            </a:r>
+          </a:p>
+          <a:p>
+            <a:pPr>
+              <a:lnSpc>
+                <a:spcPct val="114000"/>
+              </a:lnSpc>
+              <a:spcAft>
+                <a:spcPts val="400"/>
+              </a:spcAft>
+              <a:defRPr sz="1200">
+                <a:solidFill>
+                  <a:srgbClr val="1E2733"/>
+                </a:solidFill>
+                <a:latin typeface="Noto Sans TC"/>
+              </a:defRPr>
+            </a:pPr>
+            <a:r>
+              <a:rPr sz="1200" b="0">
+                <a:solidFill>
+                  <a:srgbClr val="1E2733"/>
+                </a:solidFill>
+                <a:latin typeface="Noto Sans TC"/>
+              </a:rPr>
+              <a:t>• 數值例：a=1, t=10, τ=10 → A=1-e^-1=0.632</a:t>
             </a:r>
           </a:p>
         </p:txBody>
@@ -12916,7 +13228,7 @@
                 </a:solidFill>
                 <a:latin typeface="Noto Sans TC"/>
               </a:rPr>
-              <a:t>公式、符號意義、限制與可主張範圍</a:t>
+              <a:t>公式、符號意義、假設與限制</a:t>
             </a:r>
           </a:p>
         </p:txBody>
@@ -13567,6 +13879,31 @@
                 <a:latin typeface="Noto Sans TC"/>
               </a:rPr>
               <a:t>• 但全室平均項仍由各變數自己的 B 項處理</a:t>
+            </a:r>
+          </a:p>
+          <a:p>
+            <a:pPr>
+              <a:lnSpc>
+                <a:spcPct val="114000"/>
+              </a:lnSpc>
+              <a:spcAft>
+                <a:spcPts val="400"/>
+              </a:spcAft>
+              <a:defRPr sz="1200">
+                <a:solidFill>
+                  <a:srgbClr val="1E2733"/>
+                </a:solidFill>
+                <a:latin typeface="Noto Sans TC"/>
+              </a:defRPr>
+            </a:pPr>
+            <a:r>
+              <a:rPr sz="1200" b="0">
+                <a:solidFill>
+                  <a:srgbClr val="1E2733"/>
+                </a:solidFill>
+                <a:latin typeface="Noto Sans TC"/>
+              </a:rPr>
+              <a:t>• 數值例：A=0.8,R=0.5,D=0.9,V=1 → E=0.36</a:t>
             </a:r>
           </a:p>
         </p:txBody>
@@ -13785,7 +14122,7 @@
                 </a:solidFill>
                 <a:latin typeface="Noto Sans TC"/>
               </a:rPr>
-              <a:t>公式、符號意義、限制與可主張範圍</a:t>
+              <a:t>公式、符號意義、假設與限制</a:t>
             </a:r>
           </a:p>
         </p:txBody>
@@ -14010,7 +14347,79 @@
                 </a:solidFill>
                 <a:latin typeface="Cambria Math"/>
               </a:rPr>
-              <a:t>N_T(p,t) = T₀ + B_T(t) + S_T(p,t) + γ_T M(t) ζ</a:t>
+              <a:t>N</a:t>
+            </a:r>
+            <a:r>
+              <a:rPr sz="1000" baseline="-25000">
+                <a:solidFill>
+                  <a:srgbClr val="1E2733"/>
+                </a:solidFill>
+                <a:latin typeface="Cambria Math"/>
+              </a:rPr>
+              <a:t>T</a:t>
+            </a:r>
+            <a:r>
+              <a:rPr sz="1400" b="0">
+                <a:solidFill>
+                  <a:srgbClr val="1E2733"/>
+                </a:solidFill>
+                <a:latin typeface="Cambria Math"/>
+              </a:rPr>
+              <a:t>(p,t) = T₀ + B</a:t>
+            </a:r>
+            <a:r>
+              <a:rPr sz="1000" baseline="-25000">
+                <a:solidFill>
+                  <a:srgbClr val="1E2733"/>
+                </a:solidFill>
+                <a:latin typeface="Cambria Math"/>
+              </a:rPr>
+              <a:t>T</a:t>
+            </a:r>
+            <a:r>
+              <a:rPr sz="1400" b="0">
+                <a:solidFill>
+                  <a:srgbClr val="1E2733"/>
+                </a:solidFill>
+                <a:latin typeface="Cambria Math"/>
+              </a:rPr>
+              <a:t>(t) + S</a:t>
+            </a:r>
+            <a:r>
+              <a:rPr sz="1000" baseline="-25000">
+                <a:solidFill>
+                  <a:srgbClr val="1E2733"/>
+                </a:solidFill>
+                <a:latin typeface="Cambria Math"/>
+              </a:rPr>
+              <a:t>T</a:t>
+            </a:r>
+            <a:r>
+              <a:rPr sz="1400" b="0">
+                <a:solidFill>
+                  <a:srgbClr val="1E2733"/>
+                </a:solidFill>
+                <a:latin typeface="Cambria Math"/>
+              </a:rPr>
+              <a:t>(p,t) + γ</a:t>
+            </a:r>
+            <a:r>
+              <a:rPr sz="1000" baseline="-25000">
+                <a:solidFill>
+                  <a:srgbClr val="1E2733"/>
+                </a:solidFill>
+                <a:latin typeface="Cambria Math"/>
+              </a:rPr>
+              <a:t>T</a:t>
+            </a:r>
+            <a:r>
+              <a:rPr sz="1400" b="0">
+                <a:solidFill>
+                  <a:srgbClr val="1E2733"/>
+                </a:solidFill>
+                <a:latin typeface="Cambria Math"/>
+              </a:rPr>
+              <a:t> M(t) ζ</a:t>
             </a:r>
           </a:p>
           <a:p>
@@ -14060,7 +14469,25 @@
                 </a:solidFill>
                 <a:latin typeface="Cambria Math"/>
               </a:rPr>
-              <a:t>B_T(t)：全室平均熱響應</a:t>
+              <a:t>B</a:t>
+            </a:r>
+            <a:r>
+              <a:rPr sz="1000" baseline="-25000">
+                <a:solidFill>
+                  <a:srgbClr val="1E2733"/>
+                </a:solidFill>
+                <a:latin typeface="Cambria Math"/>
+              </a:rPr>
+              <a:t>T</a:t>
+            </a:r>
+            <a:r>
+              <a:rPr sz="1400" b="0">
+                <a:solidFill>
+                  <a:srgbClr val="1E2733"/>
+                </a:solidFill>
+                <a:latin typeface="Cambria Math"/>
+              </a:rPr>
+              <a:t>(t)：全室平均熱響應</a:t>
             </a:r>
           </a:p>
           <a:p>
@@ -14085,7 +14512,25 @@
                 </a:solidFill>
                 <a:latin typeface="Cambria Math"/>
               </a:rPr>
-              <a:t>S_T(p,t)：局部空間熱響應</a:t>
+              <a:t>S</a:t>
+            </a:r>
+            <a:r>
+              <a:rPr sz="1000" baseline="-25000">
+                <a:solidFill>
+                  <a:srgbClr val="1E2733"/>
+                </a:solidFill>
+                <a:latin typeface="Cambria Math"/>
+              </a:rPr>
+              <a:t>T</a:t>
+            </a:r>
+            <a:r>
+              <a:rPr sz="1400" b="0">
+                <a:solidFill>
+                  <a:srgbClr val="1E2733"/>
+                </a:solidFill>
+                <a:latin typeface="Cambria Math"/>
+              </a:rPr>
+              <a:t>(p,t)：局部空間熱響應</a:t>
             </a:r>
           </a:p>
           <a:p>
@@ -14110,7 +14555,25 @@
                 </a:solidFill>
                 <a:latin typeface="Noto Sans TC"/>
               </a:rPr>
-              <a:t>• γ_T M(t)ζ：垂直溫度分層</a:t>
+              <a:t>• γ</a:t>
+            </a:r>
+            <a:r>
+              <a:rPr sz="800" baseline="-25000">
+                <a:solidFill>
+                  <a:srgbClr val="1E2733"/>
+                </a:solidFill>
+                <a:latin typeface="Noto Sans TC"/>
+              </a:rPr>
+              <a:t>T</a:t>
+            </a:r>
+            <a:r>
+              <a:rPr sz="1200" b="0">
+                <a:solidFill>
+                  <a:srgbClr val="1E2733"/>
+                </a:solidFill>
+                <a:latin typeface="Noto Sans TC"/>
+              </a:rPr>
+              <a:t> M(t)ζ：垂直溫度分層</a:t>
             </a:r>
           </a:p>
         </p:txBody>
@@ -14385,7 +14848,25 @@
                 </a:solidFill>
                 <a:latin typeface="Noto Sans TC"/>
               </a:rPr>
-              <a:t>• 所以保留 B_T 表示整體室溫移動</a:t>
+              <a:t>• 所以保留 B</a:t>
+            </a:r>
+            <a:r>
+              <a:rPr sz="800" baseline="-25000">
+                <a:solidFill>
+                  <a:srgbClr val="1E2733"/>
+                </a:solidFill>
+                <a:latin typeface="Noto Sans TC"/>
+              </a:rPr>
+              <a:t>T</a:t>
+            </a:r>
+            <a:r>
+              <a:rPr sz="1200" b="0">
+                <a:solidFill>
+                  <a:srgbClr val="1E2733"/>
+                </a:solidFill>
+                <a:latin typeface="Noto Sans TC"/>
+              </a:rPr>
+              <a:t> 表示整體室溫移動</a:t>
             </a:r>
           </a:p>
           <a:p>
@@ -14410,7 +14891,25 @@
                 </a:solidFill>
                 <a:latin typeface="Cambria Math"/>
               </a:rPr>
-              <a:t>S_T 再表達出風口、窗邊或燈具附近差異</a:t>
+              <a:t>S</a:t>
+            </a:r>
+            <a:r>
+              <a:rPr sz="1000" baseline="-25000">
+                <a:solidFill>
+                  <a:srgbClr val="1E2733"/>
+                </a:solidFill>
+                <a:latin typeface="Cambria Math"/>
+              </a:rPr>
+              <a:t>T</a:t>
+            </a:r>
+            <a:r>
+              <a:rPr sz="1400" b="0">
+                <a:solidFill>
+                  <a:srgbClr val="1E2733"/>
+                </a:solidFill>
+                <a:latin typeface="Cambria Math"/>
+              </a:rPr>
+              <a:t> 再表達出風口、窗邊或燈具附近差異</a:t>
             </a:r>
           </a:p>
           <a:p>
@@ -14436,6 +14935,31 @@
                 <a:latin typeface="Noto Sans TC"/>
               </a:rPr>
               <a:t>• 這是控制導向 reduced-order 熱場近似</a:t>
+            </a:r>
+          </a:p>
+          <a:p>
+            <a:pPr>
+              <a:lnSpc>
+                <a:spcPct val="114000"/>
+              </a:lnSpc>
+              <a:spcAft>
+                <a:spcPts val="400"/>
+              </a:spcAft>
+              <a:defRPr sz="1200">
+                <a:solidFill>
+                  <a:srgbClr val="1E2733"/>
+                </a:solidFill>
+                <a:latin typeface="Noto Sans TC"/>
+              </a:defRPr>
+            </a:pPr>
+            <a:r>
+              <a:rPr sz="1200" b="0">
+                <a:solidFill>
+                  <a:srgbClr val="1E2733"/>
+                </a:solidFill>
+                <a:latin typeface="Noto Sans TC"/>
+              </a:rPr>
+              <a:t>• 數值例：29-1.2-0.5+0.2(-0.1)=27.28°C</a:t>
             </a:r>
           </a:p>
         </p:txBody>
@@ -14654,7 +15178,7 @@
                 </a:solidFill>
                 <a:latin typeface="Noto Sans TC"/>
               </a:rPr>
-              <a:t>公式、符號意義、限制與可主張範圍</a:t>
+              <a:t>公式、符號意義、假設與限制</a:t>
             </a:r>
           </a:p>
         </p:txBody>
@@ -14879,7 +15403,79 @@
                 </a:solidFill>
                 <a:latin typeface="Cambria Math"/>
               </a:rPr>
-              <a:t>B_T(t) = B_ac,T(t) + B_win,T(t) + B_light,T(t)</a:t>
+              <a:t>B</a:t>
+            </a:r>
+            <a:r>
+              <a:rPr sz="1000" baseline="-25000">
+                <a:solidFill>
+                  <a:srgbClr val="1E2733"/>
+                </a:solidFill>
+                <a:latin typeface="Cambria Math"/>
+              </a:rPr>
+              <a:t>T</a:t>
+            </a:r>
+            <a:r>
+              <a:rPr sz="1400" b="0">
+                <a:solidFill>
+                  <a:srgbClr val="1E2733"/>
+                </a:solidFill>
+                <a:latin typeface="Cambria Math"/>
+              </a:rPr>
+              <a:t>(t) = B</a:t>
+            </a:r>
+            <a:r>
+              <a:rPr sz="1000" baseline="-25000">
+                <a:solidFill>
+                  <a:srgbClr val="1E2733"/>
+                </a:solidFill>
+                <a:latin typeface="Cambria Math"/>
+              </a:rPr>
+              <a:t>ac,T</a:t>
+            </a:r>
+            <a:r>
+              <a:rPr sz="1400" b="0">
+                <a:solidFill>
+                  <a:srgbClr val="1E2733"/>
+                </a:solidFill>
+                <a:latin typeface="Cambria Math"/>
+              </a:rPr>
+              <a:t>(t) + B</a:t>
+            </a:r>
+            <a:r>
+              <a:rPr sz="1000" baseline="-25000">
+                <a:solidFill>
+                  <a:srgbClr val="1E2733"/>
+                </a:solidFill>
+                <a:latin typeface="Cambria Math"/>
+              </a:rPr>
+              <a:t>win,T</a:t>
+            </a:r>
+            <a:r>
+              <a:rPr sz="1400" b="0">
+                <a:solidFill>
+                  <a:srgbClr val="1E2733"/>
+                </a:solidFill>
+                <a:latin typeface="Cambria Math"/>
+              </a:rPr>
+              <a:t>(t) + B</a:t>
+            </a:r>
+            <a:r>
+              <a:rPr sz="1000" baseline="-25000">
+                <a:solidFill>
+                  <a:srgbClr val="1E2733"/>
+                </a:solidFill>
+                <a:latin typeface="Cambria Math"/>
+              </a:rPr>
+              <a:t>light,T</a:t>
+            </a:r>
+            <a:r>
+              <a:rPr sz="1400" b="0">
+                <a:solidFill>
+                  <a:srgbClr val="1E2733"/>
+                </a:solidFill>
+                <a:latin typeface="Cambria Math"/>
+              </a:rPr>
+              <a:t>(t)</a:t>
             </a:r>
           </a:p>
           <a:p>
@@ -14904,7 +15500,79 @@
                 </a:solidFill>
                 <a:latin typeface="Cambria Math"/>
               </a:rPr>
-              <a:t>S_T(p,t) = S_ac,T(p,t) + S_win,T(p,t) + S_light,T(p,t)</a:t>
+              <a:t>S</a:t>
+            </a:r>
+            <a:r>
+              <a:rPr sz="1000" baseline="-25000">
+                <a:solidFill>
+                  <a:srgbClr val="1E2733"/>
+                </a:solidFill>
+                <a:latin typeface="Cambria Math"/>
+              </a:rPr>
+              <a:t>T</a:t>
+            </a:r>
+            <a:r>
+              <a:rPr sz="1400" b="0">
+                <a:solidFill>
+                  <a:srgbClr val="1E2733"/>
+                </a:solidFill>
+                <a:latin typeface="Cambria Math"/>
+              </a:rPr>
+              <a:t>(p,t) = S</a:t>
+            </a:r>
+            <a:r>
+              <a:rPr sz="1000" baseline="-25000">
+                <a:solidFill>
+                  <a:srgbClr val="1E2733"/>
+                </a:solidFill>
+                <a:latin typeface="Cambria Math"/>
+              </a:rPr>
+              <a:t>ac,T</a:t>
+            </a:r>
+            <a:r>
+              <a:rPr sz="1400" b="0">
+                <a:solidFill>
+                  <a:srgbClr val="1E2733"/>
+                </a:solidFill>
+                <a:latin typeface="Cambria Math"/>
+              </a:rPr>
+              <a:t>(p,t) + S</a:t>
+            </a:r>
+            <a:r>
+              <a:rPr sz="1000" baseline="-25000">
+                <a:solidFill>
+                  <a:srgbClr val="1E2733"/>
+                </a:solidFill>
+                <a:latin typeface="Cambria Math"/>
+              </a:rPr>
+              <a:t>win,T</a:t>
+            </a:r>
+            <a:r>
+              <a:rPr sz="1400" b="0">
+                <a:solidFill>
+                  <a:srgbClr val="1E2733"/>
+                </a:solidFill>
+                <a:latin typeface="Cambria Math"/>
+              </a:rPr>
+              <a:t>(p,t) + S</a:t>
+            </a:r>
+            <a:r>
+              <a:rPr sz="1000" baseline="-25000">
+                <a:solidFill>
+                  <a:srgbClr val="1E2733"/>
+                </a:solidFill>
+                <a:latin typeface="Cambria Math"/>
+              </a:rPr>
+              <a:t>light,T</a:t>
+            </a:r>
+            <a:r>
+              <a:rPr sz="1400" b="0">
+                <a:solidFill>
+                  <a:srgbClr val="1E2733"/>
+                </a:solidFill>
+                <a:latin typeface="Cambria Math"/>
+              </a:rPr>
+              <a:t>(p,t)</a:t>
             </a:r>
           </a:p>
           <a:p>
@@ -14929,7 +15597,25 @@
                 </a:solidFill>
                 <a:latin typeface="Cambria Math"/>
               </a:rPr>
-              <a:t>B_T 負責全室平均狀態改變</a:t>
+              <a:t>B</a:t>
+            </a:r>
+            <a:r>
+              <a:rPr sz="1000" baseline="-25000">
+                <a:solidFill>
+                  <a:srgbClr val="1E2733"/>
+                </a:solidFill>
+                <a:latin typeface="Cambria Math"/>
+              </a:rPr>
+              <a:t>T</a:t>
+            </a:r>
+            <a:r>
+              <a:rPr sz="1400" b="0">
+                <a:solidFill>
+                  <a:srgbClr val="1E2733"/>
+                </a:solidFill>
+                <a:latin typeface="Cambria Math"/>
+              </a:rPr>
+              <a:t> 負責全室平均狀態改變</a:t>
             </a:r>
           </a:p>
           <a:p>
@@ -14954,7 +15640,25 @@
                 </a:solidFill>
                 <a:latin typeface="Cambria Math"/>
               </a:rPr>
-              <a:t>S_T 負責某些位置比較強的局部差異</a:t>
+              <a:t>S</a:t>
+            </a:r>
+            <a:r>
+              <a:rPr sz="1000" baseline="-25000">
+                <a:solidFill>
+                  <a:srgbClr val="1E2733"/>
+                </a:solidFill>
+                <a:latin typeface="Cambria Math"/>
+              </a:rPr>
+              <a:t>T</a:t>
+            </a:r>
+            <a:r>
+              <a:rPr sz="1400" b="0">
+                <a:solidFill>
+                  <a:srgbClr val="1E2733"/>
+                </a:solidFill>
+                <a:latin typeface="Cambria Math"/>
+              </a:rPr>
+              <a:t> 負責某些位置比較強的局部差異</a:t>
             </a:r>
           </a:p>
           <a:p>
@@ -15229,7 +15933,25 @@
                 </a:solidFill>
                 <a:latin typeface="Noto Sans TC"/>
               </a:rPr>
-              <a:t>• 窗戶：依 T_out - T₀ 表示外氣熱交換方向</a:t>
+              <a:t>• 窗戶：依 T</a:t>
+            </a:r>
+            <a:r>
+              <a:rPr sz="800" baseline="-25000">
+                <a:solidFill>
+                  <a:srgbClr val="1E2733"/>
+                </a:solidFill>
+                <a:latin typeface="Noto Sans TC"/>
+              </a:rPr>
+              <a:t>out</a:t>
+            </a:r>
+            <a:r>
+              <a:rPr sz="1200" b="0">
+                <a:solidFill>
+                  <a:srgbClr val="1E2733"/>
+                </a:solidFill>
+                <a:latin typeface="Noto Sans TC"/>
+              </a:rPr>
+              <a:t> - T₀ 表示外氣熱交換方向</a:t>
             </a:r>
           </a:p>
           <a:p>
@@ -15279,7 +16001,7 @@
                 </a:solidFill>
                 <a:latin typeface="Noto Sans TC"/>
               </a:rPr>
-              <a:t>• 注意：燈具在溫度是熱源，在照度才是光源</a:t>
+              <a:t>• 燈具在溫度模型中代表發熱</a:t>
             </a:r>
           </a:p>
           <a:p>
@@ -15305,6 +16027,49 @@
                 <a:latin typeface="Noto Sans TC"/>
               </a:rPr>
               <a:t>• 這就是變數專屬公式的意義</a:t>
+            </a:r>
+          </a:p>
+          <a:p>
+            <a:pPr>
+              <a:lnSpc>
+                <a:spcPct val="114000"/>
+              </a:lnSpc>
+              <a:spcAft>
+                <a:spcPts val="400"/>
+              </a:spcAft>
+              <a:defRPr sz="1200">
+                <a:solidFill>
+                  <a:srgbClr val="1E2733"/>
+                </a:solidFill>
+                <a:latin typeface="Noto Sans TC"/>
+              </a:defRPr>
+            </a:pPr>
+            <a:r>
+              <a:rPr sz="1200" b="0">
+                <a:solidFill>
+                  <a:srgbClr val="1E2733"/>
+                </a:solidFill>
+                <a:latin typeface="Noto Sans TC"/>
+              </a:rPr>
+              <a:t>• 數值例：B</a:t>
+            </a:r>
+            <a:r>
+              <a:rPr sz="800" baseline="-25000">
+                <a:solidFill>
+                  <a:srgbClr val="1E2733"/>
+                </a:solidFill>
+                <a:latin typeface="Noto Sans TC"/>
+              </a:rPr>
+              <a:t>T</a:t>
+            </a:r>
+            <a:r>
+              <a:rPr sz="1200" b="0">
+                <a:solidFill>
+                  <a:srgbClr val="1E2733"/>
+                </a:solidFill>
+                <a:latin typeface="Noto Sans TC"/>
+              </a:rPr>
+              <a:t>=-1.0+0.2+0.1=-0.7°C</a:t>
             </a:r>
           </a:p>
         </p:txBody>
@@ -15523,7 +16288,7 @@
                 </a:solidFill>
                 <a:latin typeface="Noto Sans TC"/>
               </a:rPr>
-              <a:t>公式、符號意義、限制與可主張範圍</a:t>
+              <a:t>公式、符號意義、假設與限制</a:t>
             </a:r>
           </a:p>
         </p:txBody>
@@ -15748,7 +16513,115 @@
                 </a:solidFill>
                 <a:latin typeface="Cambria Math"/>
               </a:rPr>
-              <a:t>B_ac,T(t) = s_m k_ac,Tᵍ d_T P_ac A_ac(t)</a:t>
+              <a:t>B</a:t>
+            </a:r>
+            <a:r>
+              <a:rPr sz="1000" baseline="-25000">
+                <a:solidFill>
+                  <a:srgbClr val="1E2733"/>
+                </a:solidFill>
+                <a:latin typeface="Cambria Math"/>
+              </a:rPr>
+              <a:t>ac,T</a:t>
+            </a:r>
+            <a:r>
+              <a:rPr sz="1400" b="0">
+                <a:solidFill>
+                  <a:srgbClr val="1E2733"/>
+                </a:solidFill>
+                <a:latin typeface="Cambria Math"/>
+              </a:rPr>
+              <a:t>(t) = s</a:t>
+            </a:r>
+            <a:r>
+              <a:rPr sz="1000" baseline="-25000">
+                <a:solidFill>
+                  <a:srgbClr val="1E2733"/>
+                </a:solidFill>
+                <a:latin typeface="Cambria Math"/>
+              </a:rPr>
+              <a:t>m</a:t>
+            </a:r>
+            <a:r>
+              <a:rPr sz="1400" b="0">
+                <a:solidFill>
+                  <a:srgbClr val="1E2733"/>
+                </a:solidFill>
+                <a:latin typeface="Cambria Math"/>
+              </a:rPr>
+              <a:t> k</a:t>
+            </a:r>
+            <a:r>
+              <a:rPr sz="1000" baseline="-25000">
+                <a:solidFill>
+                  <a:srgbClr val="1E2733"/>
+                </a:solidFill>
+                <a:latin typeface="Cambria Math"/>
+              </a:rPr>
+              <a:t>ac,T</a:t>
+            </a:r>
+            <a:r>
+              <a:rPr sz="1400" b="0">
+                <a:solidFill>
+                  <a:srgbClr val="1E2733"/>
+                </a:solidFill>
+                <a:latin typeface="Cambria Math"/>
+              </a:rPr>
+              <a:t>ᵍ d</a:t>
+            </a:r>
+            <a:r>
+              <a:rPr sz="1000" baseline="-25000">
+                <a:solidFill>
+                  <a:srgbClr val="1E2733"/>
+                </a:solidFill>
+                <a:latin typeface="Cambria Math"/>
+              </a:rPr>
+              <a:t>T</a:t>
+            </a:r>
+            <a:r>
+              <a:rPr sz="1400" b="0">
+                <a:solidFill>
+                  <a:srgbClr val="1E2733"/>
+                </a:solidFill>
+                <a:latin typeface="Cambria Math"/>
+              </a:rPr>
+              <a:t> P</a:t>
+            </a:r>
+            <a:r>
+              <a:rPr sz="1000" baseline="-25000">
+                <a:solidFill>
+                  <a:srgbClr val="1E2733"/>
+                </a:solidFill>
+                <a:latin typeface="Cambria Math"/>
+              </a:rPr>
+              <a:t>ac</a:t>
+            </a:r>
+            <a:r>
+              <a:rPr sz="1400" b="0">
+                <a:solidFill>
+                  <a:srgbClr val="1E2733"/>
+                </a:solidFill>
+                <a:latin typeface="Cambria Math"/>
+              </a:rPr>
+              <a:t> A</a:t>
+            </a:r>
+            <a:r>
+              <a:rPr sz="1000" baseline="-25000">
+                <a:solidFill>
+                  <a:srgbClr val="1E2733"/>
+                </a:solidFill>
+                <a:latin typeface="Cambria Math"/>
+              </a:rPr>
+              <a:t>ac</a:t>
+            </a:r>
+            <a:r>
+              <a:rPr sz="1400" b="0">
+                <a:solidFill>
+                  <a:srgbClr val="1E2733"/>
+                </a:solidFill>
+                <a:latin typeface="Cambria Math"/>
+              </a:rPr>
+              <a:t>(t)</a:t>
             </a:r>
           </a:p>
           <a:p>
@@ -15773,7 +16646,25 @@
                 </a:solidFill>
                 <a:latin typeface="Noto Sans TC"/>
               </a:rPr>
-              <a:t>• s_m：冷房或暖房模式符號</a:t>
+              <a:t>• s</a:t>
+            </a:r>
+            <a:r>
+              <a:rPr sz="800" baseline="-25000">
+                <a:solidFill>
+                  <a:srgbClr val="1E2733"/>
+                </a:solidFill>
+                <a:latin typeface="Noto Sans TC"/>
+              </a:rPr>
+              <a:t>m</a:t>
+            </a:r>
+            <a:r>
+              <a:rPr sz="1200" b="0">
+                <a:solidFill>
+                  <a:srgbClr val="1E2733"/>
+                </a:solidFill>
+                <a:latin typeface="Noto Sans TC"/>
+              </a:rPr>
+              <a:t>：冷房或暖房模式符號</a:t>
             </a:r>
           </a:p>
           <a:p>
@@ -15798,7 +16689,25 @@
                 </a:solidFill>
                 <a:latin typeface="Noto Sans TC"/>
               </a:rPr>
-              <a:t>• k_ac,Tᵍ：冷氣對全室溫度的增益係數</a:t>
+              <a:t>• k</a:t>
+            </a:r>
+            <a:r>
+              <a:rPr sz="800" baseline="-25000">
+                <a:solidFill>
+                  <a:srgbClr val="1E2733"/>
+                </a:solidFill>
+                <a:latin typeface="Noto Sans TC"/>
+              </a:rPr>
+              <a:t>ac,T</a:t>
+            </a:r>
+            <a:r>
+              <a:rPr sz="1200" b="0">
+                <a:solidFill>
+                  <a:srgbClr val="1E2733"/>
+                </a:solidFill>
+                <a:latin typeface="Noto Sans TC"/>
+              </a:rPr>
+              <a:t>ᵍ：冷氣對全室溫度的增益係數</a:t>
             </a:r>
           </a:p>
           <a:p>
@@ -15823,7 +16732,25 @@
                 </a:solidFill>
                 <a:latin typeface="Noto Sans TC"/>
               </a:rPr>
-              <a:t>• d_T：設定溫度與室內基準的需求差</a:t>
+              <a:t>• d</a:t>
+            </a:r>
+            <a:r>
+              <a:rPr sz="800" baseline="-25000">
+                <a:solidFill>
+                  <a:srgbClr val="1E2733"/>
+                </a:solidFill>
+                <a:latin typeface="Noto Sans TC"/>
+              </a:rPr>
+              <a:t>T</a:t>
+            </a:r>
+            <a:r>
+              <a:rPr sz="1200" b="0">
+                <a:solidFill>
+                  <a:srgbClr val="1E2733"/>
+                </a:solidFill>
+                <a:latin typeface="Noto Sans TC"/>
+              </a:rPr>
+              <a:t>：設定溫度與室內基準的需求差</a:t>
             </a:r>
           </a:p>
           <a:p>
@@ -15848,7 +16775,25 @@
                 </a:solidFill>
                 <a:latin typeface="Noto Sans TC"/>
               </a:rPr>
-              <a:t>• P_ac：校正後冷氣 power scale</a:t>
+              <a:t>• P</a:t>
+            </a:r>
+            <a:r>
+              <a:rPr sz="800" baseline="-25000">
+                <a:solidFill>
+                  <a:srgbClr val="1E2733"/>
+                </a:solidFill>
+                <a:latin typeface="Noto Sans TC"/>
+              </a:rPr>
+              <a:t>ac</a:t>
+            </a:r>
+            <a:r>
+              <a:rPr sz="1200" b="0">
+                <a:solidFill>
+                  <a:srgbClr val="1E2733"/>
+                </a:solidFill>
+                <a:latin typeface="Noto Sans TC"/>
+              </a:rPr>
+              <a:t>：校正後冷氣 power scale</a:t>
             </a:r>
           </a:p>
         </p:txBody>
@@ -16073,7 +17018,115 @@
                 </a:solidFill>
                 <a:latin typeface="Cambria Math"/>
               </a:rPr>
-              <a:t>S_ac,T(p,t) = s_m k_ac,Tˢ d_T P_ac E_ac(p,t)</a:t>
+              <a:t>S</a:t>
+            </a:r>
+            <a:r>
+              <a:rPr sz="1000" baseline="-25000">
+                <a:solidFill>
+                  <a:srgbClr val="1E2733"/>
+                </a:solidFill>
+                <a:latin typeface="Cambria Math"/>
+              </a:rPr>
+              <a:t>ac,T</a:t>
+            </a:r>
+            <a:r>
+              <a:rPr sz="1400" b="0">
+                <a:solidFill>
+                  <a:srgbClr val="1E2733"/>
+                </a:solidFill>
+                <a:latin typeface="Cambria Math"/>
+              </a:rPr>
+              <a:t>(p,t) = s</a:t>
+            </a:r>
+            <a:r>
+              <a:rPr sz="1000" baseline="-25000">
+                <a:solidFill>
+                  <a:srgbClr val="1E2733"/>
+                </a:solidFill>
+                <a:latin typeface="Cambria Math"/>
+              </a:rPr>
+              <a:t>m</a:t>
+            </a:r>
+            <a:r>
+              <a:rPr sz="1400" b="0">
+                <a:solidFill>
+                  <a:srgbClr val="1E2733"/>
+                </a:solidFill>
+                <a:latin typeface="Cambria Math"/>
+              </a:rPr>
+              <a:t> k</a:t>
+            </a:r>
+            <a:r>
+              <a:rPr sz="1000" baseline="-25000">
+                <a:solidFill>
+                  <a:srgbClr val="1E2733"/>
+                </a:solidFill>
+                <a:latin typeface="Cambria Math"/>
+              </a:rPr>
+              <a:t>ac,T</a:t>
+            </a:r>
+            <a:r>
+              <a:rPr sz="1400" b="0">
+                <a:solidFill>
+                  <a:srgbClr val="1E2733"/>
+                </a:solidFill>
+                <a:latin typeface="Cambria Math"/>
+              </a:rPr>
+              <a:t>ˢ d</a:t>
+            </a:r>
+            <a:r>
+              <a:rPr sz="1000" baseline="-25000">
+                <a:solidFill>
+                  <a:srgbClr val="1E2733"/>
+                </a:solidFill>
+                <a:latin typeface="Cambria Math"/>
+              </a:rPr>
+              <a:t>T</a:t>
+            </a:r>
+            <a:r>
+              <a:rPr sz="1400" b="0">
+                <a:solidFill>
+                  <a:srgbClr val="1E2733"/>
+                </a:solidFill>
+                <a:latin typeface="Cambria Math"/>
+              </a:rPr>
+              <a:t> P</a:t>
+            </a:r>
+            <a:r>
+              <a:rPr sz="1000" baseline="-25000">
+                <a:solidFill>
+                  <a:srgbClr val="1E2733"/>
+                </a:solidFill>
+                <a:latin typeface="Cambria Math"/>
+              </a:rPr>
+              <a:t>ac</a:t>
+            </a:r>
+            <a:r>
+              <a:rPr sz="1400" b="0">
+                <a:solidFill>
+                  <a:srgbClr val="1E2733"/>
+                </a:solidFill>
+                <a:latin typeface="Cambria Math"/>
+              </a:rPr>
+              <a:t> E</a:t>
+            </a:r>
+            <a:r>
+              <a:rPr sz="1000" baseline="-25000">
+                <a:solidFill>
+                  <a:srgbClr val="1E2733"/>
+                </a:solidFill>
+                <a:latin typeface="Cambria Math"/>
+              </a:rPr>
+              <a:t>ac</a:t>
+            </a:r>
+            <a:r>
+              <a:rPr sz="1400" b="0">
+                <a:solidFill>
+                  <a:srgbClr val="1E2733"/>
+                </a:solidFill>
+                <a:latin typeface="Cambria Math"/>
+              </a:rPr>
+              <a:t>(p,t)</a:t>
             </a:r>
           </a:p>
           <a:p>
@@ -16098,7 +17151,25 @@
                 </a:solidFill>
                 <a:latin typeface="Noto Sans TC"/>
               </a:rPr>
-              <a:t>• k_ac,Tˢ：冷氣局部空間增益</a:t>
+              <a:t>• k</a:t>
+            </a:r>
+            <a:r>
+              <a:rPr sz="800" baseline="-25000">
+                <a:solidFill>
+                  <a:srgbClr val="1E2733"/>
+                </a:solidFill>
+                <a:latin typeface="Noto Sans TC"/>
+              </a:rPr>
+              <a:t>ac,T</a:t>
+            </a:r>
+            <a:r>
+              <a:rPr sz="1200" b="0">
+                <a:solidFill>
+                  <a:srgbClr val="1E2733"/>
+                </a:solidFill>
+                <a:latin typeface="Noto Sans TC"/>
+              </a:rPr>
+              <a:t>ˢ：冷氣局部空間增益</a:t>
             </a:r>
           </a:p>
           <a:p>
@@ -16123,7 +17194,25 @@
                 </a:solidFill>
                 <a:latin typeface="Noto Sans TC"/>
               </a:rPr>
-              <a:t>• E_ac(p,t)：出風口附近、方向與遮蔽造成的空間權重</a:t>
+              <a:t>• E</a:t>
+            </a:r>
+            <a:r>
+              <a:rPr sz="800" baseline="-25000">
+                <a:solidFill>
+                  <a:srgbClr val="1E2733"/>
+                </a:solidFill>
+                <a:latin typeface="Noto Sans TC"/>
+              </a:rPr>
+              <a:t>ac</a:t>
+            </a:r>
+            <a:r>
+              <a:rPr sz="1200" b="0">
+                <a:solidFill>
+                  <a:srgbClr val="1E2733"/>
+                </a:solidFill>
+                <a:latin typeface="Noto Sans TC"/>
+              </a:rPr>
+              <a:t>(p,t)：出風口附近、方向與遮蔽造成的空間權重</a:t>
             </a:r>
           </a:p>
           <a:p>
@@ -16148,7 +17237,7 @@
                 </a:solidFill>
                 <a:latin typeface="Noto Sans TC"/>
               </a:rPr>
-              <a:t>• 解讀方式：B 是全室趨勢，S 是出風口附近差異</a:t>
+              <a:t>• B 表示全室趨勢，S 表示出風口附近差異</a:t>
             </a:r>
           </a:p>
           <a:p>
@@ -16174,6 +17263,49 @@
                 <a:latin typeface="Noto Sans TC"/>
               </a:rPr>
               <a:t>• 兩者不是任意疊加，而是修正 local-only 的缺陷</a:t>
+            </a:r>
+          </a:p>
+          <a:p>
+            <a:pPr>
+              <a:lnSpc>
+                <a:spcPct val="114000"/>
+              </a:lnSpc>
+              <a:spcAft>
+                <a:spcPts val="400"/>
+              </a:spcAft>
+              <a:defRPr sz="1200">
+                <a:solidFill>
+                  <a:srgbClr val="1E2733"/>
+                </a:solidFill>
+                <a:latin typeface="Noto Sans TC"/>
+              </a:defRPr>
+            </a:pPr>
+            <a:r>
+              <a:rPr sz="1200" b="0">
+                <a:solidFill>
+                  <a:srgbClr val="1E2733"/>
+                </a:solidFill>
+                <a:latin typeface="Noto Sans TC"/>
+              </a:rPr>
+              <a:t>• 數值例：s=-1,k=0.8,d=3,P=1,A=0.5 → B</a:t>
+            </a:r>
+            <a:r>
+              <a:rPr sz="800" baseline="-25000">
+                <a:solidFill>
+                  <a:srgbClr val="1E2733"/>
+                </a:solidFill>
+                <a:latin typeface="Noto Sans TC"/>
+              </a:rPr>
+              <a:t>ac,T</a:t>
+            </a:r>
+            <a:r>
+              <a:rPr sz="1200" b="0">
+                <a:solidFill>
+                  <a:srgbClr val="1E2733"/>
+                </a:solidFill>
+                <a:latin typeface="Noto Sans TC"/>
+              </a:rPr>
+              <a:t>=-1.2°C</a:t>
             </a:r>
           </a:p>
         </p:txBody>
@@ -16392,7 +17524,7 @@
                 </a:solidFill>
                 <a:latin typeface="Noto Sans TC"/>
               </a:rPr>
-              <a:t>公式、符號意義、限制與可主張範圍</a:t>
+              <a:t>公式、符號意義、假設與限制</a:t>
             </a:r>
           </a:p>
         </p:txBody>
@@ -16617,7 +17749,97 @@
                 </a:solidFill>
                 <a:latin typeface="Cambria Math"/>
               </a:rPr>
-              <a:t>B_win,T(t) = k_win,Tᵍ (T_out - T₀) P_win A_win(t)</a:t>
+              <a:t>B</a:t>
+            </a:r>
+            <a:r>
+              <a:rPr sz="1000" baseline="-25000">
+                <a:solidFill>
+                  <a:srgbClr val="1E2733"/>
+                </a:solidFill>
+                <a:latin typeface="Cambria Math"/>
+              </a:rPr>
+              <a:t>win,T</a:t>
+            </a:r>
+            <a:r>
+              <a:rPr sz="1400" b="0">
+                <a:solidFill>
+                  <a:srgbClr val="1E2733"/>
+                </a:solidFill>
+                <a:latin typeface="Cambria Math"/>
+              </a:rPr>
+              <a:t>(t) = k</a:t>
+            </a:r>
+            <a:r>
+              <a:rPr sz="1000" baseline="-25000">
+                <a:solidFill>
+                  <a:srgbClr val="1E2733"/>
+                </a:solidFill>
+                <a:latin typeface="Cambria Math"/>
+              </a:rPr>
+              <a:t>win,T</a:t>
+            </a:r>
+            <a:r>
+              <a:rPr sz="1400" b="0">
+                <a:solidFill>
+                  <a:srgbClr val="1E2733"/>
+                </a:solidFill>
+                <a:latin typeface="Cambria Math"/>
+              </a:rPr>
+              <a:t>ᵍ (T</a:t>
+            </a:r>
+            <a:r>
+              <a:rPr sz="1000" baseline="-25000">
+                <a:solidFill>
+                  <a:srgbClr val="1E2733"/>
+                </a:solidFill>
+                <a:latin typeface="Cambria Math"/>
+              </a:rPr>
+              <a:t>out</a:t>
+            </a:r>
+            <a:r>
+              <a:rPr sz="1400" b="0">
+                <a:solidFill>
+                  <a:srgbClr val="1E2733"/>
+                </a:solidFill>
+                <a:latin typeface="Cambria Math"/>
+              </a:rPr>
+              <a:t> - T₀) P</a:t>
+            </a:r>
+            <a:r>
+              <a:rPr sz="1000" baseline="-25000">
+                <a:solidFill>
+                  <a:srgbClr val="1E2733"/>
+                </a:solidFill>
+                <a:latin typeface="Cambria Math"/>
+              </a:rPr>
+              <a:t>win</a:t>
+            </a:r>
+            <a:r>
+              <a:rPr sz="1400" b="0">
+                <a:solidFill>
+                  <a:srgbClr val="1E2733"/>
+                </a:solidFill>
+                <a:latin typeface="Cambria Math"/>
+              </a:rPr>
+              <a:t> A</a:t>
+            </a:r>
+            <a:r>
+              <a:rPr sz="1000" baseline="-25000">
+                <a:solidFill>
+                  <a:srgbClr val="1E2733"/>
+                </a:solidFill>
+                <a:latin typeface="Cambria Math"/>
+              </a:rPr>
+              <a:t>win</a:t>
+            </a:r>
+            <a:r>
+              <a:rPr sz="1400" b="0">
+                <a:solidFill>
+                  <a:srgbClr val="1E2733"/>
+                </a:solidFill>
+                <a:latin typeface="Cambria Math"/>
+              </a:rPr>
+              <a:t>(t)</a:t>
             </a:r>
           </a:p>
           <a:p>
@@ -16642,7 +17864,97 @@
                 </a:solidFill>
                 <a:latin typeface="Cambria Math"/>
               </a:rPr>
-              <a:t>S_win,T(p,t) = k_win,Tˢ (T_out - T₀) P_win E_win(p,t)</a:t>
+              <a:t>S</a:t>
+            </a:r>
+            <a:r>
+              <a:rPr sz="1000" baseline="-25000">
+                <a:solidFill>
+                  <a:srgbClr val="1E2733"/>
+                </a:solidFill>
+                <a:latin typeface="Cambria Math"/>
+              </a:rPr>
+              <a:t>win,T</a:t>
+            </a:r>
+            <a:r>
+              <a:rPr sz="1400" b="0">
+                <a:solidFill>
+                  <a:srgbClr val="1E2733"/>
+                </a:solidFill>
+                <a:latin typeface="Cambria Math"/>
+              </a:rPr>
+              <a:t>(p,t) = k</a:t>
+            </a:r>
+            <a:r>
+              <a:rPr sz="1000" baseline="-25000">
+                <a:solidFill>
+                  <a:srgbClr val="1E2733"/>
+                </a:solidFill>
+                <a:latin typeface="Cambria Math"/>
+              </a:rPr>
+              <a:t>win,T</a:t>
+            </a:r>
+            <a:r>
+              <a:rPr sz="1400" b="0">
+                <a:solidFill>
+                  <a:srgbClr val="1E2733"/>
+                </a:solidFill>
+                <a:latin typeface="Cambria Math"/>
+              </a:rPr>
+              <a:t>ˢ (T</a:t>
+            </a:r>
+            <a:r>
+              <a:rPr sz="1000" baseline="-25000">
+                <a:solidFill>
+                  <a:srgbClr val="1E2733"/>
+                </a:solidFill>
+                <a:latin typeface="Cambria Math"/>
+              </a:rPr>
+              <a:t>out</a:t>
+            </a:r>
+            <a:r>
+              <a:rPr sz="1400" b="0">
+                <a:solidFill>
+                  <a:srgbClr val="1E2733"/>
+                </a:solidFill>
+                <a:latin typeface="Cambria Math"/>
+              </a:rPr>
+              <a:t> - T₀) P</a:t>
+            </a:r>
+            <a:r>
+              <a:rPr sz="1000" baseline="-25000">
+                <a:solidFill>
+                  <a:srgbClr val="1E2733"/>
+                </a:solidFill>
+                <a:latin typeface="Cambria Math"/>
+              </a:rPr>
+              <a:t>win</a:t>
+            </a:r>
+            <a:r>
+              <a:rPr sz="1400" b="0">
+                <a:solidFill>
+                  <a:srgbClr val="1E2733"/>
+                </a:solidFill>
+                <a:latin typeface="Cambria Math"/>
+              </a:rPr>
+              <a:t> E</a:t>
+            </a:r>
+            <a:r>
+              <a:rPr sz="1000" baseline="-25000">
+                <a:solidFill>
+                  <a:srgbClr val="1E2733"/>
+                </a:solidFill>
+                <a:latin typeface="Cambria Math"/>
+              </a:rPr>
+              <a:t>win</a:t>
+            </a:r>
+            <a:r>
+              <a:rPr sz="1400" b="0">
+                <a:solidFill>
+                  <a:srgbClr val="1E2733"/>
+                </a:solidFill>
+                <a:latin typeface="Cambria Math"/>
+              </a:rPr>
+              <a:t>(p,t)</a:t>
             </a:r>
           </a:p>
           <a:p>
@@ -16667,7 +17979,25 @@
                 </a:solidFill>
                 <a:latin typeface="Noto Sans TC"/>
               </a:rPr>
-              <a:t>• T_out &gt; T₀ 時偏升溫</a:t>
+              <a:t>• T</a:t>
+            </a:r>
+            <a:r>
+              <a:rPr sz="800" baseline="-25000">
+                <a:solidFill>
+                  <a:srgbClr val="1E2733"/>
+                </a:solidFill>
+                <a:latin typeface="Noto Sans TC"/>
+              </a:rPr>
+              <a:t>out</a:t>
+            </a:r>
+            <a:r>
+              <a:rPr sz="1200" b="0">
+                <a:solidFill>
+                  <a:srgbClr val="1E2733"/>
+                </a:solidFill>
+                <a:latin typeface="Noto Sans TC"/>
+              </a:rPr>
+              <a:t> &gt; T₀ 時偏升溫</a:t>
             </a:r>
           </a:p>
           <a:p>
@@ -16692,7 +18022,25 @@
                 </a:solidFill>
                 <a:latin typeface="Noto Sans TC"/>
               </a:rPr>
-              <a:t>• T_out &lt; T₀ 時偏降溫</a:t>
+              <a:t>• T</a:t>
+            </a:r>
+            <a:r>
+              <a:rPr sz="800" baseline="-25000">
+                <a:solidFill>
+                  <a:srgbClr val="1E2733"/>
+                </a:solidFill>
+                <a:latin typeface="Noto Sans TC"/>
+              </a:rPr>
+              <a:t>out</a:t>
+            </a:r>
+            <a:r>
+              <a:rPr sz="1200" b="0">
+                <a:solidFill>
+                  <a:srgbClr val="1E2733"/>
+                </a:solidFill>
+                <a:latin typeface="Noto Sans TC"/>
+              </a:rPr>
+              <a:t> &lt; T₀ 時偏降溫</a:t>
             </a:r>
           </a:p>
           <a:p>
@@ -16717,7 +18065,25 @@
                 </a:solidFill>
                 <a:latin typeface="Noto Sans TC"/>
               </a:rPr>
-              <a:t>• P_win 表示窗戶開啟比例或校正後影響尺度</a:t>
+              <a:t>• P</a:t>
+            </a:r>
+            <a:r>
+              <a:rPr sz="800" baseline="-25000">
+                <a:solidFill>
+                  <a:srgbClr val="1E2733"/>
+                </a:solidFill>
+                <a:latin typeface="Noto Sans TC"/>
+              </a:rPr>
+              <a:t>win</a:t>
+            </a:r>
+            <a:r>
+              <a:rPr sz="1200" b="0">
+                <a:solidFill>
+                  <a:srgbClr val="1E2733"/>
+                </a:solidFill>
+                <a:latin typeface="Noto Sans TC"/>
+              </a:rPr>
+              <a:t> 表示窗戶開啟比例或校正後影響尺度</a:t>
             </a:r>
           </a:p>
         </p:txBody>
@@ -16942,7 +18308,79 @@
                 </a:solidFill>
                 <a:latin typeface="Cambria Math"/>
               </a:rPr>
-              <a:t>B_light,T(t) = k_light,Tᵍ P_light A_light(t)</a:t>
+              <a:t>B</a:t>
+            </a:r>
+            <a:r>
+              <a:rPr sz="1000" baseline="-25000">
+                <a:solidFill>
+                  <a:srgbClr val="1E2733"/>
+                </a:solidFill>
+                <a:latin typeface="Cambria Math"/>
+              </a:rPr>
+              <a:t>light,T</a:t>
+            </a:r>
+            <a:r>
+              <a:rPr sz="1400" b="0">
+                <a:solidFill>
+                  <a:srgbClr val="1E2733"/>
+                </a:solidFill>
+                <a:latin typeface="Cambria Math"/>
+              </a:rPr>
+              <a:t>(t) = k</a:t>
+            </a:r>
+            <a:r>
+              <a:rPr sz="1000" baseline="-25000">
+                <a:solidFill>
+                  <a:srgbClr val="1E2733"/>
+                </a:solidFill>
+                <a:latin typeface="Cambria Math"/>
+              </a:rPr>
+              <a:t>light,T</a:t>
+            </a:r>
+            <a:r>
+              <a:rPr sz="1400" b="0">
+                <a:solidFill>
+                  <a:srgbClr val="1E2733"/>
+                </a:solidFill>
+                <a:latin typeface="Cambria Math"/>
+              </a:rPr>
+              <a:t>ᵍ P</a:t>
+            </a:r>
+            <a:r>
+              <a:rPr sz="1000" baseline="-25000">
+                <a:solidFill>
+                  <a:srgbClr val="1E2733"/>
+                </a:solidFill>
+                <a:latin typeface="Cambria Math"/>
+              </a:rPr>
+              <a:t>light</a:t>
+            </a:r>
+            <a:r>
+              <a:rPr sz="1400" b="0">
+                <a:solidFill>
+                  <a:srgbClr val="1E2733"/>
+                </a:solidFill>
+                <a:latin typeface="Cambria Math"/>
+              </a:rPr>
+              <a:t> A</a:t>
+            </a:r>
+            <a:r>
+              <a:rPr sz="1000" baseline="-25000">
+                <a:solidFill>
+                  <a:srgbClr val="1E2733"/>
+                </a:solidFill>
+                <a:latin typeface="Cambria Math"/>
+              </a:rPr>
+              <a:t>light</a:t>
+            </a:r>
+            <a:r>
+              <a:rPr sz="1400" b="0">
+                <a:solidFill>
+                  <a:srgbClr val="1E2733"/>
+                </a:solidFill>
+                <a:latin typeface="Cambria Math"/>
+              </a:rPr>
+              <a:t>(t)</a:t>
             </a:r>
           </a:p>
           <a:p>
@@ -16967,7 +18405,79 @@
                 </a:solidFill>
                 <a:latin typeface="Cambria Math"/>
               </a:rPr>
-              <a:t>S_light,T(p,t) = k_light,Tˢ P_light E_light(p,t)</a:t>
+              <a:t>S</a:t>
+            </a:r>
+            <a:r>
+              <a:rPr sz="1000" baseline="-25000">
+                <a:solidFill>
+                  <a:srgbClr val="1E2733"/>
+                </a:solidFill>
+                <a:latin typeface="Cambria Math"/>
+              </a:rPr>
+              <a:t>light,T</a:t>
+            </a:r>
+            <a:r>
+              <a:rPr sz="1400" b="0">
+                <a:solidFill>
+                  <a:srgbClr val="1E2733"/>
+                </a:solidFill>
+                <a:latin typeface="Cambria Math"/>
+              </a:rPr>
+              <a:t>(p,t) = k</a:t>
+            </a:r>
+            <a:r>
+              <a:rPr sz="1000" baseline="-25000">
+                <a:solidFill>
+                  <a:srgbClr val="1E2733"/>
+                </a:solidFill>
+                <a:latin typeface="Cambria Math"/>
+              </a:rPr>
+              <a:t>light,T</a:t>
+            </a:r>
+            <a:r>
+              <a:rPr sz="1400" b="0">
+                <a:solidFill>
+                  <a:srgbClr val="1E2733"/>
+                </a:solidFill>
+                <a:latin typeface="Cambria Math"/>
+              </a:rPr>
+              <a:t>ˢ P</a:t>
+            </a:r>
+            <a:r>
+              <a:rPr sz="1000" baseline="-25000">
+                <a:solidFill>
+                  <a:srgbClr val="1E2733"/>
+                </a:solidFill>
+                <a:latin typeface="Cambria Math"/>
+              </a:rPr>
+              <a:t>light</a:t>
+            </a:r>
+            <a:r>
+              <a:rPr sz="1400" b="0">
+                <a:solidFill>
+                  <a:srgbClr val="1E2733"/>
+                </a:solidFill>
+                <a:latin typeface="Cambria Math"/>
+              </a:rPr>
+              <a:t> E</a:t>
+            </a:r>
+            <a:r>
+              <a:rPr sz="1000" baseline="-25000">
+                <a:solidFill>
+                  <a:srgbClr val="1E2733"/>
+                </a:solidFill>
+                <a:latin typeface="Cambria Math"/>
+              </a:rPr>
+              <a:t>light</a:t>
+            </a:r>
+            <a:r>
+              <a:rPr sz="1400" b="0">
+                <a:solidFill>
+                  <a:srgbClr val="1E2733"/>
+                </a:solidFill>
+                <a:latin typeface="Cambria Math"/>
+              </a:rPr>
+              <a:t>(p,t)</a:t>
             </a:r>
           </a:p>
           <a:p>
@@ -17043,6 +18553,67 @@
                 <a:latin typeface="Noto Sans TC"/>
               </a:rPr>
               <a:t>• 這可避免把光學效果誤解成熱場效果</a:t>
+            </a:r>
+          </a:p>
+          <a:p>
+            <a:pPr>
+              <a:lnSpc>
+                <a:spcPct val="114000"/>
+              </a:lnSpc>
+              <a:spcAft>
+                <a:spcPts val="400"/>
+              </a:spcAft>
+              <a:defRPr sz="1200">
+                <a:solidFill>
+                  <a:srgbClr val="1E2733"/>
+                </a:solidFill>
+                <a:latin typeface="Noto Sans TC"/>
+              </a:defRPr>
+            </a:pPr>
+            <a:r>
+              <a:rPr sz="1200" b="0">
+                <a:solidFill>
+                  <a:srgbClr val="1E2733"/>
+                </a:solidFill>
+                <a:latin typeface="Noto Sans TC"/>
+              </a:rPr>
+              <a:t>• 數值例：k=0.05,T</a:t>
+            </a:r>
+            <a:r>
+              <a:rPr sz="800" baseline="-25000">
+                <a:solidFill>
+                  <a:srgbClr val="1E2733"/>
+                </a:solidFill>
+                <a:latin typeface="Noto Sans TC"/>
+              </a:rPr>
+              <a:t>out</a:t>
+            </a:r>
+            <a:r>
+              <a:rPr sz="1200" b="0">
+                <a:solidFill>
+                  <a:srgbClr val="1E2733"/>
+                </a:solidFill>
+                <a:latin typeface="Noto Sans TC"/>
+              </a:rPr>
+              <a:t>-T₀=4 → B</a:t>
+            </a:r>
+            <a:r>
+              <a:rPr sz="800" baseline="-25000">
+                <a:solidFill>
+                  <a:srgbClr val="1E2733"/>
+                </a:solidFill>
+                <a:latin typeface="Noto Sans TC"/>
+              </a:rPr>
+              <a:t>win,T</a:t>
+            </a:r>
+            <a:r>
+              <a:rPr sz="1200" b="0">
+                <a:solidFill>
+                  <a:srgbClr val="1E2733"/>
+                </a:solidFill>
+                <a:latin typeface="Noto Sans TC"/>
+              </a:rPr>
+              <a:t>=+0.20°C</a:t>
             </a:r>
           </a:p>
         </p:txBody>
@@ -17261,7 +18832,7 @@
                 </a:solidFill>
                 <a:latin typeface="Noto Sans TC"/>
               </a:rPr>
-              <a:t>公式、符號意義、限制與可主張範圍</a:t>
+              <a:t>公式、符號意義、假設與限制</a:t>
             </a:r>
           </a:p>
         </p:txBody>
@@ -17486,7 +19057,79 @@
                 </a:solidFill>
                 <a:latin typeface="Cambria Math"/>
               </a:rPr>
-              <a:t>N_H(p,t) = clip[0,100]{H₀ + B_H(t) + S_H(p,t) - γ_H M(t) ζ}</a:t>
+              <a:t>N</a:t>
+            </a:r>
+            <a:r>
+              <a:rPr sz="1000" baseline="-25000">
+                <a:solidFill>
+                  <a:srgbClr val="1E2733"/>
+                </a:solidFill>
+                <a:latin typeface="Cambria Math"/>
+              </a:rPr>
+              <a:t>H</a:t>
+            </a:r>
+            <a:r>
+              <a:rPr sz="1400" b="0">
+                <a:solidFill>
+                  <a:srgbClr val="1E2733"/>
+                </a:solidFill>
+                <a:latin typeface="Cambria Math"/>
+              </a:rPr>
+              <a:t>(p,t) = clip[0,100]{H₀ + B</a:t>
+            </a:r>
+            <a:r>
+              <a:rPr sz="1000" baseline="-25000">
+                <a:solidFill>
+                  <a:srgbClr val="1E2733"/>
+                </a:solidFill>
+                <a:latin typeface="Cambria Math"/>
+              </a:rPr>
+              <a:t>H</a:t>
+            </a:r>
+            <a:r>
+              <a:rPr sz="1400" b="0">
+                <a:solidFill>
+                  <a:srgbClr val="1E2733"/>
+                </a:solidFill>
+                <a:latin typeface="Cambria Math"/>
+              </a:rPr>
+              <a:t>(t) + S</a:t>
+            </a:r>
+            <a:r>
+              <a:rPr sz="1000" baseline="-25000">
+                <a:solidFill>
+                  <a:srgbClr val="1E2733"/>
+                </a:solidFill>
+                <a:latin typeface="Cambria Math"/>
+              </a:rPr>
+              <a:t>H</a:t>
+            </a:r>
+            <a:r>
+              <a:rPr sz="1400" b="0">
+                <a:solidFill>
+                  <a:srgbClr val="1E2733"/>
+                </a:solidFill>
+                <a:latin typeface="Cambria Math"/>
+              </a:rPr>
+              <a:t>(p,t) - γ</a:t>
+            </a:r>
+            <a:r>
+              <a:rPr sz="1000" baseline="-25000">
+                <a:solidFill>
+                  <a:srgbClr val="1E2733"/>
+                </a:solidFill>
+                <a:latin typeface="Cambria Math"/>
+              </a:rPr>
+              <a:t>H</a:t>
+            </a:r>
+            <a:r>
+              <a:rPr sz="1400" b="0">
+                <a:solidFill>
+                  <a:srgbClr val="1E2733"/>
+                </a:solidFill>
+                <a:latin typeface="Cambria Math"/>
+              </a:rPr>
+              <a:t> M(t) ζ}</a:t>
             </a:r>
           </a:p>
           <a:p>
@@ -17536,7 +19179,25 @@
                 </a:solidFill>
                 <a:latin typeface="Cambria Math"/>
               </a:rPr>
-              <a:t>B_H(t)：全室平均水氣或除濕響應</a:t>
+              <a:t>B</a:t>
+            </a:r>
+            <a:r>
+              <a:rPr sz="1000" baseline="-25000">
+                <a:solidFill>
+                  <a:srgbClr val="1E2733"/>
+                </a:solidFill>
+                <a:latin typeface="Cambria Math"/>
+              </a:rPr>
+              <a:t>H</a:t>
+            </a:r>
+            <a:r>
+              <a:rPr sz="1400" b="0">
+                <a:solidFill>
+                  <a:srgbClr val="1E2733"/>
+                </a:solidFill>
+                <a:latin typeface="Cambria Math"/>
+              </a:rPr>
+              <a:t>(t)：全室平均水氣或除濕響應</a:t>
             </a:r>
           </a:p>
           <a:p>
@@ -17561,7 +19222,25 @@
                 </a:solidFill>
                 <a:latin typeface="Cambria Math"/>
               </a:rPr>
-              <a:t>S_H(p,t)：局部水氣交換或除濕差異</a:t>
+              <a:t>S</a:t>
+            </a:r>
+            <a:r>
+              <a:rPr sz="1000" baseline="-25000">
+                <a:solidFill>
+                  <a:srgbClr val="1E2733"/>
+                </a:solidFill>
+                <a:latin typeface="Cambria Math"/>
+              </a:rPr>
+              <a:t>H</a:t>
+            </a:r>
+            <a:r>
+              <a:rPr sz="1400" b="0">
+                <a:solidFill>
+                  <a:srgbClr val="1E2733"/>
+                </a:solidFill>
+                <a:latin typeface="Cambria Math"/>
+              </a:rPr>
+              <a:t>(p,t)：局部水氣交換或除濕差異</a:t>
             </a:r>
           </a:p>
           <a:p>
@@ -17912,6 +19591,31 @@
                 <a:latin typeface="Noto Sans TC"/>
               </a:rPr>
               <a:t>• 而是用低階水氣交換近似再由 sensor residual 校正</a:t>
+            </a:r>
+          </a:p>
+          <a:p>
+            <a:pPr>
+              <a:lnSpc>
+                <a:spcPct val="114000"/>
+              </a:lnSpc>
+              <a:spcAft>
+                <a:spcPts val="400"/>
+              </a:spcAft>
+              <a:defRPr sz="1200">
+                <a:solidFill>
+                  <a:srgbClr val="1E2733"/>
+                </a:solidFill>
+                <a:latin typeface="Noto Sans TC"/>
+              </a:defRPr>
+            </a:pPr>
+            <a:r>
+              <a:rPr sz="1200" b="0">
+                <a:solidFill>
+                  <a:srgbClr val="1E2733"/>
+                </a:solidFill>
+                <a:latin typeface="Noto Sans TC"/>
+              </a:rPr>
+              <a:t>• 數值例：clip[0,100](67-5+1-0.2)=62.8%</a:t>
             </a:r>
           </a:p>
         </p:txBody>
@@ -18130,7 +19834,7 @@
                 </a:solidFill>
                 <a:latin typeface="Noto Sans TC"/>
               </a:rPr>
-              <a:t>公式、符號意義、限制與可主張範圍</a:t>
+              <a:t>公式、符號意義、假設與限制</a:t>
             </a:r>
           </a:p>
         </p:txBody>
@@ -18355,7 +20059,97 @@
                 </a:solidFill>
                 <a:latin typeface="Cambria Math"/>
               </a:rPr>
-              <a:t>B_H(t) = -k_ac,Hᵍ d_H P_ac A_ac(t)</a:t>
+              <a:t>B</a:t>
+            </a:r>
+            <a:r>
+              <a:rPr sz="1000" baseline="-25000">
+                <a:solidFill>
+                  <a:srgbClr val="1E2733"/>
+                </a:solidFill>
+                <a:latin typeface="Cambria Math"/>
+              </a:rPr>
+              <a:t>H</a:t>
+            </a:r>
+            <a:r>
+              <a:rPr sz="1400" b="0">
+                <a:solidFill>
+                  <a:srgbClr val="1E2733"/>
+                </a:solidFill>
+                <a:latin typeface="Cambria Math"/>
+              </a:rPr>
+              <a:t>(t) = -k</a:t>
+            </a:r>
+            <a:r>
+              <a:rPr sz="1000" baseline="-25000">
+                <a:solidFill>
+                  <a:srgbClr val="1E2733"/>
+                </a:solidFill>
+                <a:latin typeface="Cambria Math"/>
+              </a:rPr>
+              <a:t>ac,H</a:t>
+            </a:r>
+            <a:r>
+              <a:rPr sz="1400" b="0">
+                <a:solidFill>
+                  <a:srgbClr val="1E2733"/>
+                </a:solidFill>
+                <a:latin typeface="Cambria Math"/>
+              </a:rPr>
+              <a:t>ᵍ d</a:t>
+            </a:r>
+            <a:r>
+              <a:rPr sz="1000" baseline="-25000">
+                <a:solidFill>
+                  <a:srgbClr val="1E2733"/>
+                </a:solidFill>
+                <a:latin typeface="Cambria Math"/>
+              </a:rPr>
+              <a:t>H</a:t>
+            </a:r>
+            <a:r>
+              <a:rPr sz="1400" b="0">
+                <a:solidFill>
+                  <a:srgbClr val="1E2733"/>
+                </a:solidFill>
+                <a:latin typeface="Cambria Math"/>
+              </a:rPr>
+              <a:t> P</a:t>
+            </a:r>
+            <a:r>
+              <a:rPr sz="1000" baseline="-25000">
+                <a:solidFill>
+                  <a:srgbClr val="1E2733"/>
+                </a:solidFill>
+                <a:latin typeface="Cambria Math"/>
+              </a:rPr>
+              <a:t>ac</a:t>
+            </a:r>
+            <a:r>
+              <a:rPr sz="1400" b="0">
+                <a:solidFill>
+                  <a:srgbClr val="1E2733"/>
+                </a:solidFill>
+                <a:latin typeface="Cambria Math"/>
+              </a:rPr>
+              <a:t> A</a:t>
+            </a:r>
+            <a:r>
+              <a:rPr sz="1000" baseline="-25000">
+                <a:solidFill>
+                  <a:srgbClr val="1E2733"/>
+                </a:solidFill>
+                <a:latin typeface="Cambria Math"/>
+              </a:rPr>
+              <a:t>ac</a:t>
+            </a:r>
+            <a:r>
+              <a:rPr sz="1400" b="0">
+                <a:solidFill>
+                  <a:srgbClr val="1E2733"/>
+                </a:solidFill>
+                <a:latin typeface="Cambria Math"/>
+              </a:rPr>
+              <a:t>(t)</a:t>
             </a:r>
           </a:p>
           <a:p>
@@ -18380,7 +20174,79 @@
                 </a:solidFill>
                 <a:latin typeface="Cambria Math"/>
               </a:rPr>
-              <a:t>+ k_win,Hᵍ (H_out - H₀) P_win A_win(t)</a:t>
+              <a:t>+ k</a:t>
+            </a:r>
+            <a:r>
+              <a:rPr sz="1000" baseline="-25000">
+                <a:solidFill>
+                  <a:srgbClr val="1E2733"/>
+                </a:solidFill>
+                <a:latin typeface="Cambria Math"/>
+              </a:rPr>
+              <a:t>win,H</a:t>
+            </a:r>
+            <a:r>
+              <a:rPr sz="1400" b="0">
+                <a:solidFill>
+                  <a:srgbClr val="1E2733"/>
+                </a:solidFill>
+                <a:latin typeface="Cambria Math"/>
+              </a:rPr>
+              <a:t>ᵍ (H</a:t>
+            </a:r>
+            <a:r>
+              <a:rPr sz="1000" baseline="-25000">
+                <a:solidFill>
+                  <a:srgbClr val="1E2733"/>
+                </a:solidFill>
+                <a:latin typeface="Cambria Math"/>
+              </a:rPr>
+              <a:t>out</a:t>
+            </a:r>
+            <a:r>
+              <a:rPr sz="1400" b="0">
+                <a:solidFill>
+                  <a:srgbClr val="1E2733"/>
+                </a:solidFill>
+                <a:latin typeface="Cambria Math"/>
+              </a:rPr>
+              <a:t> - H₀) P</a:t>
+            </a:r>
+            <a:r>
+              <a:rPr sz="1000" baseline="-25000">
+                <a:solidFill>
+                  <a:srgbClr val="1E2733"/>
+                </a:solidFill>
+                <a:latin typeface="Cambria Math"/>
+              </a:rPr>
+              <a:t>win</a:t>
+            </a:r>
+            <a:r>
+              <a:rPr sz="1400" b="0">
+                <a:solidFill>
+                  <a:srgbClr val="1E2733"/>
+                </a:solidFill>
+                <a:latin typeface="Cambria Math"/>
+              </a:rPr>
+              <a:t> A</a:t>
+            </a:r>
+            <a:r>
+              <a:rPr sz="1000" baseline="-25000">
+                <a:solidFill>
+                  <a:srgbClr val="1E2733"/>
+                </a:solidFill>
+                <a:latin typeface="Cambria Math"/>
+              </a:rPr>
+              <a:t>win</a:t>
+            </a:r>
+            <a:r>
+              <a:rPr sz="1400" b="0">
+                <a:solidFill>
+                  <a:srgbClr val="1E2733"/>
+                </a:solidFill>
+                <a:latin typeface="Cambria Math"/>
+              </a:rPr>
+              <a:t>(t)</a:t>
             </a:r>
           </a:p>
           <a:p>
@@ -18430,7 +20296,25 @@
                 </a:solidFill>
                 <a:latin typeface="Noto Sans TC"/>
               </a:rPr>
-              <a:t>• 窗戶項正負由 H_out - H₀ 決定</a:t>
+              <a:t>• 窗戶項正負由 H</a:t>
+            </a:r>
+            <a:r>
+              <a:rPr sz="800" baseline="-25000">
+                <a:solidFill>
+                  <a:srgbClr val="1E2733"/>
+                </a:solidFill>
+                <a:latin typeface="Noto Sans TC"/>
+              </a:rPr>
+              <a:t>out</a:t>
+            </a:r>
+            <a:r>
+              <a:rPr sz="1200" b="0">
+                <a:solidFill>
+                  <a:srgbClr val="1E2733"/>
+                </a:solidFill>
+                <a:latin typeface="Noto Sans TC"/>
+              </a:rPr>
+              <a:t> - H₀ 決定</a:t>
             </a:r>
           </a:p>
           <a:p>
@@ -18680,7 +20564,97 @@
                 </a:solidFill>
                 <a:latin typeface="Cambria Math"/>
               </a:rPr>
-              <a:t>S_H(p,t) = -k_ac,Hˢ d_H P_ac E_ac(p,t)</a:t>
+              <a:t>S</a:t>
+            </a:r>
+            <a:r>
+              <a:rPr sz="1000" baseline="-25000">
+                <a:solidFill>
+                  <a:srgbClr val="1E2733"/>
+                </a:solidFill>
+                <a:latin typeface="Cambria Math"/>
+              </a:rPr>
+              <a:t>H</a:t>
+            </a:r>
+            <a:r>
+              <a:rPr sz="1400" b="0">
+                <a:solidFill>
+                  <a:srgbClr val="1E2733"/>
+                </a:solidFill>
+                <a:latin typeface="Cambria Math"/>
+              </a:rPr>
+              <a:t>(p,t) = -k</a:t>
+            </a:r>
+            <a:r>
+              <a:rPr sz="1000" baseline="-25000">
+                <a:solidFill>
+                  <a:srgbClr val="1E2733"/>
+                </a:solidFill>
+                <a:latin typeface="Cambria Math"/>
+              </a:rPr>
+              <a:t>ac,H</a:t>
+            </a:r>
+            <a:r>
+              <a:rPr sz="1400" b="0">
+                <a:solidFill>
+                  <a:srgbClr val="1E2733"/>
+                </a:solidFill>
+                <a:latin typeface="Cambria Math"/>
+              </a:rPr>
+              <a:t>ˢ d</a:t>
+            </a:r>
+            <a:r>
+              <a:rPr sz="1000" baseline="-25000">
+                <a:solidFill>
+                  <a:srgbClr val="1E2733"/>
+                </a:solidFill>
+                <a:latin typeface="Cambria Math"/>
+              </a:rPr>
+              <a:t>H</a:t>
+            </a:r>
+            <a:r>
+              <a:rPr sz="1400" b="0">
+                <a:solidFill>
+                  <a:srgbClr val="1E2733"/>
+                </a:solidFill>
+                <a:latin typeface="Cambria Math"/>
+              </a:rPr>
+              <a:t> P</a:t>
+            </a:r>
+            <a:r>
+              <a:rPr sz="1000" baseline="-25000">
+                <a:solidFill>
+                  <a:srgbClr val="1E2733"/>
+                </a:solidFill>
+                <a:latin typeface="Cambria Math"/>
+              </a:rPr>
+              <a:t>ac</a:t>
+            </a:r>
+            <a:r>
+              <a:rPr sz="1400" b="0">
+                <a:solidFill>
+                  <a:srgbClr val="1E2733"/>
+                </a:solidFill>
+                <a:latin typeface="Cambria Math"/>
+              </a:rPr>
+              <a:t> E</a:t>
+            </a:r>
+            <a:r>
+              <a:rPr sz="1000" baseline="-25000">
+                <a:solidFill>
+                  <a:srgbClr val="1E2733"/>
+                </a:solidFill>
+                <a:latin typeface="Cambria Math"/>
+              </a:rPr>
+              <a:t>ac</a:t>
+            </a:r>
+            <a:r>
+              <a:rPr sz="1400" b="0">
+                <a:solidFill>
+                  <a:srgbClr val="1E2733"/>
+                </a:solidFill>
+                <a:latin typeface="Cambria Math"/>
+              </a:rPr>
+              <a:t>(p,t)</a:t>
             </a:r>
           </a:p>
           <a:p>
@@ -18705,7 +20679,79 @@
                 </a:solidFill>
                 <a:latin typeface="Cambria Math"/>
               </a:rPr>
-              <a:t>+ k_win,Hˢ (H_out - H₀) P_win E_win(p,t)</a:t>
+              <a:t>+ k</a:t>
+            </a:r>
+            <a:r>
+              <a:rPr sz="1000" baseline="-25000">
+                <a:solidFill>
+                  <a:srgbClr val="1E2733"/>
+                </a:solidFill>
+                <a:latin typeface="Cambria Math"/>
+              </a:rPr>
+              <a:t>win,H</a:t>
+            </a:r>
+            <a:r>
+              <a:rPr sz="1400" b="0">
+                <a:solidFill>
+                  <a:srgbClr val="1E2733"/>
+                </a:solidFill>
+                <a:latin typeface="Cambria Math"/>
+              </a:rPr>
+              <a:t>ˢ (H</a:t>
+            </a:r>
+            <a:r>
+              <a:rPr sz="1000" baseline="-25000">
+                <a:solidFill>
+                  <a:srgbClr val="1E2733"/>
+                </a:solidFill>
+                <a:latin typeface="Cambria Math"/>
+              </a:rPr>
+              <a:t>out</a:t>
+            </a:r>
+            <a:r>
+              <a:rPr sz="1400" b="0">
+                <a:solidFill>
+                  <a:srgbClr val="1E2733"/>
+                </a:solidFill>
+                <a:latin typeface="Cambria Math"/>
+              </a:rPr>
+              <a:t> - H₀) P</a:t>
+            </a:r>
+            <a:r>
+              <a:rPr sz="1000" baseline="-25000">
+                <a:solidFill>
+                  <a:srgbClr val="1E2733"/>
+                </a:solidFill>
+                <a:latin typeface="Cambria Math"/>
+              </a:rPr>
+              <a:t>win</a:t>
+            </a:r>
+            <a:r>
+              <a:rPr sz="1400" b="0">
+                <a:solidFill>
+                  <a:srgbClr val="1E2733"/>
+                </a:solidFill>
+                <a:latin typeface="Cambria Math"/>
+              </a:rPr>
+              <a:t> E</a:t>
+            </a:r>
+            <a:r>
+              <a:rPr sz="1000" baseline="-25000">
+                <a:solidFill>
+                  <a:srgbClr val="1E2733"/>
+                </a:solidFill>
+                <a:latin typeface="Cambria Math"/>
+              </a:rPr>
+              <a:t>win</a:t>
+            </a:r>
+            <a:r>
+              <a:rPr sz="1400" b="0">
+                <a:solidFill>
+                  <a:srgbClr val="1E2733"/>
+                </a:solidFill>
+                <a:latin typeface="Cambria Math"/>
+              </a:rPr>
+              <a:t>(p,t)</a:t>
             </a:r>
           </a:p>
           <a:p>
@@ -18730,7 +20776,25 @@
                 </a:solidFill>
                 <a:latin typeface="Noto Sans TC"/>
               </a:rPr>
-              <a:t>• E_ac 讓除濕效果在冷氣影響區附近更強</a:t>
+              <a:t>• E</a:t>
+            </a:r>
+            <a:r>
+              <a:rPr sz="800" baseline="-25000">
+                <a:solidFill>
+                  <a:srgbClr val="1E2733"/>
+                </a:solidFill>
+                <a:latin typeface="Noto Sans TC"/>
+              </a:rPr>
+              <a:t>ac</a:t>
+            </a:r>
+            <a:r>
+              <a:rPr sz="1200" b="0">
+                <a:solidFill>
+                  <a:srgbClr val="1E2733"/>
+                </a:solidFill>
+                <a:latin typeface="Noto Sans TC"/>
+              </a:rPr>
+              <a:t> 讓除濕效果在冷氣影響區附近更強</a:t>
             </a:r>
           </a:p>
           <a:p>
@@ -18755,7 +20819,25 @@
                 </a:solidFill>
                 <a:latin typeface="Noto Sans TC"/>
               </a:rPr>
-              <a:t>• E_win 讓窗邊水氣交換較強</a:t>
+              <a:t>• E</a:t>
+            </a:r>
+            <a:r>
+              <a:rPr sz="800" baseline="-25000">
+                <a:solidFill>
+                  <a:srgbClr val="1E2733"/>
+                </a:solidFill>
+                <a:latin typeface="Noto Sans TC"/>
+              </a:rPr>
+              <a:t>win</a:t>
+            </a:r>
+            <a:r>
+              <a:rPr sz="1200" b="0">
+                <a:solidFill>
+                  <a:srgbClr val="1E2733"/>
+                </a:solidFill>
+                <a:latin typeface="Noto Sans TC"/>
+              </a:rPr>
+              <a:t> 讓窗邊水氣交換較強</a:t>
             </a:r>
           </a:p>
           <a:p>
@@ -18781,6 +20863,31 @@
                 <a:latin typeface="Noto Sans TC"/>
               </a:rPr>
               <a:t>• 濕度沒有使用燈具照度那套光學公式</a:t>
+            </a:r>
+          </a:p>
+          <a:p>
+            <a:pPr>
+              <a:lnSpc>
+                <a:spcPct val="114000"/>
+              </a:lnSpc>
+              <a:spcAft>
+                <a:spcPts val="400"/>
+              </a:spcAft>
+              <a:defRPr sz="1200">
+                <a:solidFill>
+                  <a:srgbClr val="1E2733"/>
+                </a:solidFill>
+                <a:latin typeface="Noto Sans TC"/>
+              </a:defRPr>
+            </a:pPr>
+            <a:r>
+              <a:rPr sz="1200" b="0">
+                <a:solidFill>
+                  <a:srgbClr val="1E2733"/>
+                </a:solidFill>
+                <a:latin typeface="Noto Sans TC"/>
+              </a:rPr>
+              <a:t>• 數值例：-0.4×10×0.5 + 0.02×8=-1.84%</a:t>
             </a:r>
           </a:p>
         </p:txBody>
@@ -18999,7 +21106,7 @@
                 </a:solidFill>
                 <a:latin typeface="Noto Sans TC"/>
               </a:rPr>
-              <a:t>公式、符號意義、限制與可主張範圍</a:t>
+              <a:t>公式、符號意義、假設與限制</a:t>
             </a:r>
           </a:p>
         </p:txBody>
@@ -19224,7 +21331,43 @@
                 </a:solidFill>
                 <a:latin typeface="Cambria Math"/>
               </a:rPr>
-              <a:t>N_L(p,t) = max{0, L₀ + L_winᵈⁱʳ(p,t)</a:t>
+              <a:t>N</a:t>
+            </a:r>
+            <a:r>
+              <a:rPr sz="1000" baseline="-25000">
+                <a:solidFill>
+                  <a:srgbClr val="1E2733"/>
+                </a:solidFill>
+                <a:latin typeface="Cambria Math"/>
+              </a:rPr>
+              <a:t>L</a:t>
+            </a:r>
+            <a:r>
+              <a:rPr sz="1400" b="0">
+                <a:solidFill>
+                  <a:srgbClr val="1E2733"/>
+                </a:solidFill>
+                <a:latin typeface="Cambria Math"/>
+              </a:rPr>
+              <a:t>(p,t) = max{0, L₀ + L</a:t>
+            </a:r>
+            <a:r>
+              <a:rPr sz="1000" baseline="-25000">
+                <a:solidFill>
+                  <a:srgbClr val="1E2733"/>
+                </a:solidFill>
+                <a:latin typeface="Cambria Math"/>
+              </a:rPr>
+              <a:t>win</a:t>
+            </a:r>
+            <a:r>
+              <a:rPr sz="1400" b="0">
+                <a:solidFill>
+                  <a:srgbClr val="1E2733"/>
+                </a:solidFill>
+                <a:latin typeface="Cambria Math"/>
+              </a:rPr>
+              <a:t>ᵈⁱʳ(p,t)</a:t>
             </a:r>
           </a:p>
           <a:p>
@@ -19249,7 +21392,43 @@
                 </a:solidFill>
                 <a:latin typeface="Cambria Math"/>
               </a:rPr>
-              <a:t>+ L_lightᵈⁱʳ(p,t) + L_winᵃᵐᵇ(p,t) + Iʳᵉᶠˡ(p,t)}</a:t>
+              <a:t>+ L</a:t>
+            </a:r>
+            <a:r>
+              <a:rPr sz="1000" baseline="-25000">
+                <a:solidFill>
+                  <a:srgbClr val="1E2733"/>
+                </a:solidFill>
+                <a:latin typeface="Cambria Math"/>
+              </a:rPr>
+              <a:t>light</a:t>
+            </a:r>
+            <a:r>
+              <a:rPr sz="1400" b="0">
+                <a:solidFill>
+                  <a:srgbClr val="1E2733"/>
+                </a:solidFill>
+                <a:latin typeface="Cambria Math"/>
+              </a:rPr>
+              <a:t>ᵈⁱʳ(p,t) + L</a:t>
+            </a:r>
+            <a:r>
+              <a:rPr sz="1000" baseline="-25000">
+                <a:solidFill>
+                  <a:srgbClr val="1E2733"/>
+                </a:solidFill>
+                <a:latin typeface="Cambria Math"/>
+              </a:rPr>
+              <a:t>win</a:t>
+            </a:r>
+            <a:r>
+              <a:rPr sz="1400" b="0">
+                <a:solidFill>
+                  <a:srgbClr val="1E2733"/>
+                </a:solidFill>
+                <a:latin typeface="Cambria Math"/>
+              </a:rPr>
+              <a:t>ᵃᵐᵇ(p,t) + Iʳᵉᶠˡ(p,t)}</a:t>
             </a:r>
           </a:p>
           <a:p>
@@ -19324,7 +21503,7 @@
                 </a:solidFill>
                 <a:latin typeface="Noto Sans TC"/>
               </a:rPr>
-              <a:t>• 照度由光源、窗戶、遮蔽與反射決定</a:t>
+              <a:t>• 照度由燈具光束、窗戶、遮蔽與反射決定</a:t>
             </a:r>
           </a:p>
         </p:txBody>
@@ -19650,6 +21829,31 @@
                 <a:latin typeface="Noto Sans TC"/>
               </a:rPr>
               <a:t>• 再用一次漫反射補足間接光</a:t>
+            </a:r>
+          </a:p>
+          <a:p>
+            <a:pPr>
+              <a:lnSpc>
+                <a:spcPct val="114000"/>
+              </a:lnSpc>
+              <a:spcAft>
+                <a:spcPts val="400"/>
+              </a:spcAft>
+              <a:defRPr sz="1200">
+                <a:solidFill>
+                  <a:srgbClr val="1E2733"/>
+                </a:solidFill>
+                <a:latin typeface="Noto Sans TC"/>
+              </a:defRPr>
+            </a:pPr>
+            <a:r>
+              <a:rPr sz="1200" b="0">
+                <a:solidFill>
+                  <a:srgbClr val="1E2733"/>
+                </a:solidFill>
+                <a:latin typeface="Noto Sans TC"/>
+              </a:rPr>
+              <a:t>• 數值例：max(0,90+250+120+40+30)=530 lux</a:t>
             </a:r>
           </a:p>
         </p:txBody>
@@ -19868,7 +22072,7 @@
                 </a:solidFill>
                 <a:latin typeface="Noto Sans TC"/>
               </a:rPr>
-              <a:t>公式、符號意義、限制與可主張範圍</a:t>
+              <a:t>公式、符號意義、假設與限制</a:t>
             </a:r>
           </a:p>
         </p:txBody>
@@ -20093,7 +22297,115 @@
                 </a:solidFill>
                 <a:latin typeface="Cambria Math"/>
               </a:rPr>
-              <a:t>L_winᵈⁱʳ(p,t) = S_out d_f k_sol P_win E_win(p,t)</a:t>
+              <a:t>L</a:t>
+            </a:r>
+            <a:r>
+              <a:rPr sz="1000" baseline="-25000">
+                <a:solidFill>
+                  <a:srgbClr val="1E2733"/>
+                </a:solidFill>
+                <a:latin typeface="Cambria Math"/>
+              </a:rPr>
+              <a:t>win</a:t>
+            </a:r>
+            <a:r>
+              <a:rPr sz="1400" b="0">
+                <a:solidFill>
+                  <a:srgbClr val="1E2733"/>
+                </a:solidFill>
+                <a:latin typeface="Cambria Math"/>
+              </a:rPr>
+              <a:t>ᵈⁱʳ(p,t) = S</a:t>
+            </a:r>
+            <a:r>
+              <a:rPr sz="1000" baseline="-25000">
+                <a:solidFill>
+                  <a:srgbClr val="1E2733"/>
+                </a:solidFill>
+                <a:latin typeface="Cambria Math"/>
+              </a:rPr>
+              <a:t>out</a:t>
+            </a:r>
+            <a:r>
+              <a:rPr sz="1400" b="0">
+                <a:solidFill>
+                  <a:srgbClr val="1E2733"/>
+                </a:solidFill>
+                <a:latin typeface="Cambria Math"/>
+              </a:rPr>
+              <a:t> d</a:t>
+            </a:r>
+            <a:r>
+              <a:rPr sz="1000" baseline="-25000">
+                <a:solidFill>
+                  <a:srgbClr val="1E2733"/>
+                </a:solidFill>
+                <a:latin typeface="Cambria Math"/>
+              </a:rPr>
+              <a:t>f</a:t>
+            </a:r>
+            <a:r>
+              <a:rPr sz="1400" b="0">
+                <a:solidFill>
+                  <a:srgbClr val="1E2733"/>
+                </a:solidFill>
+                <a:latin typeface="Cambria Math"/>
+              </a:rPr>
+              <a:t> k</a:t>
+            </a:r>
+            <a:r>
+              <a:rPr sz="1000" baseline="-25000">
+                <a:solidFill>
+                  <a:srgbClr val="1E2733"/>
+                </a:solidFill>
+                <a:latin typeface="Cambria Math"/>
+              </a:rPr>
+              <a:t>sol</a:t>
+            </a:r>
+            <a:r>
+              <a:rPr sz="1400" b="0">
+                <a:solidFill>
+                  <a:srgbClr val="1E2733"/>
+                </a:solidFill>
+                <a:latin typeface="Cambria Math"/>
+              </a:rPr>
+              <a:t> P</a:t>
+            </a:r>
+            <a:r>
+              <a:rPr sz="1000" baseline="-25000">
+                <a:solidFill>
+                  <a:srgbClr val="1E2733"/>
+                </a:solidFill>
+                <a:latin typeface="Cambria Math"/>
+              </a:rPr>
+              <a:t>win</a:t>
+            </a:r>
+            <a:r>
+              <a:rPr sz="1400" b="0">
+                <a:solidFill>
+                  <a:srgbClr val="1E2733"/>
+                </a:solidFill>
+                <a:latin typeface="Cambria Math"/>
+              </a:rPr>
+              <a:t> E</a:t>
+            </a:r>
+            <a:r>
+              <a:rPr sz="1000" baseline="-25000">
+                <a:solidFill>
+                  <a:srgbClr val="1E2733"/>
+                </a:solidFill>
+                <a:latin typeface="Cambria Math"/>
+              </a:rPr>
+              <a:t>win</a:t>
+            </a:r>
+            <a:r>
+              <a:rPr sz="1400" b="0">
+                <a:solidFill>
+                  <a:srgbClr val="1E2733"/>
+                </a:solidFill>
+                <a:latin typeface="Cambria Math"/>
+              </a:rPr>
+              <a:t>(p,t)</a:t>
             </a:r>
           </a:p>
           <a:p>
@@ -20118,7 +22430,25 @@
                 </a:solidFill>
                 <a:latin typeface="Noto Sans TC"/>
               </a:rPr>
-              <a:t>• S_out：室外日照強度</a:t>
+              <a:t>• S</a:t>
+            </a:r>
+            <a:r>
+              <a:rPr sz="800" baseline="-25000">
+                <a:solidFill>
+                  <a:srgbClr val="1E2733"/>
+                </a:solidFill>
+                <a:latin typeface="Noto Sans TC"/>
+              </a:rPr>
+              <a:t>out</a:t>
+            </a:r>
+            <a:r>
+              <a:rPr sz="1200" b="0">
+                <a:solidFill>
+                  <a:srgbClr val="1E2733"/>
+                </a:solidFill>
+                <a:latin typeface="Noto Sans TC"/>
+              </a:rPr>
+              <a:t>：室外日照強度</a:t>
             </a:r>
           </a:p>
           <a:p>
@@ -20143,7 +22473,25 @@
                 </a:solidFill>
                 <a:latin typeface="Noto Sans TC"/>
               </a:rPr>
-              <a:t>• d_f：與時間、季節或日照方向相關的折減</a:t>
+              <a:t>• d</a:t>
+            </a:r>
+            <a:r>
+              <a:rPr sz="800" baseline="-25000">
+                <a:solidFill>
+                  <a:srgbClr val="1E2733"/>
+                </a:solidFill>
+                <a:latin typeface="Noto Sans TC"/>
+              </a:rPr>
+              <a:t>f</a:t>
+            </a:r>
+            <a:r>
+              <a:rPr sz="1200" b="0">
+                <a:solidFill>
+                  <a:srgbClr val="1E2733"/>
+                </a:solidFill>
+                <a:latin typeface="Noto Sans TC"/>
+              </a:rPr>
+              <a:t>：與時間、季節或日照方向相關的折減</a:t>
             </a:r>
           </a:p>
           <a:p>
@@ -20168,7 +22516,25 @@
                 </a:solidFill>
                 <a:latin typeface="Noto Sans TC"/>
               </a:rPr>
-              <a:t>• k_sol：窗戶日照轉換係數</a:t>
+              <a:t>• k</a:t>
+            </a:r>
+            <a:r>
+              <a:rPr sz="800" baseline="-25000">
+                <a:solidFill>
+                  <a:srgbClr val="1E2733"/>
+                </a:solidFill>
+                <a:latin typeface="Noto Sans TC"/>
+              </a:rPr>
+              <a:t>sol</a:t>
+            </a:r>
+            <a:r>
+              <a:rPr sz="1200" b="0">
+                <a:solidFill>
+                  <a:srgbClr val="1E2733"/>
+                </a:solidFill>
+                <a:latin typeface="Noto Sans TC"/>
+              </a:rPr>
+              <a:t>：窗戶日照轉換係數</a:t>
             </a:r>
           </a:p>
           <a:p>
@@ -20193,7 +22559,25 @@
                 </a:solidFill>
                 <a:latin typeface="Noto Sans TC"/>
               </a:rPr>
-              <a:t>• E_win：窗戶到室內點的距離、方向與遮蔽權重</a:t>
+              <a:t>• E</a:t>
+            </a:r>
+            <a:r>
+              <a:rPr sz="800" baseline="-25000">
+                <a:solidFill>
+                  <a:srgbClr val="1E2733"/>
+                </a:solidFill>
+                <a:latin typeface="Noto Sans TC"/>
+              </a:rPr>
+              <a:t>win</a:t>
+            </a:r>
+            <a:r>
+              <a:rPr sz="1200" b="0">
+                <a:solidFill>
+                  <a:srgbClr val="1E2733"/>
+                </a:solidFill>
+                <a:latin typeface="Noto Sans TC"/>
+              </a:rPr>
+              <a:t>：窗戶到室內點的距離、方向與遮蔽權重</a:t>
             </a:r>
           </a:p>
         </p:txBody>
@@ -20418,7 +22802,237 @@
                 </a:solidFill>
                 <a:latin typeface="Cambria Math"/>
               </a:rPr>
-              <a:t>L_lightᵈⁱʳ(p,t) = G_light P_light E_light(p,t)</a:t>
+              <a:t>L</a:t>
+            </a:r>
+            <a:r>
+              <a:rPr sz="1000" baseline="-25000">
+                <a:solidFill>
+                  <a:srgbClr val="1E2733"/>
+                </a:solidFill>
+                <a:latin typeface="Cambria Math"/>
+              </a:rPr>
+              <a:t>light</a:t>
+            </a:r>
+            <a:r>
+              <a:rPr sz="1400" b="0">
+                <a:solidFill>
+                  <a:srgbClr val="1E2733"/>
+                </a:solidFill>
+                <a:latin typeface="Cambria Math"/>
+              </a:rPr>
+              <a:t>ᵈⁱʳ(p,t) = G</a:t>
+            </a:r>
+            <a:r>
+              <a:rPr sz="1000" baseline="-25000">
+                <a:solidFill>
+                  <a:srgbClr val="1E2733"/>
+                </a:solidFill>
+                <a:latin typeface="Cambria Math"/>
+              </a:rPr>
+              <a:t>light</a:t>
+            </a:r>
+            <a:r>
+              <a:rPr sz="1400" b="0">
+                <a:solidFill>
+                  <a:srgbClr val="1E2733"/>
+                </a:solidFill>
+                <a:latin typeface="Cambria Math"/>
+              </a:rPr>
+              <a:t> P</a:t>
+            </a:r>
+            <a:r>
+              <a:rPr sz="1000" baseline="-25000">
+                <a:solidFill>
+                  <a:srgbClr val="1E2733"/>
+                </a:solidFill>
+                <a:latin typeface="Cambria Math"/>
+              </a:rPr>
+              <a:t>light</a:t>
+            </a:r>
+            <a:r>
+              <a:rPr sz="1400" b="0">
+                <a:solidFill>
+                  <a:srgbClr val="1E2733"/>
+                </a:solidFill>
+                <a:latin typeface="Cambria Math"/>
+              </a:rPr>
+              <a:t> A</a:t>
+            </a:r>
+            <a:r>
+              <a:rPr sz="1000" baseline="-25000">
+                <a:solidFill>
+                  <a:srgbClr val="1E2733"/>
+                </a:solidFill>
+                <a:latin typeface="Cambria Math"/>
+              </a:rPr>
+              <a:t>light</a:t>
+            </a:r>
+            <a:r>
+              <a:rPr sz="1400" b="0">
+                <a:solidFill>
+                  <a:srgbClr val="1E2733"/>
+                </a:solidFill>
+                <a:latin typeface="Cambria Math"/>
+              </a:rPr>
+              <a:t>(t) Φ</a:t>
+            </a:r>
+            <a:r>
+              <a:rPr sz="1000" baseline="-25000">
+                <a:solidFill>
+                  <a:srgbClr val="1E2733"/>
+                </a:solidFill>
+                <a:latin typeface="Cambria Math"/>
+              </a:rPr>
+              <a:t>light</a:t>
+            </a:r>
+            <a:r>
+              <a:rPr sz="1400" b="0">
+                <a:solidFill>
+                  <a:srgbClr val="1E2733"/>
+                </a:solidFill>
+                <a:latin typeface="Cambria Math"/>
+              </a:rPr>
+              <a:t>(p) Q</a:t>
+            </a:r>
+            <a:r>
+              <a:rPr sz="1000" baseline="-25000">
+                <a:solidFill>
+                  <a:srgbClr val="1E2733"/>
+                </a:solidFill>
+                <a:latin typeface="Cambria Math"/>
+              </a:rPr>
+              <a:t>light</a:t>
+            </a:r>
+            <a:r>
+              <a:rPr sz="1400" b="0">
+                <a:solidFill>
+                  <a:srgbClr val="1E2733"/>
+                </a:solidFill>
+                <a:latin typeface="Cambria Math"/>
+              </a:rPr>
+              <a:t>(p) V</a:t>
+            </a:r>
+            <a:r>
+              <a:rPr sz="1000" baseline="-25000">
+                <a:solidFill>
+                  <a:srgbClr val="1E2733"/>
+                </a:solidFill>
+                <a:latin typeface="Cambria Math"/>
+              </a:rPr>
+              <a:t>light</a:t>
+            </a:r>
+            <a:r>
+              <a:rPr sz="1400" b="0">
+                <a:solidFill>
+                  <a:srgbClr val="1E2733"/>
+                </a:solidFill>
+                <a:latin typeface="Cambria Math"/>
+              </a:rPr>
+              <a:t>(p)</a:t>
+            </a:r>
+          </a:p>
+          <a:p>
+            <a:pPr>
+              <a:lnSpc>
+                <a:spcPct val="114000"/>
+              </a:lnSpc>
+              <a:spcAft>
+                <a:spcPts val="400"/>
+              </a:spcAft>
+              <a:defRPr sz="1200">
+                <a:solidFill>
+                  <a:srgbClr val="1E2733"/>
+                </a:solidFill>
+                <a:latin typeface="Noto Sans TC"/>
+              </a:defRPr>
+            </a:pPr>
+            <a:r>
+              <a:rPr sz="1200" b="0">
+                <a:solidFill>
+                  <a:srgbClr val="1E2733"/>
+                </a:solidFill>
+                <a:latin typeface="Noto Sans TC"/>
+              </a:rPr>
+              <a:t>• Φ</a:t>
+            </a:r>
+            <a:r>
+              <a:rPr sz="800" baseline="-25000">
+                <a:solidFill>
+                  <a:srgbClr val="1E2733"/>
+                </a:solidFill>
+                <a:latin typeface="Noto Sans TC"/>
+              </a:rPr>
+              <a:t>light</a:t>
+            </a:r>
+            <a:r>
+              <a:rPr sz="1200" b="0">
+                <a:solidFill>
+                  <a:srgbClr val="1E2733"/>
+                </a:solidFill>
+                <a:latin typeface="Noto Sans TC"/>
+              </a:rPr>
+              <a:t>：由光束角推得的 cosine 方向權重</a:t>
+            </a:r>
+          </a:p>
+          <a:p>
+            <a:pPr>
+              <a:lnSpc>
+                <a:spcPct val="114000"/>
+              </a:lnSpc>
+              <a:spcAft>
+                <a:spcPts val="400"/>
+              </a:spcAft>
+              <a:defRPr sz="1200">
+                <a:solidFill>
+                  <a:srgbClr val="1E2733"/>
+                </a:solidFill>
+                <a:latin typeface="Noto Sans TC"/>
+              </a:defRPr>
+            </a:pPr>
+            <a:r>
+              <a:rPr sz="1200" b="0">
+                <a:solidFill>
+                  <a:srgbClr val="1E2733"/>
+                </a:solidFill>
+                <a:latin typeface="Noto Sans TC"/>
+              </a:rPr>
+              <a:t>• Q</a:t>
+            </a:r>
+            <a:r>
+              <a:rPr sz="800" baseline="-25000">
+                <a:solidFill>
+                  <a:srgbClr val="1E2733"/>
+                </a:solidFill>
+                <a:latin typeface="Noto Sans TC"/>
+              </a:rPr>
+              <a:t>light</a:t>
+            </a:r>
+            <a:r>
+              <a:rPr sz="1200" b="0">
+                <a:solidFill>
+                  <a:srgbClr val="1E2733"/>
+                </a:solidFill>
+                <a:latin typeface="Noto Sans TC"/>
+              </a:rPr>
+              <a:t>：參考距離正規化後的距離衰減；V</a:t>
+            </a:r>
+            <a:r>
+              <a:rPr sz="800" baseline="-25000">
+                <a:solidFill>
+                  <a:srgbClr val="1E2733"/>
+                </a:solidFill>
+                <a:latin typeface="Noto Sans TC"/>
+              </a:rPr>
+              <a:t>light</a:t>
+            </a:r>
+            <a:r>
+              <a:rPr sz="1200" b="0">
+                <a:solidFill>
+                  <a:srgbClr val="1E2733"/>
+                </a:solidFill>
+                <a:latin typeface="Noto Sans TC"/>
+              </a:rPr>
+              <a:t>：遮蔽或可見性</a:t>
             </a:r>
           </a:p>
           <a:p>
@@ -20443,7 +23057,25 @@
                 </a:solidFill>
                 <a:latin typeface="Cambria Math"/>
               </a:rPr>
-              <a:t>L_winᵃᵐᵇ(p,t)：窗戶帶來的擴散環境光</a:t>
+              <a:t>L</a:t>
+            </a:r>
+            <a:r>
+              <a:rPr sz="1000" baseline="-25000">
+                <a:solidFill>
+                  <a:srgbClr val="1E2733"/>
+                </a:solidFill>
+                <a:latin typeface="Cambria Math"/>
+              </a:rPr>
+              <a:t>win</a:t>
+            </a:r>
+            <a:r>
+              <a:rPr sz="1400" b="0">
+                <a:solidFill>
+                  <a:srgbClr val="1E2733"/>
+                </a:solidFill>
+                <a:latin typeface="Cambria Math"/>
+              </a:rPr>
+              <a:t>ᵃᵐᵇ(p,t)：窗戶帶來的擴散環境光</a:t>
             </a:r>
           </a:p>
           <a:p>
@@ -20468,7 +23100,7 @@
                 </a:solidFill>
                 <a:latin typeface="Noto Sans TC"/>
               </a:rPr>
-              <a:t>• G_light：燈具光通量尺度</a:t>
+              <a:t>• 直射與環境光分開，可描述窗邊與全室背景亮度</a:t>
             </a:r>
           </a:p>
           <a:p>
@@ -20493,32 +23125,7 @@
                 </a:solidFill>
                 <a:latin typeface="Noto Sans TC"/>
               </a:rPr>
-              <a:t>• P_light：燈具啟動或校正後影響尺度</a:t>
-            </a:r>
-          </a:p>
-          <a:p>
-            <a:pPr>
-              <a:lnSpc>
-                <a:spcPct val="114000"/>
-              </a:lnSpc>
-              <a:spcAft>
-                <a:spcPts val="400"/>
-              </a:spcAft>
-              <a:defRPr sz="1200">
-                <a:solidFill>
-                  <a:srgbClr val="1E2733"/>
-                </a:solidFill>
-                <a:latin typeface="Noto Sans TC"/>
-              </a:defRPr>
-            </a:pPr>
-            <a:r>
-              <a:rPr sz="1200" b="0">
-                <a:solidFill>
-                  <a:srgbClr val="1E2733"/>
-                </a:solidFill>
-                <a:latin typeface="Noto Sans TC"/>
-              </a:rPr>
-              <a:t>• 直射與環境光分開，可描述窗邊與全室背景亮度</a:t>
+              <a:t>• 數值例：500×1×0.8×0.5×0.4×1=80 lux</a:t>
             </a:r>
           </a:p>
         </p:txBody>
@@ -21069,7 +23676,7 @@
                 </a:solidFill>
                 <a:latin typeface="Noto Sans TC"/>
               </a:rPr>
-              <a:t>公式、符號意義、限制與可主張範圍</a:t>
+              <a:t>公式、符號意義、假設與限制</a:t>
             </a:r>
           </a:p>
         </p:txBody>
@@ -21294,7 +23901,115 @@
                 </a:solidFill>
                 <a:latin typeface="Cambria Math"/>
               </a:rPr>
-              <a:t>Iʳᵉᶠˡ(p,t) = Σ_s ρ_s Ī_s A_sʳᵉˡ exp(-||p-c_s||/ℓ_s)</a:t>
+              <a:t>Iʳᵉᶠˡ(p,t) = Σ</a:t>
+            </a:r>
+            <a:r>
+              <a:rPr sz="1000" baseline="-25000">
+                <a:solidFill>
+                  <a:srgbClr val="1E2733"/>
+                </a:solidFill>
+                <a:latin typeface="Cambria Math"/>
+              </a:rPr>
+              <a:t>s</a:t>
+            </a:r>
+            <a:r>
+              <a:rPr sz="1400" b="0">
+                <a:solidFill>
+                  <a:srgbClr val="1E2733"/>
+                </a:solidFill>
+                <a:latin typeface="Cambria Math"/>
+              </a:rPr>
+              <a:t> ρ</a:t>
+            </a:r>
+            <a:r>
+              <a:rPr sz="1000" baseline="-25000">
+                <a:solidFill>
+                  <a:srgbClr val="1E2733"/>
+                </a:solidFill>
+                <a:latin typeface="Cambria Math"/>
+              </a:rPr>
+              <a:t>s</a:t>
+            </a:r>
+            <a:r>
+              <a:rPr sz="1400" b="0">
+                <a:solidFill>
+                  <a:srgbClr val="1E2733"/>
+                </a:solidFill>
+                <a:latin typeface="Cambria Math"/>
+              </a:rPr>
+              <a:t> Ī</a:t>
+            </a:r>
+            <a:r>
+              <a:rPr sz="1000" baseline="-25000">
+                <a:solidFill>
+                  <a:srgbClr val="1E2733"/>
+                </a:solidFill>
+                <a:latin typeface="Cambria Math"/>
+              </a:rPr>
+              <a:t>s</a:t>
+            </a:r>
+            <a:r>
+              <a:rPr sz="1400" b="0">
+                <a:solidFill>
+                  <a:srgbClr val="1E2733"/>
+                </a:solidFill>
+                <a:latin typeface="Cambria Math"/>
+              </a:rPr>
+              <a:t> A</a:t>
+            </a:r>
+            <a:r>
+              <a:rPr sz="1000" baseline="-25000">
+                <a:solidFill>
+                  <a:srgbClr val="1E2733"/>
+                </a:solidFill>
+                <a:latin typeface="Cambria Math"/>
+              </a:rPr>
+              <a:t>s</a:t>
+            </a:r>
+            <a:r>
+              <a:rPr sz="1400" b="0">
+                <a:solidFill>
+                  <a:srgbClr val="1E2733"/>
+                </a:solidFill>
+                <a:latin typeface="Cambria Math"/>
+              </a:rPr>
+              <a:t>ʳᵉˡ exp(-||p-c</a:t>
+            </a:r>
+            <a:r>
+              <a:rPr sz="1000" baseline="-25000">
+                <a:solidFill>
+                  <a:srgbClr val="1E2733"/>
+                </a:solidFill>
+                <a:latin typeface="Cambria Math"/>
+              </a:rPr>
+              <a:t>s</a:t>
+            </a:r>
+            <a:r>
+              <a:rPr sz="1400" b="0">
+                <a:solidFill>
+                  <a:srgbClr val="1E2733"/>
+                </a:solidFill>
+                <a:latin typeface="Cambria Math"/>
+              </a:rPr>
+              <a:t>||/ℓ</a:t>
+            </a:r>
+            <a:r>
+              <a:rPr sz="1000" baseline="-25000">
+                <a:solidFill>
+                  <a:srgbClr val="1E2733"/>
+                </a:solidFill>
+                <a:latin typeface="Cambria Math"/>
+              </a:rPr>
+              <a:t>s</a:t>
+            </a:r>
+            <a:r>
+              <a:rPr sz="1400" b="0">
+                <a:solidFill>
+                  <a:srgbClr val="1E2733"/>
+                </a:solidFill>
+                <a:latin typeface="Cambria Math"/>
+              </a:rPr>
+              <a:t>)</a:t>
             </a:r>
           </a:p>
           <a:p>
@@ -21319,7 +24034,61 @@
                 </a:solidFill>
                 <a:latin typeface="Cambria Math"/>
               </a:rPr>
-              <a:t>× max(0, n_s·r̂_s→p) V_s(p)</a:t>
+              <a:t>× max(0, n</a:t>
+            </a:r>
+            <a:r>
+              <a:rPr sz="1000" baseline="-25000">
+                <a:solidFill>
+                  <a:srgbClr val="1E2733"/>
+                </a:solidFill>
+                <a:latin typeface="Cambria Math"/>
+              </a:rPr>
+              <a:t>s</a:t>
+            </a:r>
+            <a:r>
+              <a:rPr sz="1400" b="0">
+                <a:solidFill>
+                  <a:srgbClr val="1E2733"/>
+                </a:solidFill>
+                <a:latin typeface="Cambria Math"/>
+              </a:rPr>
+              <a:t>·r̂</a:t>
+            </a:r>
+            <a:r>
+              <a:rPr sz="1000" baseline="-25000">
+                <a:solidFill>
+                  <a:srgbClr val="1E2733"/>
+                </a:solidFill>
+                <a:latin typeface="Cambria Math"/>
+              </a:rPr>
+              <a:t>s</a:t>
+            </a:r>
+            <a:r>
+              <a:rPr sz="1400" b="0">
+                <a:solidFill>
+                  <a:srgbClr val="1E2733"/>
+                </a:solidFill>
+                <a:latin typeface="Cambria Math"/>
+              </a:rPr>
+              <a:t>→p) V</a:t>
+            </a:r>
+            <a:r>
+              <a:rPr sz="1000" baseline="-25000">
+                <a:solidFill>
+                  <a:srgbClr val="1E2733"/>
+                </a:solidFill>
+                <a:latin typeface="Cambria Math"/>
+              </a:rPr>
+              <a:t>s</a:t>
+            </a:r>
+            <a:r>
+              <a:rPr sz="1400" b="0">
+                <a:solidFill>
+                  <a:srgbClr val="1E2733"/>
+                </a:solidFill>
+                <a:latin typeface="Cambria Math"/>
+              </a:rPr>
+              <a:t>(p)</a:t>
             </a:r>
           </a:p>
           <a:p>
@@ -21369,7 +24138,25 @@
                 </a:solidFill>
                 <a:latin typeface="Noto Sans TC"/>
               </a:rPr>
-              <a:t>• ρ_s：表面反射率</a:t>
+              <a:t>• ρ</a:t>
+            </a:r>
+            <a:r>
+              <a:rPr sz="800" baseline="-25000">
+                <a:solidFill>
+                  <a:srgbClr val="1E2733"/>
+                </a:solidFill>
+                <a:latin typeface="Noto Sans TC"/>
+              </a:rPr>
+              <a:t>s</a:t>
+            </a:r>
+            <a:r>
+              <a:rPr sz="1200" b="0">
+                <a:solidFill>
+                  <a:srgbClr val="1E2733"/>
+                </a:solidFill>
+                <a:latin typeface="Noto Sans TC"/>
+              </a:rPr>
+              <a:t>：表面反射率</a:t>
             </a:r>
           </a:p>
           <a:p>
@@ -21394,7 +24181,25 @@
                 </a:solidFill>
                 <a:latin typeface="Noto Sans TC"/>
               </a:rPr>
-              <a:t>• Ī_s：表面接收到的平均照度</a:t>
+              <a:t>• Ī</a:t>
+            </a:r>
+            <a:r>
+              <a:rPr sz="800" baseline="-25000">
+                <a:solidFill>
+                  <a:srgbClr val="1E2733"/>
+                </a:solidFill>
+                <a:latin typeface="Noto Sans TC"/>
+              </a:rPr>
+              <a:t>s</a:t>
+            </a:r>
+            <a:r>
+              <a:rPr sz="1200" b="0">
+                <a:solidFill>
+                  <a:srgbClr val="1E2733"/>
+                </a:solidFill>
+                <a:latin typeface="Noto Sans TC"/>
+              </a:rPr>
+              <a:t>：表面接收到的平均照度</a:t>
             </a:r>
           </a:p>
         </p:txBody>
@@ -21571,7 +24376,7 @@
                 </a:solidFill>
                 <a:latin typeface="Noto Sans TC"/>
               </a:rPr>
-              <a:t>限制與說法</a:t>
+              <a:t>模型限制</a:t>
             </a:r>
           </a:p>
         </p:txBody>
@@ -21694,7 +24499,7 @@
                 </a:solidFill>
                 <a:latin typeface="Noto Sans TC"/>
               </a:rPr>
-              <a:t>• 可主張改善照度主要趨勢</a:t>
+              <a:t>• 主要用途是改善照度空間趨勢</a:t>
             </a:r>
           </a:p>
           <a:p>
@@ -21719,7 +24524,32 @@
                 </a:solidFill>
                 <a:latin typeface="Noto Sans TC"/>
               </a:rPr>
-              <a:t>• 不能主張達到精密光學模擬等級</a:t>
+              <a:t>• 不等同精密光學模擬等級</a:t>
+            </a:r>
+          </a:p>
+          <a:p>
+            <a:pPr>
+              <a:lnSpc>
+                <a:spcPct val="114000"/>
+              </a:lnSpc>
+              <a:spcAft>
+                <a:spcPts val="400"/>
+              </a:spcAft>
+              <a:defRPr sz="1200">
+                <a:solidFill>
+                  <a:srgbClr val="1E2733"/>
+                </a:solidFill>
+                <a:latin typeface="Noto Sans TC"/>
+              </a:defRPr>
+            </a:pPr>
+            <a:r>
+              <a:rPr sz="1200" b="0">
+                <a:solidFill>
+                  <a:srgbClr val="1E2733"/>
+                </a:solidFill>
+                <a:latin typeface="Noto Sans TC"/>
+              </a:rPr>
+              <a:t>• 數值例：0.6×200×0.5×0.4×0.8×1=19.2 lux</a:t>
             </a:r>
           </a:p>
         </p:txBody>
@@ -21938,7 +24768,7 @@
                 </a:solidFill>
                 <a:latin typeface="Noto Sans TC"/>
               </a:rPr>
-              <a:t>公式、符號意義、限制與可主張範圍</a:t>
+              <a:t>公式、符號意義、假設與限制</a:t>
             </a:r>
           </a:p>
         </p:txBody>
@@ -22263,7 +25093,7 @@
                 </a:solidFill>
                 <a:latin typeface="Noto Sans TC"/>
               </a:rPr>
-              <a:t>• 比 affine 多了交互項，仍保持低階可解釋</a:t>
+              <a:t>• 係數會依變數 v 與當次感測校正狀態而定</a:t>
             </a:r>
           </a:p>
         </p:txBody>
@@ -22589,6 +25419,31 @@
                 <a:latin typeface="Noto Sans TC"/>
               </a:rPr>
               <a:t>• 但不是唯一決定任意複雜真實場</a:t>
+            </a:r>
+          </a:p>
+          <a:p>
+            <a:pPr>
+              <a:lnSpc>
+                <a:spcPct val="114000"/>
+              </a:lnSpc>
+              <a:spcAft>
+                <a:spcPts val="400"/>
+              </a:spcAft>
+              <a:defRPr sz="1200">
+                <a:solidFill>
+                  <a:srgbClr val="1E2733"/>
+                </a:solidFill>
+                <a:latin typeface="Noto Sans TC"/>
+              </a:defRPr>
+            </a:pPr>
+            <a:r>
+              <a:rPr sz="1200" b="0">
+                <a:solidFill>
+                  <a:srgbClr val="1E2733"/>
+                </a:solidFill>
+                <a:latin typeface="Noto Sans TC"/>
+              </a:rPr>
+              <a:t>• 數值例：X=Y=Z=0.5 → C=0.375</a:t>
             </a:r>
           </a:p>
         </p:txBody>
@@ -22807,7 +25662,7 @@
                 </a:solidFill>
                 <a:latin typeface="Noto Sans TC"/>
               </a:rPr>
-              <a:t>公式、符號意義、限制與可主張範圍</a:t>
+              <a:t>公式、符號意義、假設與限制</a:t>
             </a:r>
           </a:p>
         </p:txBody>
@@ -23530,6 +26385,85 @@
                 <a:latin typeface="Noto Sans TC"/>
               </a:rPr>
               <a:t>• 這一步讓模型與真實稀疏感測資料對齊</a:t>
+            </a:r>
+          </a:p>
+          <a:p>
+            <a:pPr>
+              <a:lnSpc>
+                <a:spcPct val="114000"/>
+              </a:lnSpc>
+              <a:spcAft>
+                <a:spcPts val="400"/>
+              </a:spcAft>
+              <a:defRPr sz="1200">
+                <a:solidFill>
+                  <a:srgbClr val="1E2733"/>
+                </a:solidFill>
+                <a:latin typeface="Noto Sans TC"/>
+              </a:defRPr>
+            </a:pPr>
+            <a:r>
+              <a:rPr sz="1200" b="0">
+                <a:solidFill>
+                  <a:srgbClr val="1E2733"/>
+                </a:solidFill>
+                <a:latin typeface="Noto Sans TC"/>
+              </a:rPr>
+              <a:t>• 數值例：O</a:t>
+            </a:r>
+            <a:r>
+              <a:rPr sz="800" baseline="-25000">
+                <a:solidFill>
+                  <a:srgbClr val="1E2733"/>
+                </a:solidFill>
+                <a:latin typeface="Noto Sans TC"/>
+              </a:rPr>
+              <a:t>T</a:t>
+            </a:r>
+            <a:r>
+              <a:rPr sz="1200" b="0">
+                <a:solidFill>
+                  <a:srgbClr val="1E2733"/>
+                </a:solidFill>
+                <a:latin typeface="Noto Sans TC"/>
+              </a:rPr>
+              <a:t>=27.2,N</a:t>
+            </a:r>
+            <a:r>
+              <a:rPr sz="800" baseline="-25000">
+                <a:solidFill>
+                  <a:srgbClr val="1E2733"/>
+                </a:solidFill>
+                <a:latin typeface="Noto Sans TC"/>
+              </a:rPr>
+              <a:t>T</a:t>
+            </a:r>
+            <a:r>
+              <a:rPr sz="1200" b="0">
+                <a:solidFill>
+                  <a:srgbClr val="1E2733"/>
+                </a:solidFill>
+                <a:latin typeface="Noto Sans TC"/>
+              </a:rPr>
+              <a:t>=26.8 → r</a:t>
+            </a:r>
+            <a:r>
+              <a:rPr sz="800" baseline="-25000">
+                <a:solidFill>
+                  <a:srgbClr val="1E2733"/>
+                </a:solidFill>
+                <a:latin typeface="Noto Sans TC"/>
+              </a:rPr>
+              <a:t>T</a:t>
+            </a:r>
+            <a:r>
+              <a:rPr sz="1200" b="0">
+                <a:solidFill>
+                  <a:srgbClr val="1E2733"/>
+                </a:solidFill>
+                <a:latin typeface="Noto Sans TC"/>
+              </a:rPr>
+              <a:t>=+0.4°C</a:t>
             </a:r>
           </a:p>
         </p:txBody>
@@ -23748,7 +26682,7 @@
                 </a:solidFill>
                 <a:latin typeface="Noto Sans TC"/>
               </a:rPr>
-              <a:t>公式、符號意義、限制與可主張範圍</a:t>
+              <a:t>公式、符號意義、假設與限制</a:t>
             </a:r>
           </a:p>
         </p:txBody>
@@ -23982,7 +26916,7 @@
                 </a:solidFill>
                 <a:latin typeface="Cambria Math"/>
               </a:rPr>
-              <a:t>a,b,c∈{0,1</a:t>
+              <a:t>a,b,c∈B</a:t>
             </a:r>
             <a:r>
               <a:rPr sz="1400" b="0">
@@ -23991,7 +26925,7 @@
                 </a:solidFill>
                 <a:latin typeface="Cambria Math"/>
               </a:rPr>
-              <a:t>} rᵛ</a:t>
+              <a:t> rᵛ</a:t>
             </a:r>
             <a:r>
               <a:rPr sz="1000" baseline="-25000">
@@ -24034,7 +26968,61 @@
                 </a:solidFill>
                 <a:latin typeface="Cambria Math"/>
               </a:rPr>
-              <a:t>× ℓ_a(X) ℓ_b(Y) ℓ_c(Z)</a:t>
+              <a:t>× ℓ</a:t>
+            </a:r>
+            <a:r>
+              <a:rPr sz="1000" baseline="-25000">
+                <a:solidFill>
+                  <a:srgbClr val="1E2733"/>
+                </a:solidFill>
+                <a:latin typeface="Cambria Math"/>
+              </a:rPr>
+              <a:t>a</a:t>
+            </a:r>
+            <a:r>
+              <a:rPr sz="1400" b="0">
+                <a:solidFill>
+                  <a:srgbClr val="1E2733"/>
+                </a:solidFill>
+                <a:latin typeface="Cambria Math"/>
+              </a:rPr>
+              <a:t>(X) ℓ</a:t>
+            </a:r>
+            <a:r>
+              <a:rPr sz="1000" baseline="-25000">
+                <a:solidFill>
+                  <a:srgbClr val="1E2733"/>
+                </a:solidFill>
+                <a:latin typeface="Cambria Math"/>
+              </a:rPr>
+              <a:t>b</a:t>
+            </a:r>
+            <a:r>
+              <a:rPr sz="1400" b="0">
+                <a:solidFill>
+                  <a:srgbClr val="1E2733"/>
+                </a:solidFill>
+                <a:latin typeface="Cambria Math"/>
+              </a:rPr>
+              <a:t>(Y) ℓ</a:t>
+            </a:r>
+            <a:r>
+              <a:rPr sz="1000" baseline="-25000">
+                <a:solidFill>
+                  <a:srgbClr val="1E2733"/>
+                </a:solidFill>
+                <a:latin typeface="Cambria Math"/>
+              </a:rPr>
+              <a:t>c</a:t>
+            </a:r>
+            <a:r>
+              <a:rPr sz="1400" b="0">
+                <a:solidFill>
+                  <a:srgbClr val="1E2733"/>
+                </a:solidFill>
+                <a:latin typeface="Cambria Math"/>
+              </a:rPr>
+              <a:t>(Z), B={0,1}</a:t>
             </a:r>
           </a:p>
           <a:p>
@@ -24435,6 +27423,31 @@
                 <a:latin typeface="Noto Sans TC"/>
               </a:rPr>
               <a:t>• 這是本研究 8 點推估最核心的數學基礎</a:t>
+            </a:r>
+          </a:p>
+          <a:p>
+            <a:pPr>
+              <a:lnSpc>
+                <a:spcPct val="114000"/>
+              </a:lnSpc>
+              <a:spcAft>
+                <a:spcPts val="400"/>
+              </a:spcAft>
+              <a:defRPr sz="1200">
+                <a:solidFill>
+                  <a:srgbClr val="1E2733"/>
+                </a:solidFill>
+                <a:latin typeface="Noto Sans TC"/>
+              </a:defRPr>
+            </a:pPr>
+            <a:r>
+              <a:rPr sz="1200" b="0">
+                <a:solidFill>
+                  <a:srgbClr val="1E2733"/>
+                </a:solidFill>
+                <a:latin typeface="Noto Sans TC"/>
+              </a:rPr>
+              <a:t>• 數值例：中心點權重各 1/8，Σr=1.6 → C=0.2</a:t>
             </a:r>
           </a:p>
         </p:txBody>
@@ -24653,7 +27666,7 @@
                 </a:solidFill>
                 <a:latin typeface="Noto Sans TC"/>
               </a:rPr>
-              <a:t>公式、符號意義、限制與可主張範圍</a:t>
+              <a:t>公式、符號意義、假設與限制</a:t>
             </a:r>
           </a:p>
         </p:txBody>
@@ -25191,7 +28204,7 @@
                 </a:solidFill>
                 <a:latin typeface="Noto Sans TC"/>
               </a:rPr>
-              <a:t>主張邊界</a:t>
+              <a:t>適用範圍</a:t>
             </a:r>
           </a:p>
         </p:txBody>
@@ -25264,7 +28277,7 @@
                 </a:solidFill>
                 <a:latin typeface="Noto Sans TC"/>
               </a:rPr>
-              <a:t>• 我們證明的是三線性 residual correction 的一致性與可表示範圍</a:t>
+              <a:t>• 三線性 residual correction 在角點與觀測一致</a:t>
             </a:r>
           </a:p>
           <a:p>
@@ -25314,7 +28327,7 @@
                 </a:solidFill>
                 <a:latin typeface="Noto Sans TC"/>
               </a:rPr>
-              <a:t>• 所以主張是接近主要空間趨勢</a:t>
+              <a:t>• 適用於主要空間趨勢估計</a:t>
             </a:r>
           </a:p>
           <a:p>
@@ -25339,7 +28352,86 @@
                 </a:solidFill>
                 <a:latin typeface="Noto Sans TC"/>
               </a:rPr>
-              <a:t>• 不是宣稱無條件還原任意真實室內場</a:t>
+              <a:t>• 不等同無條件還原任意真實室內場</a:t>
+            </a:r>
+          </a:p>
+          <a:p>
+            <a:pPr>
+              <a:lnSpc>
+                <a:spcPct val="114000"/>
+              </a:lnSpc>
+              <a:spcAft>
+                <a:spcPts val="400"/>
+              </a:spcAft>
+              <a:defRPr sz="1200">
+                <a:solidFill>
+                  <a:srgbClr val="1E2733"/>
+                </a:solidFill>
+                <a:latin typeface="Noto Sans TC"/>
+              </a:defRPr>
+            </a:pPr>
+            <a:r>
+              <a:rPr sz="1200" b="0">
+                <a:solidFill>
+                  <a:srgbClr val="1E2733"/>
+                </a:solidFill>
+                <a:latin typeface="Noto Sans TC"/>
+              </a:rPr>
+              <a:t>• 數值例：N</a:t>
+            </a:r>
+            <a:r>
+              <a:rPr sz="800" baseline="-25000">
+                <a:solidFill>
+                  <a:srgbClr val="1E2733"/>
+                </a:solidFill>
+                <a:latin typeface="Noto Sans TC"/>
+              </a:rPr>
+              <a:t>T</a:t>
+            </a:r>
+            <a:r>
+              <a:rPr sz="1200" b="0">
+                <a:solidFill>
+                  <a:srgbClr val="1E2733"/>
+                </a:solidFill>
+                <a:latin typeface="Noto Sans TC"/>
+              </a:rPr>
+              <a:t>=26.8,C</a:t>
+            </a:r>
+            <a:r>
+              <a:rPr sz="800" baseline="-25000">
+                <a:solidFill>
+                  <a:srgbClr val="1E2733"/>
+                </a:solidFill>
+                <a:latin typeface="Noto Sans TC"/>
+              </a:rPr>
+              <a:t>T</a:t>
+            </a:r>
+            <a:r>
+              <a:rPr sz="1200" b="0">
+                <a:solidFill>
+                  <a:srgbClr val="1E2733"/>
+                </a:solidFill>
+                <a:latin typeface="Noto Sans TC"/>
+              </a:rPr>
+              <a:t>=0.4 → F̂</a:t>
+            </a:r>
+            <a:r>
+              <a:rPr sz="800" baseline="-25000">
+                <a:solidFill>
+                  <a:srgbClr val="1E2733"/>
+                </a:solidFill>
+                <a:latin typeface="Noto Sans TC"/>
+              </a:rPr>
+              <a:t>T</a:t>
+            </a:r>
+            <a:r>
+              <a:rPr sz="1200" b="0">
+                <a:solidFill>
+                  <a:srgbClr val="1E2733"/>
+                </a:solidFill>
+                <a:latin typeface="Noto Sans TC"/>
+              </a:rPr>
+              <a:t>=27.2°C</a:t>
             </a:r>
           </a:p>
         </p:txBody>
@@ -25558,7 +28650,7 @@
                 </a:solidFill>
                 <a:latin typeface="Noto Sans TC"/>
               </a:rPr>
-              <a:t>公式、符號意義、限制與可主張範圍</a:t>
+              <a:t>公式、符號意義、假設與限制</a:t>
             </a:r>
           </a:p>
         </p:txBody>
@@ -26060,7 +29152,7 @@
                 </a:solidFill>
                 <a:latin typeface="Noto Sans TC"/>
               </a:rPr>
-              <a:t>嚴謹主張</a:t>
+              <a:t>適用範圍</a:t>
             </a:r>
           </a:p>
         </p:txBody>
@@ -26108,7 +29200,7 @@
                 </a:solidFill>
                 <a:latin typeface="Noto Sans TC"/>
               </a:rPr>
-              <a:t>• 這不是說所有室內場都一定是三線性</a:t>
+              <a:t>• 並非所有室內場都必然三線性</a:t>
             </a:r>
           </a:p>
           <a:p>
@@ -26133,7 +29225,7 @@
                 </a:solidFill>
                 <a:latin typeface="Noto Sans TC"/>
               </a:rPr>
-              <a:t>• 而是說在三線性 residual 假設下可完全重建</a:t>
+              <a:t>• 三線性 residual 假設下可完全重建</a:t>
             </a:r>
           </a:p>
           <a:p>
@@ -26158,7 +29250,7 @@
                 </a:solidFill>
                 <a:latin typeface="Noto Sans TC"/>
               </a:rPr>
-              <a:t>• 對平滑但非三線性的 residual，則用誤差界描述接近程度</a:t>
+              <a:t>• 平滑但非三線性的 residual 可由誤差界描述接近程度</a:t>
             </a:r>
           </a:p>
           <a:p>
@@ -26183,7 +29275,7 @@
                 </a:solidFill>
                 <a:latin typeface="Noto Sans TC"/>
               </a:rPr>
-              <a:t>• 對突發局部熱源、光斑或遮蔽尖峰，8 點不保證捕捉</a:t>
+              <a:t>• 突發局部熱源、光斑或遮蔽尖峰需額外資料補強</a:t>
             </a:r>
           </a:p>
           <a:p>
@@ -26208,7 +29300,32 @@
                 </a:solidFill>
                 <a:latin typeface="Noto Sans TC"/>
               </a:rPr>
-              <a:t>• 這樣的 claim boundary 比較嚴謹</a:t>
+              <a:t>• 此條件界定模型適用範圍</a:t>
+            </a:r>
+          </a:p>
+          <a:p>
+            <a:pPr>
+              <a:lnSpc>
+                <a:spcPct val="114000"/>
+              </a:lnSpc>
+              <a:spcAft>
+                <a:spcPts val="400"/>
+              </a:spcAft>
+              <a:defRPr sz="1200">
+                <a:solidFill>
+                  <a:srgbClr val="1E2733"/>
+                </a:solidFill>
+                <a:latin typeface="Noto Sans TC"/>
+              </a:defRPr>
+            </a:pPr>
+            <a:r>
+              <a:rPr sz="1200" b="0">
+                <a:solidFill>
+                  <a:srgbClr val="1E2733"/>
+                </a:solidFill>
+                <a:latin typeface="Noto Sans TC"/>
+              </a:rPr>
+              <a:t>• 數值例：R=0.2+0.3X+0.1Y，(0.5,0.5,0)→0.40</a:t>
             </a:r>
           </a:p>
         </p:txBody>
@@ -26427,7 +29544,7 @@
                 </a:solidFill>
                 <a:latin typeface="Noto Sans TC"/>
               </a:rPr>
-              <a:t>公式、符號意義、限制與可主張範圍</a:t>
+              <a:t>公式、符號意義、假設與限制</a:t>
             </a:r>
           </a:p>
         </p:txBody>
@@ -26604,7 +29721,7 @@
                 </a:solidFill>
                 <a:latin typeface="Noto Sans TC"/>
               </a:rPr>
-              <a:t>誤差上界</a:t>
+              <a:t>這個上界在衡量什麼</a:t>
             </a:r>
           </a:p>
         </p:txBody>
@@ -26652,24 +29769,17 @@
                 </a:solidFill>
                 <a:latin typeface="Cambria Math"/>
               </a:rPr>
-              <a:t>|Rᵥ(p,t) - Cᵥ(p,t)| ≤ W²M_xx/8 + L²M_yy/8</a:t>
-            </a:r>
-          </a:p>
-          <a:p>
-            <a:pPr>
-              <a:lnSpc>
-                <a:spcPct val="108000"/>
-              </a:lnSpc>
-              <a:spcAft>
-                <a:spcPts val="200"/>
-              </a:spcAft>
-              <a:defRPr sz="1400">
-                <a:solidFill>
-                  <a:srgbClr val="1E2733"/>
-                </a:solidFill>
-                <a:latin typeface="Cambria Math"/>
-              </a:defRPr>
-            </a:pPr>
+              <a:t>|Rᵥ-Cᵥ| ≤ W²M</a:t>
+            </a:r>
+            <a:r>
+              <a:rPr sz="1000" baseline="-25000">
+                <a:solidFill>
+                  <a:srgbClr val="1E2733"/>
+                </a:solidFill>
+                <a:latin typeface="Cambria Math"/>
+              </a:rPr>
+              <a:t>xx</a:t>
+            </a:r>
             <a:r>
               <a:rPr sz="1400" b="0">
                 <a:solidFill>
@@ -26677,24 +29787,17 @@
                 </a:solidFill>
                 <a:latin typeface="Cambria Math"/>
               </a:rPr>
-              <a:t>+ H²M_zz/8</a:t>
-            </a:r>
-          </a:p>
-          <a:p>
-            <a:pPr>
-              <a:lnSpc>
-                <a:spcPct val="108000"/>
-              </a:lnSpc>
-              <a:spcAft>
-                <a:spcPts val="200"/>
-              </a:spcAft>
-              <a:defRPr sz="1400">
-                <a:solidFill>
-                  <a:srgbClr val="1E2733"/>
-                </a:solidFill>
-                <a:latin typeface="Cambria Math"/>
-              </a:defRPr>
-            </a:pPr>
+              <a:t>/8 + L²M</a:t>
+            </a:r>
+            <a:r>
+              <a:rPr sz="1000" baseline="-25000">
+                <a:solidFill>
+                  <a:srgbClr val="1E2733"/>
+                </a:solidFill>
+                <a:latin typeface="Cambria Math"/>
+              </a:rPr>
+              <a:t>yy</a:t>
+            </a:r>
             <a:r>
               <a:rPr sz="1400" b="0">
                 <a:solidFill>
@@ -26702,24 +29805,17 @@
                 </a:solidFill>
                 <a:latin typeface="Cambria Math"/>
               </a:rPr>
-              <a:t>Rᵥ：真實 residual</a:t>
-            </a:r>
-          </a:p>
-          <a:p>
-            <a:pPr>
-              <a:lnSpc>
-                <a:spcPct val="108000"/>
-              </a:lnSpc>
-              <a:spcAft>
-                <a:spcPts val="200"/>
-              </a:spcAft>
-              <a:defRPr sz="1400">
-                <a:solidFill>
-                  <a:srgbClr val="1E2733"/>
-                </a:solidFill>
-                <a:latin typeface="Cambria Math"/>
-              </a:defRPr>
-            </a:pPr>
+              <a:t>/8 + H²M</a:t>
+            </a:r>
+            <a:r>
+              <a:rPr sz="1000" baseline="-25000">
+                <a:solidFill>
+                  <a:srgbClr val="1E2733"/>
+                </a:solidFill>
+                <a:latin typeface="Cambria Math"/>
+              </a:rPr>
+              <a:t>zz</a:t>
+            </a:r>
             <a:r>
               <a:rPr sz="1400" b="0">
                 <a:solidFill>
@@ -26727,7 +29823,7 @@
                 </a:solidFill>
                 <a:latin typeface="Cambria Math"/>
               </a:rPr>
-              <a:t>Cᵥ：三線性校正 residual</a:t>
+              <a:t>/8</a:t>
             </a:r>
           </a:p>
           <a:p>
@@ -26752,7 +29848,136 @@
                 </a:solidFill>
                 <a:latin typeface="Noto Sans TC"/>
               </a:rPr>
-              <a:t>• W/L/H：房間寬、長、高</a:t>
+              <a:t>• 左邊：某個未量測點的 residual 可能補錯多少</a:t>
+            </a:r>
+          </a:p>
+          <a:p>
+            <a:pPr>
+              <a:lnSpc>
+                <a:spcPct val="114000"/>
+              </a:lnSpc>
+              <a:spcAft>
+                <a:spcPts val="400"/>
+              </a:spcAft>
+              <a:defRPr sz="1200">
+                <a:solidFill>
+                  <a:srgbClr val="1E2733"/>
+                </a:solidFill>
+                <a:latin typeface="Noto Sans TC"/>
+              </a:defRPr>
+            </a:pPr>
+            <a:r>
+              <a:rPr sz="1200" b="0">
+                <a:solidFill>
+                  <a:srgbClr val="1E2733"/>
+                </a:solidFill>
+                <a:latin typeface="Noto Sans TC"/>
+              </a:rPr>
+              <a:t>• M</a:t>
+            </a:r>
+            <a:r>
+              <a:rPr sz="800" baseline="-25000">
+                <a:solidFill>
+                  <a:srgbClr val="1E2733"/>
+                </a:solidFill>
+                <a:latin typeface="Noto Sans TC"/>
+              </a:rPr>
+              <a:t>xx</a:t>
+            </a:r>
+            <a:r>
+              <a:rPr sz="1200" b="0">
+                <a:solidFill>
+                  <a:srgbClr val="1E2733"/>
+                </a:solidFill>
+                <a:latin typeface="Noto Sans TC"/>
+              </a:rPr>
+              <a:t> ≥ max|∂²Rᵥ/∂x²|：x 方向曲率上界</a:t>
+            </a:r>
+          </a:p>
+          <a:p>
+            <a:pPr>
+              <a:lnSpc>
+                <a:spcPct val="114000"/>
+              </a:lnSpc>
+              <a:spcAft>
+                <a:spcPts val="400"/>
+              </a:spcAft>
+              <a:defRPr sz="1200">
+                <a:solidFill>
+                  <a:srgbClr val="1E2733"/>
+                </a:solidFill>
+                <a:latin typeface="Noto Sans TC"/>
+              </a:defRPr>
+            </a:pPr>
+            <a:r>
+              <a:rPr sz="1200" b="0">
+                <a:solidFill>
+                  <a:srgbClr val="1E2733"/>
+                </a:solidFill>
+                <a:latin typeface="Noto Sans TC"/>
+              </a:rPr>
+              <a:t>• M</a:t>
+            </a:r>
+            <a:r>
+              <a:rPr sz="800" baseline="-25000">
+                <a:solidFill>
+                  <a:srgbClr val="1E2733"/>
+                </a:solidFill>
+                <a:latin typeface="Noto Sans TC"/>
+              </a:rPr>
+              <a:t>yy</a:t>
+            </a:r>
+            <a:r>
+              <a:rPr sz="1200" b="0">
+                <a:solidFill>
+                  <a:srgbClr val="1E2733"/>
+                </a:solidFill>
+                <a:latin typeface="Noto Sans TC"/>
+              </a:rPr>
+              <a:t>、M</a:t>
+            </a:r>
+            <a:r>
+              <a:rPr sz="800" baseline="-25000">
+                <a:solidFill>
+                  <a:srgbClr val="1E2733"/>
+                </a:solidFill>
+                <a:latin typeface="Noto Sans TC"/>
+              </a:rPr>
+              <a:t>zz</a:t>
+            </a:r>
+            <a:r>
+              <a:rPr sz="1200" b="0">
+                <a:solidFill>
+                  <a:srgbClr val="1E2733"/>
+                </a:solidFill>
+                <a:latin typeface="Noto Sans TC"/>
+              </a:rPr>
+              <a:t> 同理對應 y/z 方向</a:t>
+            </a:r>
+          </a:p>
+          <a:p>
+            <a:pPr>
+              <a:lnSpc>
+                <a:spcPct val="114000"/>
+              </a:lnSpc>
+              <a:spcAft>
+                <a:spcPts val="400"/>
+              </a:spcAft>
+              <a:defRPr sz="1200">
+                <a:solidFill>
+                  <a:srgbClr val="1E2733"/>
+                </a:solidFill>
+                <a:latin typeface="Noto Sans TC"/>
+              </a:defRPr>
+            </a:pPr>
+            <a:r>
+              <a:rPr sz="1200" b="0">
+                <a:solidFill>
+                  <a:srgbClr val="1E2733"/>
+                </a:solidFill>
+                <a:latin typeface="Noto Sans TC"/>
+              </a:rPr>
+              <a:t>• W/L/H 越大，補間跨度越長</a:t>
             </a:r>
           </a:p>
         </p:txBody>
@@ -26929,7 +30154,7 @@
                 </a:solidFill>
                 <a:latin typeface="Noto Sans TC"/>
               </a:rPr>
-              <a:t>如何解釋「接近」</a:t>
+              <a:t>為什麼會這樣</a:t>
             </a:r>
           </a:p>
         </p:txBody>
@@ -26963,21 +30188,21 @@
               <a:spcAft>
                 <a:spcPts val="400"/>
               </a:spcAft>
-              <a:defRPr sz="1200">
-                <a:solidFill>
-                  <a:srgbClr val="1E2733"/>
-                </a:solidFill>
-                <a:latin typeface="Noto Sans TC"/>
-              </a:defRPr>
-            </a:pPr>
-            <a:r>
-              <a:rPr sz="1200" b="0">
-                <a:solidFill>
-                  <a:srgbClr val="1E2733"/>
-                </a:solidFill>
-                <a:latin typeface="Noto Sans TC"/>
-              </a:rPr>
-              <a:t>• M_xx/M_yy/M_zz 是 residual 二階曲率上界</a:t>
+              <a:defRPr sz="1100">
+                <a:solidFill>
+                  <a:srgbClr val="1E2733"/>
+                </a:solidFill>
+                <a:latin typeface="Noto Sans TC"/>
+              </a:defRPr>
+            </a:pPr>
+            <a:r>
+              <a:rPr sz="1100" b="0">
+                <a:solidFill>
+                  <a:srgbClr val="1E2733"/>
+                </a:solidFill>
+                <a:latin typeface="Noto Sans TC"/>
+              </a:rPr>
+              <a:t>• xx 表示對 x 微分兩次，不是 x×x</a:t>
             </a:r>
           </a:p>
           <a:p>
@@ -26988,21 +30213,21 @@
               <a:spcAft>
                 <a:spcPts val="400"/>
               </a:spcAft>
-              <a:defRPr sz="1200">
-                <a:solidFill>
-                  <a:srgbClr val="1E2733"/>
-                </a:solidFill>
-                <a:latin typeface="Noto Sans TC"/>
-              </a:defRPr>
-            </a:pPr>
-            <a:r>
-              <a:rPr sz="1200" b="0">
-                <a:solidFill>
-                  <a:srgbClr val="1E2733"/>
-                </a:solidFill>
-                <a:latin typeface="Noto Sans TC"/>
-              </a:rPr>
-              <a:t>• 曲率越小，代表 residual 越平滑</a:t>
+              <a:defRPr sz="1100">
+                <a:solidFill>
+                  <a:srgbClr val="1E2733"/>
+                </a:solidFill>
+                <a:latin typeface="Noto Sans TC"/>
+              </a:defRPr>
+            </a:pPr>
+            <a:r>
+              <a:rPr sz="1100" b="0">
+                <a:solidFill>
+                  <a:srgbClr val="1E2733"/>
+                </a:solidFill>
+                <a:latin typeface="Noto Sans TC"/>
+              </a:rPr>
+              <a:t>• 線性補間用端點連線近似中間曲線</a:t>
             </a:r>
           </a:p>
           <a:p>
@@ -27013,21 +30238,21 @@
               <a:spcAft>
                 <a:spcPts val="400"/>
               </a:spcAft>
-              <a:defRPr sz="1200">
-                <a:solidFill>
-                  <a:srgbClr val="1E2733"/>
-                </a:solidFill>
-                <a:latin typeface="Noto Sans TC"/>
-              </a:defRPr>
-            </a:pPr>
-            <a:r>
-              <a:rPr sz="1200" b="0">
-                <a:solidFill>
-                  <a:srgbClr val="1E2733"/>
-                </a:solidFill>
-                <a:latin typeface="Noto Sans TC"/>
-              </a:rPr>
-              <a:t>• 平滑時，8 點三線性補間誤差可被上界限制</a:t>
+              <a:defRPr sz="1100">
+                <a:solidFill>
+                  <a:srgbClr val="1E2733"/>
+                </a:solidFill>
+                <a:latin typeface="Noto Sans TC"/>
+              </a:defRPr>
+            </a:pPr>
+            <a:r>
+              <a:rPr sz="1100" b="0">
+                <a:solidFill>
+                  <a:srgbClr val="1E2733"/>
+                </a:solidFill>
+                <a:latin typeface="Noto Sans TC"/>
+              </a:rPr>
+              <a:t>• 若 residual 是直線，二階導數為 0</a:t>
             </a:r>
           </a:p>
           <a:p>
@@ -27038,21 +30263,21 @@
               <a:spcAft>
                 <a:spcPts val="400"/>
               </a:spcAft>
-              <a:defRPr sz="1200">
-                <a:solidFill>
-                  <a:srgbClr val="1E2733"/>
-                </a:solidFill>
-                <a:latin typeface="Noto Sans TC"/>
-              </a:defRPr>
-            </a:pPr>
-            <a:r>
-              <a:rPr sz="1200" b="0">
-                <a:solidFill>
-                  <a:srgbClr val="1E2733"/>
-                </a:solidFill>
-                <a:latin typeface="Noto Sans TC"/>
-              </a:rPr>
-              <a:t>• 所以可說「在平滑 residual 假設下接近真實情況」</a:t>
+              <a:defRPr sz="1100">
+                <a:solidFill>
+                  <a:srgbClr val="1E2733"/>
+                </a:solidFill>
+                <a:latin typeface="Noto Sans TC"/>
+              </a:defRPr>
+            </a:pPr>
+            <a:r>
+              <a:rPr sz="1100" b="0">
+                <a:solidFill>
+                  <a:srgbClr val="1E2733"/>
+                </a:solidFill>
+                <a:latin typeface="Noto Sans TC"/>
+              </a:rPr>
+              <a:t>• 曲率越大，中間點越可能偏離直線</a:t>
             </a:r>
           </a:p>
           <a:p>
@@ -27063,21 +30288,71 @@
               <a:spcAft>
                 <a:spcPts val="400"/>
               </a:spcAft>
-              <a:defRPr sz="1200">
-                <a:solidFill>
-                  <a:srgbClr val="1E2733"/>
-                </a:solidFill>
-                <a:latin typeface="Noto Sans TC"/>
-              </a:defRPr>
-            </a:pPr>
-            <a:r>
-              <a:rPr sz="1200" b="0">
-                <a:solidFill>
-                  <a:srgbClr val="1E2733"/>
-                </a:solidFill>
-                <a:latin typeface="Noto Sans TC"/>
-              </a:rPr>
-              <a:t>• 不能說高頻局部變化也一定準確</a:t>
+              <a:defRPr sz="1100">
+                <a:solidFill>
+                  <a:srgbClr val="1E2733"/>
+                </a:solidFill>
+                <a:latin typeface="Noto Sans TC"/>
+              </a:defRPr>
+            </a:pPr>
+            <a:r>
+              <a:rPr sz="1100" b="0">
+                <a:solidFill>
+                  <a:srgbClr val="1E2733"/>
+                </a:solidFill>
+                <a:latin typeface="Noto Sans TC"/>
+              </a:rPr>
+              <a:t>• 三線性補間是 x/y/z 三方向線性補間</a:t>
+            </a:r>
+          </a:p>
+          <a:p>
+            <a:pPr>
+              <a:lnSpc>
+                <a:spcPct val="114000"/>
+              </a:lnSpc>
+              <a:spcAft>
+                <a:spcPts val="400"/>
+              </a:spcAft>
+              <a:defRPr sz="1100">
+                <a:solidFill>
+                  <a:srgbClr val="1E2733"/>
+                </a:solidFill>
+                <a:latin typeface="Noto Sans TC"/>
+              </a:defRPr>
+            </a:pPr>
+            <a:r>
+              <a:rPr sz="1100" b="0">
+                <a:solidFill>
+                  <a:srgbClr val="1E2733"/>
+                </a:solidFill>
+                <a:latin typeface="Noto Sans TC"/>
+              </a:rPr>
+              <a:t>• 平滑 residual 可控；尖峰或光斑需更多資料</a:t>
+            </a:r>
+          </a:p>
+          <a:p>
+            <a:pPr>
+              <a:lnSpc>
+                <a:spcPct val="114000"/>
+              </a:lnSpc>
+              <a:spcAft>
+                <a:spcPts val="400"/>
+              </a:spcAft>
+              <a:defRPr sz="1100">
+                <a:solidFill>
+                  <a:srgbClr val="1E2733"/>
+                </a:solidFill>
+                <a:latin typeface="Noto Sans TC"/>
+              </a:defRPr>
+            </a:pPr>
+            <a:r>
+              <a:rPr sz="1100" b="0">
+                <a:solidFill>
+                  <a:srgbClr val="1E2733"/>
+                </a:solidFill>
+                <a:latin typeface="Noto Sans TC"/>
+              </a:rPr>
+              <a:t>• 數值例：W=6,L=4,H=3,M=(0.01,0.02,0.01) → bound≈0.096</a:t>
             </a:r>
           </a:p>
         </p:txBody>
@@ -27296,7 +30571,7 @@
                 </a:solidFill>
                 <a:latin typeface="Noto Sans TC"/>
               </a:rPr>
-              <a:t>公式、符號意義、限制與可主張範圍</a:t>
+              <a:t>公式、符號意義、假設與限制</a:t>
             </a:r>
           </a:p>
         </p:txBody>
@@ -27473,7 +30748,7 @@
                 </a:solidFill>
                 <a:latin typeface="Noto Sans TC"/>
               </a:rPr>
-              <a:t>特徵向量</a:t>
+              <a:t>before/after delta</a:t>
             </a:r>
           </a:p>
         </p:txBody>
@@ -27521,7 +30796,181 @@
                 </a:solidFill>
                 <a:latin typeface="Cambria Math"/>
               </a:rPr>
-              <a:t>φᵢ = [xᵢ,yᵢ,zᵢ,tᵢ, baseline, outdoor, F_temp,</a:t>
+              <a:t>Δy</a:t>
+            </a:r>
+            <a:r>
+              <a:rPr sz="1000" baseline="-25000">
+                <a:solidFill>
+                  <a:srgbClr val="1E2733"/>
+                </a:solidFill>
+                <a:latin typeface="Cambria Math"/>
+              </a:rPr>
+              <a:t>m</a:t>
+            </a:r>
+            <a:r>
+              <a:rPr sz="1400" b="0">
+                <a:solidFill>
+                  <a:srgbClr val="1E2733"/>
+                </a:solidFill>
+                <a:latin typeface="Cambria Math"/>
+              </a:rPr>
+              <a:t> = y</a:t>
+            </a:r>
+            <a:r>
+              <a:rPr sz="1000" baseline="-25000">
+                <a:solidFill>
+                  <a:srgbClr val="1E2733"/>
+                </a:solidFill>
+                <a:latin typeface="Cambria Math"/>
+              </a:rPr>
+              <a:t>m</a:t>
+            </a:r>
+            <a:r>
+              <a:rPr sz="1400" b="0">
+                <a:solidFill>
+                  <a:srgbClr val="1E2733"/>
+                </a:solidFill>
+                <a:latin typeface="Cambria Math"/>
+              </a:rPr>
+              <a:t>ᵃᶠᵗᵉʳ - y</a:t>
+            </a:r>
+            <a:r>
+              <a:rPr sz="1000" baseline="-25000">
+                <a:solidFill>
+                  <a:srgbClr val="1E2733"/>
+                </a:solidFill>
+                <a:latin typeface="Cambria Math"/>
+              </a:rPr>
+              <a:t>m</a:t>
+            </a:r>
+            <a:r>
+              <a:rPr sz="1400" b="0">
+                <a:solidFill>
+                  <a:srgbClr val="1E2733"/>
+                </a:solidFill>
+                <a:latin typeface="Cambria Math"/>
+              </a:rPr>
+              <a:t>ᵇᵉᶠᵒʳᵉ</a:t>
+            </a:r>
+          </a:p>
+          <a:p>
+            <a:pPr>
+              <a:lnSpc>
+                <a:spcPct val="108000"/>
+              </a:lnSpc>
+              <a:spcAft>
+                <a:spcPts val="200"/>
+              </a:spcAft>
+              <a:defRPr sz="1400">
+                <a:solidFill>
+                  <a:srgbClr val="1E2733"/>
+                </a:solidFill>
+                <a:latin typeface="Cambria Math"/>
+              </a:defRPr>
+            </a:pPr>
+            <a:r>
+              <a:rPr sz="1400" b="0">
+                <a:solidFill>
+                  <a:srgbClr val="1E2733"/>
+                </a:solidFill>
+                <a:latin typeface="Cambria Math"/>
+              </a:rPr>
+              <a:t>m ∈ {T,H,L}</a:t>
+            </a:r>
+          </a:p>
+          <a:p>
+            <a:pPr>
+              <a:lnSpc>
+                <a:spcPct val="108000"/>
+              </a:lnSpc>
+              <a:spcAft>
+                <a:spcPts val="200"/>
+              </a:spcAft>
+              <a:defRPr sz="1400">
+                <a:solidFill>
+                  <a:srgbClr val="1E2733"/>
+                </a:solidFill>
+                <a:latin typeface="Cambria Math"/>
+              </a:defRPr>
+            </a:pPr>
+            <a:r>
+              <a:rPr sz="1400" b="0">
+                <a:solidFill>
+                  <a:srgbClr val="1E2733"/>
+                </a:solidFill>
+                <a:latin typeface="Cambria Math"/>
+              </a:rPr>
+              <a:t>X</a:t>
+            </a:r>
+            <a:r>
+              <a:rPr sz="1000" baseline="-25000">
+                <a:solidFill>
+                  <a:srgbClr val="1E2733"/>
+                </a:solidFill>
+                <a:latin typeface="Cambria Math"/>
+              </a:rPr>
+              <a:t>i,k</a:t>
+            </a:r>
+            <a:r>
+              <a:rPr sz="1400" b="0">
+                <a:solidFill>
+                  <a:srgbClr val="1E2733"/>
+                </a:solidFill>
+                <a:latin typeface="Cambria Math"/>
+              </a:rPr>
+              <a:t>：第 i 個感測點對第 k 個裝置 envelope</a:t>
+            </a:r>
+          </a:p>
+          <a:p>
+            <a:pPr>
+              <a:lnSpc>
+                <a:spcPct val="108000"/>
+              </a:lnSpc>
+              <a:spcAft>
+                <a:spcPts val="200"/>
+              </a:spcAft>
+              <a:defRPr sz="1400">
+                <a:solidFill>
+                  <a:srgbClr val="1E2733"/>
+                </a:solidFill>
+                <a:latin typeface="Cambria Math"/>
+              </a:defRPr>
+            </a:pPr>
+            <a:r>
+              <a:rPr sz="1400" b="0">
+                <a:solidFill>
+                  <a:srgbClr val="1E2733"/>
+                </a:solidFill>
+                <a:latin typeface="Cambria Math"/>
+              </a:rPr>
+              <a:t>Δy</a:t>
+            </a:r>
+            <a:r>
+              <a:rPr sz="1000" baseline="-25000">
+                <a:solidFill>
+                  <a:srgbClr val="1E2733"/>
+                </a:solidFill>
+                <a:latin typeface="Cambria Math"/>
+              </a:rPr>
+              <a:t>m</a:t>
+            </a:r>
+            <a:r>
+              <a:rPr sz="1400" b="0">
+                <a:solidFill>
+                  <a:srgbClr val="1E2733"/>
+                </a:solidFill>
+                <a:latin typeface="Cambria Math"/>
+              </a:rPr>
+              <a:t> ≈ X β</a:t>
+            </a:r>
+            <a:r>
+              <a:rPr sz="1000" baseline="-25000">
+                <a:solidFill>
+                  <a:srgbClr val="1E2733"/>
+                </a:solidFill>
+                <a:latin typeface="Cambria Math"/>
+              </a:rPr>
+              <a:t>m</a:t>
             </a:r>
           </a:p>
           <a:p>
@@ -27546,82 +30995,7 @@
                 </a:solidFill>
                 <a:latin typeface="Noto Sans TC"/>
               </a:rPr>
-              <a:t>• F_hum, F_illum, activations, powers, envelopes]</a:t>
-            </a:r>
-          </a:p>
-          <a:p>
-            <a:pPr>
-              <a:lnSpc>
-                <a:spcPct val="108000"/>
-              </a:lnSpc>
-              <a:spcAft>
-                <a:spcPts val="200"/>
-              </a:spcAft>
-              <a:defRPr sz="1400">
-                <a:solidFill>
-                  <a:srgbClr val="1E2733"/>
-                </a:solidFill>
-                <a:latin typeface="Cambria Math"/>
-              </a:defRPr>
-            </a:pPr>
-            <a:r>
-              <a:rPr sz="1400" b="0">
-                <a:solidFill>
-                  <a:srgbClr val="1E2733"/>
-                </a:solidFill>
-                <a:latin typeface="Cambria Math"/>
-              </a:rPr>
-              <a:t>φᵢ 是模型已知的情境特徵</a:t>
-            </a:r>
-          </a:p>
-          <a:p>
-            <a:pPr>
-              <a:lnSpc>
-                <a:spcPct val="114000"/>
-              </a:lnSpc>
-              <a:spcAft>
-                <a:spcPts val="400"/>
-              </a:spcAft>
-              <a:defRPr sz="1200">
-                <a:solidFill>
-                  <a:srgbClr val="1E2733"/>
-                </a:solidFill>
-                <a:latin typeface="Noto Sans TC"/>
-              </a:defRPr>
-            </a:pPr>
-            <a:r>
-              <a:rPr sz="1200" b="0">
-                <a:solidFill>
-                  <a:srgbClr val="1E2733"/>
-                </a:solidFill>
-                <a:latin typeface="Noto Sans TC"/>
-              </a:rPr>
-              <a:t>• 包含位置、時間、室內外條件與設備作用強度</a:t>
-            </a:r>
-          </a:p>
-          <a:p>
-            <a:pPr>
-              <a:lnSpc>
-                <a:spcPct val="114000"/>
-              </a:lnSpc>
-              <a:spcAft>
-                <a:spcPts val="400"/>
-              </a:spcAft>
-              <a:defRPr sz="1200">
-                <a:solidFill>
-                  <a:srgbClr val="1E2733"/>
-                </a:solidFill>
-                <a:latin typeface="Noto Sans TC"/>
-              </a:defRPr>
-            </a:pPr>
-            <a:r>
-              <a:rPr sz="1200" b="0">
-                <a:solidFill>
-                  <a:srgbClr val="1E2733"/>
-                </a:solidFill>
-                <a:latin typeface="Noto Sans TC"/>
-              </a:rPr>
-              <a:t>• 目標是從觀測差異學出非連網設備的影響係數</a:t>
+              <a:t>• 同一筆 record 綁定裝置狀態、baseline 與 outdoor</a:t>
             </a:r>
           </a:p>
         </p:txBody>
@@ -27798,7 +31172,7 @@
                 </a:solidFill>
                 <a:latin typeface="Noto Sans TC"/>
               </a:rPr>
-              <a:t>標籤定義</a:t>
+              <a:t>least-squares 估計</a:t>
             </a:r>
           </a:p>
         </p:txBody>
@@ -27846,7 +31220,61 @@
                 </a:solidFill>
                 <a:latin typeface="Cambria Math"/>
               </a:rPr>
-              <a:t>yᵢᵛ = F_trueᵛ(pᵢ,tᵢ) - Fᵥ(pᵢ,tᵢ)</a:t>
+              <a:t>β</a:t>
+            </a:r>
+            <a:r>
+              <a:rPr sz="1000" baseline="-25000">
+                <a:solidFill>
+                  <a:srgbClr val="1E2733"/>
+                </a:solidFill>
+                <a:latin typeface="Cambria Math"/>
+              </a:rPr>
+              <a:t>m</a:t>
+            </a:r>
+            <a:r>
+              <a:rPr sz="1400" b="0">
+                <a:solidFill>
+                  <a:srgbClr val="1E2733"/>
+                </a:solidFill>
+                <a:latin typeface="Cambria Math"/>
+              </a:rPr>
+              <a:t> = argmin</a:t>
+            </a:r>
+            <a:r>
+              <a:rPr sz="1000" baseline="-25000">
+                <a:solidFill>
+                  <a:srgbClr val="1E2733"/>
+                </a:solidFill>
+                <a:latin typeface="Cambria Math"/>
+              </a:rPr>
+              <a:t>β</a:t>
+            </a:r>
+            <a:r>
+              <a:rPr sz="1400" b="0">
+                <a:solidFill>
+                  <a:srgbClr val="1E2733"/>
+                </a:solidFill>
+                <a:latin typeface="Cambria Math"/>
+              </a:rPr>
+              <a:t> ||Δy</a:t>
+            </a:r>
+            <a:r>
+              <a:rPr sz="1000" baseline="-25000">
+                <a:solidFill>
+                  <a:srgbClr val="1E2733"/>
+                </a:solidFill>
+                <a:latin typeface="Cambria Math"/>
+              </a:rPr>
+              <a:t>m</a:t>
+            </a:r>
+            <a:r>
+              <a:rPr sz="1400" b="0">
+                <a:solidFill>
+                  <a:srgbClr val="1E2733"/>
+                </a:solidFill>
+                <a:latin typeface="Cambria Math"/>
+              </a:rPr>
+              <a:t> - Xβ||²₂</a:t>
             </a:r>
           </a:p>
           <a:p>
@@ -27871,7 +31299,25 @@
                 </a:solidFill>
                 <a:latin typeface="Cambria Math"/>
               </a:rPr>
-              <a:t>yᵢᵛ 是主模型尚未吸收的 residual target</a:t>
+              <a:t>β</a:t>
+            </a:r>
+            <a:r>
+              <a:rPr sz="1000" baseline="-25000">
+                <a:solidFill>
+                  <a:srgbClr val="1E2733"/>
+                </a:solidFill>
+                <a:latin typeface="Cambria Math"/>
+              </a:rPr>
+              <a:t>m</a:t>
+            </a:r>
+            <a:r>
+              <a:rPr sz="1400" b="0">
+                <a:solidFill>
+                  <a:srgbClr val="1E2733"/>
+                </a:solidFill>
+                <a:latin typeface="Cambria Math"/>
+              </a:rPr>
+              <a:t>：裝置對第 m 個因子的影響係數</a:t>
             </a:r>
           </a:p>
           <a:p>
@@ -27896,7 +31342,7 @@
                 </a:solidFill>
                 <a:latin typeface="Noto Sans TC"/>
               </a:rPr>
-              <a:t>• before/after 觀測提供設備啟用造成的差異訊號</a:t>
+              <a:t>• X：由 influence envelope 組成的設計矩陣</a:t>
             </a:r>
           </a:p>
           <a:p>
@@ -27921,7 +31367,7 @@
                 </a:solidFill>
                 <a:latin typeface="Noto Sans TC"/>
               </a:rPr>
-              <a:t>• least-squares 適合小資料、可解釋且可快速重算</a:t>
+              <a:t>• before/after 觀測提供真實操作造成的差異訊號</a:t>
             </a:r>
           </a:p>
           <a:p>
@@ -27946,7 +31392,32 @@
                 </a:solidFill>
                 <a:latin typeface="Noto Sans TC"/>
               </a:rPr>
-              <a:t>• 若多個未知事件重疊，學到的是混合效果</a:t>
+              <a:t>• 多事件重疊時係數代表混合效果</a:t>
+            </a:r>
+          </a:p>
+          <a:p>
+            <a:pPr>
+              <a:lnSpc>
+                <a:spcPct val="114000"/>
+              </a:lnSpc>
+              <a:spcAft>
+                <a:spcPts val="400"/>
+              </a:spcAft>
+              <a:defRPr sz="1200">
+                <a:solidFill>
+                  <a:srgbClr val="1E2733"/>
+                </a:solidFill>
+                <a:latin typeface="Noto Sans TC"/>
+              </a:defRPr>
+            </a:pPr>
+            <a:r>
+              <a:rPr sz="1200" b="0">
+                <a:solidFill>
+                  <a:srgbClr val="1E2733"/>
+                </a:solidFill>
+                <a:latin typeface="Noto Sans TC"/>
+              </a:rPr>
+              <a:t>• 數值例：X=[1,0.5], Δy=[-0.8,-0.4] → β=-0.8</a:t>
             </a:r>
           </a:p>
         </p:txBody>
@@ -28165,7 +31636,7 @@
                 </a:solidFill>
                 <a:latin typeface="Noto Sans TC"/>
               </a:rPr>
-              <a:t>公式、符號意義、限制與可主張範圍</a:t>
+              <a:t>公式、符號意義、假設與限制</a:t>
             </a:r>
           </a:p>
         </p:txBody>
@@ -28390,7 +31861,25 @@
                 </a:solidFill>
                 <a:latin typeface="Cambria Math"/>
               </a:rPr>
-              <a:t>F_hybridᵛ(p,t) = Fᵥ(p,t) + Rᵥ(p,t; θᵥ)</a:t>
+              <a:t>F</a:t>
+            </a:r>
+            <a:r>
+              <a:rPr sz="1000" baseline="-25000">
+                <a:solidFill>
+                  <a:srgbClr val="1E2733"/>
+                </a:solidFill>
+                <a:latin typeface="Cambria Math"/>
+              </a:rPr>
+              <a:t>hybrid</a:t>
+            </a:r>
+            <a:r>
+              <a:rPr sz="1400" b="0">
+                <a:solidFill>
+                  <a:srgbClr val="1E2733"/>
+                </a:solidFill>
+                <a:latin typeface="Cambria Math"/>
+              </a:rPr>
+              <a:t>ᵛ(p,t) = Fᵥ(p,t) + Rᵥ(p,t; θᵥ)</a:t>
             </a:r>
           </a:p>
           <a:p>
@@ -28816,6 +32305,49 @@
                 <a:latin typeface="Noto Sans TC"/>
               </a:rPr>
               <a:t>• LOO 結果代表標準情境 family 內 residual 可學習</a:t>
+            </a:r>
+          </a:p>
+          <a:p>
+            <a:pPr>
+              <a:lnSpc>
+                <a:spcPct val="114000"/>
+              </a:lnSpc>
+              <a:spcAft>
+                <a:spcPts val="400"/>
+              </a:spcAft>
+              <a:defRPr sz="1200">
+                <a:solidFill>
+                  <a:srgbClr val="1E2733"/>
+                </a:solidFill>
+                <a:latin typeface="Noto Sans TC"/>
+              </a:defRPr>
+            </a:pPr>
+            <a:r>
+              <a:rPr sz="1200" b="0">
+                <a:solidFill>
+                  <a:srgbClr val="1E2733"/>
+                </a:solidFill>
+                <a:latin typeface="Noto Sans TC"/>
+              </a:rPr>
+              <a:t>• 數值例：F=27.0,R=-0.3 → F</a:t>
+            </a:r>
+            <a:r>
+              <a:rPr sz="800" baseline="-25000">
+                <a:solidFill>
+                  <a:srgbClr val="1E2733"/>
+                </a:solidFill>
+                <a:latin typeface="Noto Sans TC"/>
+              </a:rPr>
+              <a:t>hybrid</a:t>
+            </a:r>
+            <a:r>
+              <a:rPr sz="1200" b="0">
+                <a:solidFill>
+                  <a:srgbClr val="1E2733"/>
+                </a:solidFill>
+                <a:latin typeface="Noto Sans TC"/>
+              </a:rPr>
+              <a:t>=26.7°C</a:t>
             </a:r>
           </a:p>
         </p:txBody>
@@ -29034,7 +32566,7 @@
                 </a:solidFill>
                 <a:latin typeface="Noto Sans TC"/>
               </a:rPr>
-              <a:t>公式、符號意義、限制與可主張範圍</a:t>
+              <a:t>公式、符號意義、假設與限制</a:t>
             </a:r>
           </a:p>
         </p:txBody>
@@ -29259,7 +32791,25 @@
                 </a:solidFill>
                 <a:latin typeface="Cambria Math"/>
               </a:rPr>
-              <a:t>Rᵥ*(p,t) = F_trueᵛ(p,t) - Fᵥ(p,t)</a:t>
+              <a:t>Rᵥ*(p,t) = F</a:t>
+            </a:r>
+            <a:r>
+              <a:rPr sz="1000" baseline="-25000">
+                <a:solidFill>
+                  <a:srgbClr val="1E2733"/>
+                </a:solidFill>
+                <a:latin typeface="Cambria Math"/>
+              </a:rPr>
+              <a:t>true</a:t>
+            </a:r>
+            <a:r>
+              <a:rPr sz="1400" b="0">
+                <a:solidFill>
+                  <a:srgbClr val="1E2733"/>
+                </a:solidFill>
+                <a:latin typeface="Cambria Math"/>
+              </a:rPr>
+              <a:t>ᵛ(p,t) - Fᵥ(p,t)</a:t>
             </a:r>
           </a:p>
           <a:p>
@@ -29284,7 +32834,25 @@
                 </a:solidFill>
                 <a:latin typeface="Cambria Math"/>
               </a:rPr>
-              <a:t>F_trueᵛ：訓練或合成 truth 場</a:t>
+              <a:t>F</a:t>
+            </a:r>
+            <a:r>
+              <a:rPr sz="1000" baseline="-25000">
+                <a:solidFill>
+                  <a:srgbClr val="1E2733"/>
+                </a:solidFill>
+                <a:latin typeface="Cambria Math"/>
+              </a:rPr>
+              <a:t>true</a:t>
+            </a:r>
+            <a:r>
+              <a:rPr sz="1400" b="0">
+                <a:solidFill>
+                  <a:srgbClr val="1E2733"/>
+                </a:solidFill>
+                <a:latin typeface="Cambria Math"/>
+              </a:rPr>
+              <a:t>ᵛ：訓練或合成 truth 場</a:t>
             </a:r>
           </a:p>
           <a:p>
@@ -29584,7 +33152,7 @@
                 </a:solidFill>
                 <a:latin typeface="Cambria Math"/>
               </a:rPr>
-              <a:t>ℒ(θᵥ) = (1/N)Σᵢ ||Rᵥ* - Rᵥ(pᵢ,tᵢ;θᵥ)||²</a:t>
+              <a:t>ℒ(θᵥ) = (1/N)Σᵢ ||Rᵥ*(pᵢ,tᵢ)</a:t>
             </a:r>
           </a:p>
           <a:p>
@@ -29609,7 +33177,7 @@
                 </a:solidFill>
                 <a:latin typeface="Cambria Math"/>
               </a:rPr>
-              <a:t>+ λ||θᵥ||²</a:t>
+              <a:t>- Rᵥ(pᵢ,tᵢ;θᵥ)||² + λ||θᵥ||²</a:t>
             </a:r>
           </a:p>
           <a:p>
@@ -29685,6 +33253,31 @@
                 <a:latin typeface="Noto Sans TC"/>
               </a:rPr>
               <a:t>• 溫濕度響應較平滑可低通；照度因光源/遮蔽需保留快速跳變</a:t>
+            </a:r>
+          </a:p>
+          <a:p>
+            <a:pPr>
+              <a:lnSpc>
+                <a:spcPct val="114000"/>
+              </a:lnSpc>
+              <a:spcAft>
+                <a:spcPts val="400"/>
+              </a:spcAft>
+              <a:defRPr sz="1200">
+                <a:solidFill>
+                  <a:srgbClr val="1E2733"/>
+                </a:solidFill>
+                <a:latin typeface="Noto Sans TC"/>
+              </a:defRPr>
+            </a:pPr>
+            <a:r>
+              <a:rPr sz="1200" b="0">
+                <a:solidFill>
+                  <a:srgbClr val="1E2733"/>
+                </a:solidFill>
+                <a:latin typeface="Noto Sans TC"/>
+              </a:rPr>
+              <a:t>• 數值例：errors=(0.2,-0.1), λ||θ||²=0.01 → ℒ=0.035</a:t>
             </a:r>
           </a:p>
         </p:txBody>
@@ -30437,7 +34030,7 @@
                 </a:solidFill>
                 <a:latin typeface="Noto Sans TC"/>
               </a:rPr>
-              <a:t>公式、符號意義、限制與可主張範圍</a:t>
+              <a:t>公式、符號意義、假設與限制</a:t>
             </a:r>
           </a:p>
         </p:txBody>
@@ -30693,6 +34286,67 @@
           <a:p>
             <a:pPr>
               <a:lnSpc>
+                <a:spcPct val="108000"/>
+              </a:lnSpc>
+              <a:spcAft>
+                <a:spcPts val="200"/>
+              </a:spcAft>
+              <a:defRPr sz="1400">
+                <a:solidFill>
+                  <a:srgbClr val="1E2733"/>
+                </a:solidFill>
+                <a:latin typeface="Cambria Math"/>
+              </a:defRPr>
+            </a:pPr>
+            <a:r>
+              <a:rPr sz="1400" b="0">
+                <a:solidFill>
+                  <a:srgbClr val="1E2733"/>
+                </a:solidFill>
+                <a:latin typeface="Cambria Math"/>
+              </a:rPr>
+              <a:t>Corr = cov(ŷ,y)/(σ</a:t>
+            </a:r>
+            <a:r>
+              <a:rPr sz="1000" baseline="-25000">
+                <a:solidFill>
+                  <a:srgbClr val="1E2733"/>
+                </a:solidFill>
+                <a:latin typeface="Cambria Math"/>
+              </a:rPr>
+              <a:t>ŷ</a:t>
+            </a:r>
+            <a:r>
+              <a:rPr sz="1400" b="0">
+                <a:solidFill>
+                  <a:srgbClr val="1E2733"/>
+                </a:solidFill>
+                <a:latin typeface="Cambria Math"/>
+              </a:rPr>
+              <a:t> σ</a:t>
+            </a:r>
+            <a:r>
+              <a:rPr sz="1000" baseline="-25000">
+                <a:solidFill>
+                  <a:srgbClr val="1E2733"/>
+                </a:solidFill>
+                <a:latin typeface="Cambria Math"/>
+              </a:rPr>
+              <a:t>y</a:t>
+            </a:r>
+            <a:r>
+              <a:rPr sz="1400" b="0">
+                <a:solidFill>
+                  <a:srgbClr val="1E2733"/>
+                </a:solidFill>
+                <a:latin typeface="Cambria Math"/>
+              </a:rPr>
+              <a:t>)</a:t>
+            </a:r>
+          </a:p>
+          <a:p>
+            <a:pPr>
+              <a:lnSpc>
                 <a:spcPct val="114000"/>
               </a:lnSpc>
               <a:spcAft>
@@ -30712,32 +34366,7 @@
                 </a:solidFill>
                 <a:latin typeface="Noto Sans TC"/>
               </a:rPr>
-              <a:t>• ŷᵢ：模型估計值</a:t>
-            </a:r>
-          </a:p>
-          <a:p>
-            <a:pPr>
-              <a:lnSpc>
-                <a:spcPct val="108000"/>
-              </a:lnSpc>
-              <a:spcAft>
-                <a:spcPts val="200"/>
-              </a:spcAft>
-              <a:defRPr sz="1400">
-                <a:solidFill>
-                  <a:srgbClr val="1E2733"/>
-                </a:solidFill>
-                <a:latin typeface="Cambria Math"/>
-              </a:defRPr>
-            </a:pPr>
-            <a:r>
-              <a:rPr sz="1400" b="0">
-                <a:solidFill>
-                  <a:srgbClr val="1E2733"/>
-                </a:solidFill>
-                <a:latin typeface="Cambria Math"/>
-              </a:rPr>
-              <a:t>yᵢ：truth 或觀測參考值</a:t>
+              <a:t>• ŷᵢ：模型估計值；yᵢ：truth 或觀測</a:t>
             </a:r>
           </a:p>
           <a:p>
@@ -31018,26 +34647,26 @@
           <a:p>
             <a:pPr>
               <a:lnSpc>
-                <a:spcPct val="114000"/>
+                <a:spcPct val="108000"/>
               </a:lnSpc>
               <a:spcAft>
-                <a:spcPts val="400"/>
+                <a:spcPts val="200"/>
               </a:spcAft>
-              <a:defRPr sz="1200">
-                <a:solidFill>
-                  <a:srgbClr val="1E2733"/>
-                </a:solidFill>
-                <a:latin typeface="Noto Sans TC"/>
-              </a:defRPr>
-            </a:pPr>
-            <a:r>
-              <a:rPr sz="1200" b="0">
-                <a:solidFill>
-                  <a:srgbClr val="1E2733"/>
-                </a:solidFill>
-                <a:latin typeface="Noto Sans TC"/>
-              </a:rPr>
-              <a:t>• Correlation 用於公開資料時序任務，檢查趨勢是否同向</a:t>
+              <a:defRPr sz="1400">
+                <a:solidFill>
+                  <a:srgbClr val="1E2733"/>
+                </a:solidFill>
+                <a:latin typeface="Cambria Math"/>
+              </a:defRPr>
+            </a:pPr>
+            <a:r>
+              <a:rPr sz="1400" b="0">
+                <a:solidFill>
+                  <a:srgbClr val="1E2733"/>
+                </a:solidFill>
+                <a:latin typeface="Cambria Math"/>
+              </a:rPr>
+              <a:t>Correlation 用於公開資料時序任務，檢查趨勢是否同向</a:t>
             </a:r>
           </a:p>
           <a:p>
@@ -31048,15 +34677,15 @@
               <a:spcAft>
                 <a:spcPts val="400"/>
               </a:spcAft>
-              <a:defRPr sz="1200">
-                <a:solidFill>
-                  <a:srgbClr val="1E2733"/>
-                </a:solidFill>
-                <a:latin typeface="Noto Sans TC"/>
-              </a:defRPr>
-            </a:pPr>
-            <a:r>
-              <a:rPr sz="1200" b="0">
+              <a:defRPr sz="1100">
+                <a:solidFill>
+                  <a:srgbClr val="1E2733"/>
+                </a:solidFill>
+                <a:latin typeface="Noto Sans TC"/>
+              </a:defRPr>
+            </a:pPr>
+            <a:r>
+              <a:rPr sz="1100" b="0">
                 <a:solidFill>
                   <a:srgbClr val="1E2733"/>
                 </a:solidFill>
@@ -31073,21 +34702,46 @@
               <a:spcAft>
                 <a:spcPts val="400"/>
               </a:spcAft>
-              <a:defRPr sz="1200">
-                <a:solidFill>
-                  <a:srgbClr val="1E2733"/>
-                </a:solidFill>
-                <a:latin typeface="Noto Sans TC"/>
-              </a:defRPr>
-            </a:pPr>
-            <a:r>
-              <a:rPr sz="1200" b="0">
+              <a:defRPr sz="1100">
+                <a:solidFill>
+                  <a:srgbClr val="1E2733"/>
+                </a:solidFill>
+                <a:latin typeface="Noto Sans TC"/>
+              </a:defRPr>
+            </a:pPr>
+            <a:r>
+              <a:rPr sz="1100" b="0">
                 <a:solidFill>
                   <a:srgbClr val="1E2733"/>
                 </a:solidFill>
                 <a:latin typeface="Noto Sans TC"/>
               </a:rPr>
               <a:t>• 照度量級較大，圖表常用 log-scale 避免遮蔽溫濕度差異</a:t>
+            </a:r>
+          </a:p>
+          <a:p>
+            <a:pPr>
+              <a:lnSpc>
+                <a:spcPct val="114000"/>
+              </a:lnSpc>
+              <a:spcAft>
+                <a:spcPts val="400"/>
+              </a:spcAft>
+              <a:defRPr sz="1100">
+                <a:solidFill>
+                  <a:srgbClr val="1E2733"/>
+                </a:solidFill>
+                <a:latin typeface="Noto Sans TC"/>
+              </a:defRPr>
+            </a:pPr>
+            <a:r>
+              <a:rPr sz="1100" b="0">
+                <a:solidFill>
+                  <a:srgbClr val="1E2733"/>
+                </a:solidFill>
+                <a:latin typeface="Noto Sans TC"/>
+              </a:rPr>
+              <a:t>• 數值例：ŷ=[1,2,3], y=[1,2,4] → MAE=0.33, RMSE=0.58, Corr≈0.98</a:t>
             </a:r>
           </a:p>
         </p:txBody>
@@ -31306,7 +34960,7 @@
                 </a:solidFill>
                 <a:latin typeface="Noto Sans TC"/>
               </a:rPr>
-              <a:t>公式、符號意義、限制與可主張範圍</a:t>
+              <a:t>公式、符號意義、假設與限制</a:t>
             </a:r>
           </a:p>
         </p:txBody>
@@ -31531,7 +35185,88 @@
                 </a:solidFill>
                 <a:latin typeface="Cambria Math"/>
               </a:rPr>
-              <a:t>IDW(p) = Σ_s w_s O_s / Σ_s w_s</a:t>
+              <a:t>IDW(p) = Σ</a:t>
+            </a:r>
+            <a:r>
+              <a:rPr sz="1000" baseline="-25000">
+                <a:solidFill>
+                  <a:srgbClr val="1E2733"/>
+                </a:solidFill>
+                <a:latin typeface="Cambria Math"/>
+              </a:rPr>
+              <a:t>s</a:t>
+            </a:r>
+            <a:r>
+              <a:rPr sz="1400" b="0">
+                <a:solidFill>
+                  <a:srgbClr val="1E2733"/>
+                </a:solidFill>
+                <a:latin typeface="Cambria Math"/>
+              </a:rPr>
+              <a:t> w</a:t>
+            </a:r>
+            <a:r>
+              <a:rPr sz="1000" baseline="-25000">
+                <a:solidFill>
+                  <a:srgbClr val="1E2733"/>
+                </a:solidFill>
+                <a:latin typeface="Cambria Math"/>
+              </a:rPr>
+              <a:t>s</a:t>
+            </a:r>
+            <a:r>
+              <a:rPr sz="1400" b="0">
+                <a:solidFill>
+                  <a:srgbClr val="1E2733"/>
+                </a:solidFill>
+                <a:latin typeface="Cambria Math"/>
+              </a:rPr>
+              <a:t> O</a:t>
+            </a:r>
+            <a:r>
+              <a:rPr sz="1000" baseline="-25000">
+                <a:solidFill>
+                  <a:srgbClr val="1E2733"/>
+                </a:solidFill>
+                <a:latin typeface="Cambria Math"/>
+              </a:rPr>
+              <a:t>s</a:t>
+            </a:r>
+            <a:r>
+              <a:rPr sz="1400" b="0">
+                <a:solidFill>
+                  <a:srgbClr val="1E2733"/>
+                </a:solidFill>
+                <a:latin typeface="Cambria Math"/>
+              </a:rPr>
+              <a:t> / Σ</a:t>
+            </a:r>
+            <a:r>
+              <a:rPr sz="1000" baseline="-25000">
+                <a:solidFill>
+                  <a:srgbClr val="1E2733"/>
+                </a:solidFill>
+                <a:latin typeface="Cambria Math"/>
+              </a:rPr>
+              <a:t>s</a:t>
+            </a:r>
+            <a:r>
+              <a:rPr sz="1400" b="0">
+                <a:solidFill>
+                  <a:srgbClr val="1E2733"/>
+                </a:solidFill>
+                <a:latin typeface="Cambria Math"/>
+              </a:rPr>
+              <a:t> w</a:t>
+            </a:r>
+            <a:r>
+              <a:rPr sz="1000" baseline="-25000">
+                <a:solidFill>
+                  <a:srgbClr val="1E2733"/>
+                </a:solidFill>
+                <a:latin typeface="Cambria Math"/>
+              </a:rPr>
+              <a:t>s</a:t>
             </a:r>
           </a:p>
           <a:p>
@@ -31556,7 +35291,25 @@
                 </a:solidFill>
                 <a:latin typeface="Cambria Math"/>
               </a:rPr>
-              <a:t>w_s = 1 / (dist(p,s) + ε)^q</a:t>
+              <a:t>w</a:t>
+            </a:r>
+            <a:r>
+              <a:rPr sz="1000" baseline="-25000">
+                <a:solidFill>
+                  <a:srgbClr val="1E2733"/>
+                </a:solidFill>
+                <a:latin typeface="Cambria Math"/>
+              </a:rPr>
+              <a:t>s</a:t>
+            </a:r>
+            <a:r>
+              <a:rPr sz="1400" b="0">
+                <a:solidFill>
+                  <a:srgbClr val="1E2733"/>
+                </a:solidFill>
+                <a:latin typeface="Cambria Math"/>
+              </a:rPr>
+              <a:t> = 1 / (dist(p,s) + ε)^q</a:t>
             </a:r>
           </a:p>
           <a:p>
@@ -31606,7 +35359,25 @@
                 </a:solidFill>
                 <a:latin typeface="Noto Sans TC"/>
               </a:rPr>
-              <a:t>• O_s：感測器觀測值</a:t>
+              <a:t>• O</a:t>
+            </a:r>
+            <a:r>
+              <a:rPr sz="800" baseline="-25000">
+                <a:solidFill>
+                  <a:srgbClr val="1E2733"/>
+                </a:solidFill>
+                <a:latin typeface="Noto Sans TC"/>
+              </a:rPr>
+              <a:t>s</a:t>
+            </a:r>
+            <a:r>
+              <a:rPr sz="1200" b="0">
+                <a:solidFill>
+                  <a:srgbClr val="1E2733"/>
+                </a:solidFill>
+                <a:latin typeface="Noto Sans TC"/>
+              </a:rPr>
+              <a:t>：感測器觀測值</a:t>
             </a:r>
           </a:p>
           <a:p>
@@ -31808,7 +35579,7 @@
                 </a:solidFill>
                 <a:latin typeface="Noto Sans TC"/>
               </a:rPr>
-              <a:t>為什麼拿它比較</a:t>
+              <a:t>比較基準理由</a:t>
             </a:r>
           </a:p>
         </p:txBody>
@@ -31957,6 +35728,31 @@
                 <a:latin typeface="Noto Sans TC"/>
               </a:rPr>
               <a:t>• 但 IDW 在無光源、平坦場時可能表現不差</a:t>
+            </a:r>
+          </a:p>
+          <a:p>
+            <a:pPr>
+              <a:lnSpc>
+                <a:spcPct val="114000"/>
+              </a:lnSpc>
+              <a:spcAft>
+                <a:spcPts val="400"/>
+              </a:spcAft>
+              <a:defRPr sz="1200">
+                <a:solidFill>
+                  <a:srgbClr val="1E2733"/>
+                </a:solidFill>
+                <a:latin typeface="Noto Sans TC"/>
+              </a:defRPr>
+            </a:pPr>
+            <a:r>
+              <a:rPr sz="1200" b="0">
+                <a:solidFill>
+                  <a:srgbClr val="1E2733"/>
+                </a:solidFill>
+                <a:latin typeface="Noto Sans TC"/>
+              </a:rPr>
+              <a:t>• 數值例：O=(26,30), d=(1,3), q=2 → IDW≈26.4°C</a:t>
             </a:r>
           </a:p>
         </p:txBody>
@@ -32175,7 +35971,7 @@
                 </a:solidFill>
                 <a:latin typeface="Noto Sans TC"/>
               </a:rPr>
-              <a:t>公式、符號意義、限制與可主張範圍</a:t>
+              <a:t>公式、符號意義、假設與限制</a:t>
             </a:r>
           </a:p>
         </p:txBody>
@@ -32400,7 +36196,79 @@
                 </a:solidFill>
                 <a:latin typeface="Cambria Math"/>
               </a:rPr>
-              <a:t>Score(a) = P_before - P_after</a:t>
+              <a:t>q</a:t>
+            </a:r>
+            <a:r>
+              <a:rPr sz="1000" baseline="-25000">
+                <a:solidFill>
+                  <a:srgbClr val="1E2733"/>
+                </a:solidFill>
+                <a:latin typeface="Cambria Math"/>
+              </a:rPr>
+              <a:t>m</a:t>
+            </a:r>
+            <a:r>
+              <a:rPr sz="1400" b="0">
+                <a:solidFill>
+                  <a:srgbClr val="1E2733"/>
+                </a:solidFill>
+                <a:latin typeface="Cambria Math"/>
+              </a:rPr>
+              <a:t>(S)= (1/K)Σ</a:t>
+            </a:r>
+            <a:r>
+              <a:rPr sz="1000" baseline="-25000">
+                <a:solidFill>
+                  <a:srgbClr val="1E2733"/>
+                </a:solidFill>
+                <a:latin typeface="Cambria Math"/>
+              </a:rPr>
+              <a:t>k</a:t>
+            </a:r>
+            <a:r>
+              <a:rPr sz="1400" b="0">
+                <a:solidFill>
+                  <a:srgbClr val="1E2733"/>
+                </a:solidFill>
+                <a:latin typeface="Cambria Math"/>
+              </a:rPr>
+              <a:t> F</a:t>
+            </a:r>
+            <a:r>
+              <a:rPr sz="1000" baseline="-25000">
+                <a:solidFill>
+                  <a:srgbClr val="1E2733"/>
+                </a:solidFill>
+                <a:latin typeface="Cambria Math"/>
+              </a:rPr>
+              <a:t>m</a:t>
+            </a:r>
+            <a:r>
+              <a:rPr sz="1400" b="0">
+                <a:solidFill>
+                  <a:srgbClr val="1E2733"/>
+                </a:solidFill>
+                <a:latin typeface="Cambria Math"/>
+              </a:rPr>
+              <a:t>(p</a:t>
+            </a:r>
+            <a:r>
+              <a:rPr sz="1000" baseline="-25000">
+                <a:solidFill>
+                  <a:srgbClr val="1E2733"/>
+                </a:solidFill>
+                <a:latin typeface="Cambria Math"/>
+              </a:rPr>
+              <a:t>k</a:t>
+            </a:r>
+            <a:r>
+              <a:rPr sz="1400" b="0">
+                <a:solidFill>
+                  <a:srgbClr val="1E2733"/>
+                </a:solidFill>
+                <a:latin typeface="Cambria Math"/>
+              </a:rPr>
+              <a:t>,t)</a:t>
             </a:r>
           </a:p>
           <a:p>
@@ -32425,57 +36293,201 @@
                 </a:solidFill>
                 <a:latin typeface="Cambria Math"/>
               </a:rPr>
-              <a:t>Penalty 越大代表越偏離舒適目標</a:t>
+              <a:t>P(q)=Σ</a:t>
+            </a:r>
+            <a:r>
+              <a:rPr sz="1000" baseline="-25000">
+                <a:solidFill>
+                  <a:srgbClr val="1E2733"/>
+                </a:solidFill>
+                <a:latin typeface="Cambria Math"/>
+              </a:rPr>
+              <a:t>m</a:t>
+            </a:r>
+            <a:r>
+              <a:rPr sz="1400" b="0">
+                <a:solidFill>
+                  <a:srgbClr val="1E2733"/>
+                </a:solidFill>
+                <a:latin typeface="Cambria Math"/>
+              </a:rPr>
+              <a:t> w</a:t>
+            </a:r>
+            <a:r>
+              <a:rPr sz="1000" baseline="-25000">
+                <a:solidFill>
+                  <a:srgbClr val="1E2733"/>
+                </a:solidFill>
+                <a:latin typeface="Cambria Math"/>
+              </a:rPr>
+              <a:t>m</a:t>
+            </a:r>
+            <a:r>
+              <a:rPr sz="1400" b="0">
+                <a:solidFill>
+                  <a:srgbClr val="1E2733"/>
+                </a:solidFill>
+                <a:latin typeface="Cambria Math"/>
+              </a:rPr>
+              <a:t> max(0,(|q</a:t>
+            </a:r>
+            <a:r>
+              <a:rPr sz="1000" baseline="-25000">
+                <a:solidFill>
+                  <a:srgbClr val="1E2733"/>
+                </a:solidFill>
+                <a:latin typeface="Cambria Math"/>
+              </a:rPr>
+              <a:t>m</a:t>
+            </a:r>
+            <a:r>
+              <a:rPr sz="1400" b="0">
+                <a:solidFill>
+                  <a:srgbClr val="1E2733"/>
+                </a:solidFill>
+                <a:latin typeface="Cambria Math"/>
+              </a:rPr>
+              <a:t>-g</a:t>
+            </a:r>
+            <a:r>
+              <a:rPr sz="1000" baseline="-25000">
+                <a:solidFill>
+                  <a:srgbClr val="1E2733"/>
+                </a:solidFill>
+                <a:latin typeface="Cambria Math"/>
+              </a:rPr>
+              <a:t>m</a:t>
+            </a:r>
+            <a:r>
+              <a:rPr sz="1400" b="0">
+                <a:solidFill>
+                  <a:srgbClr val="1E2733"/>
+                </a:solidFill>
+                <a:latin typeface="Cambria Math"/>
+              </a:rPr>
+              <a:t>|-δ</a:t>
+            </a:r>
+            <a:r>
+              <a:rPr sz="1000" baseline="-25000">
+                <a:solidFill>
+                  <a:srgbClr val="1E2733"/>
+                </a:solidFill>
+                <a:latin typeface="Cambria Math"/>
+              </a:rPr>
+              <a:t>m</a:t>
+            </a:r>
+            <a:r>
+              <a:rPr sz="1400" b="0">
+                <a:solidFill>
+                  <a:srgbClr val="1E2733"/>
+                </a:solidFill>
+                <a:latin typeface="Cambria Math"/>
+              </a:rPr>
+              <a:t>)/δ</a:t>
+            </a:r>
+            <a:r>
+              <a:rPr sz="1000" baseline="-25000">
+                <a:solidFill>
+                  <a:srgbClr val="1E2733"/>
+                </a:solidFill>
+                <a:latin typeface="Cambria Math"/>
+              </a:rPr>
+              <a:t>m</a:t>
+            </a:r>
+            <a:r>
+              <a:rPr sz="1400" b="0">
+                <a:solidFill>
+                  <a:srgbClr val="1E2733"/>
+                </a:solidFill>
+                <a:latin typeface="Cambria Math"/>
+              </a:rPr>
+              <a:t>)</a:t>
             </a:r>
           </a:p>
           <a:p>
             <a:pPr>
               <a:lnSpc>
-                <a:spcPct val="114000"/>
+                <a:spcPct val="108000"/>
               </a:lnSpc>
               <a:spcAft>
-                <a:spcPts val="400"/>
+                <a:spcPts val="200"/>
               </a:spcAft>
-              <a:defRPr sz="1200">
-                <a:solidFill>
-                  <a:srgbClr val="1E2733"/>
-                </a:solidFill>
-                <a:latin typeface="Noto Sans TC"/>
-              </a:defRPr>
-            </a:pPr>
-            <a:r>
-              <a:rPr sz="1200" b="0">
-                <a:solidFill>
-                  <a:srgbClr val="1E2733"/>
-                </a:solidFill>
-                <a:latin typeface="Noto Sans TC"/>
-              </a:rPr>
-              <a:t>• P_before：採取動作前的目標區域懲罰</a:t>
+              <a:defRPr sz="1400">
+                <a:solidFill>
+                  <a:srgbClr val="1E2733"/>
+                </a:solidFill>
+                <a:latin typeface="Cambria Math"/>
+              </a:defRPr>
+            </a:pPr>
+            <a:r>
+              <a:rPr sz="1400" b="0">
+                <a:solidFill>
+                  <a:srgbClr val="1E2733"/>
+                </a:solidFill>
+                <a:latin typeface="Cambria Math"/>
+              </a:rPr>
+              <a:t>Score(a)=P(q</a:t>
+            </a:r>
+            <a:r>
+              <a:rPr sz="1000" baseline="-25000">
+                <a:solidFill>
+                  <a:srgbClr val="1E2733"/>
+                </a:solidFill>
+                <a:latin typeface="Cambria Math"/>
+              </a:rPr>
+              <a:t>base</a:t>
+            </a:r>
+            <a:r>
+              <a:rPr sz="1400" b="0">
+                <a:solidFill>
+                  <a:srgbClr val="1E2733"/>
+                </a:solidFill>
+                <a:latin typeface="Cambria Math"/>
+              </a:rPr>
+              <a:t>)-P(q</a:t>
+            </a:r>
+            <a:r>
+              <a:rPr sz="1000" baseline="-25000">
+                <a:solidFill>
+                  <a:srgbClr val="1E2733"/>
+                </a:solidFill>
+                <a:latin typeface="Cambria Math"/>
+              </a:rPr>
+              <a:t>a</a:t>
+            </a:r>
+            <a:r>
+              <a:rPr sz="1400" b="0">
+                <a:solidFill>
+                  <a:srgbClr val="1E2733"/>
+                </a:solidFill>
+                <a:latin typeface="Cambria Math"/>
+              </a:rPr>
+              <a:t>)</a:t>
             </a:r>
           </a:p>
           <a:p>
             <a:pPr>
               <a:lnSpc>
-                <a:spcPct val="114000"/>
+                <a:spcPct val="108000"/>
               </a:lnSpc>
               <a:spcAft>
-                <a:spcPts val="400"/>
+                <a:spcPts val="200"/>
               </a:spcAft>
-              <a:defRPr sz="1200">
-                <a:solidFill>
-                  <a:srgbClr val="1E2733"/>
-                </a:solidFill>
-                <a:latin typeface="Noto Sans TC"/>
-              </a:defRPr>
-            </a:pPr>
-            <a:r>
-              <a:rPr sz="1200" b="0">
-                <a:solidFill>
-                  <a:srgbClr val="1E2733"/>
-                </a:solidFill>
-                <a:latin typeface="Noto Sans TC"/>
-              </a:rPr>
-              <a:t>• P_after：反事實模擬動作後的懲罰</a:t>
+              <a:defRPr sz="1400">
+                <a:solidFill>
+                  <a:srgbClr val="1E2733"/>
+                </a:solidFill>
+                <a:latin typeface="Cambria Math"/>
+              </a:defRPr>
+            </a:pPr>
+            <a:r>
+              <a:rPr sz="1400" b="0">
+                <a:solidFill>
+                  <a:srgbClr val="1E2733"/>
+                </a:solidFill>
+                <a:latin typeface="Cambria Math"/>
+              </a:rPr>
+              <a:t>m ∈ {T,H,L}</a:t>
             </a:r>
           </a:p>
           <a:p>
@@ -32677,7 +36689,7 @@
                 </a:solidFill>
                 <a:latin typeface="Noto Sans TC"/>
               </a:rPr>
-              <a:t>必須說清楚的限制</a:t>
+              <a:t>驗證限制</a:t>
             </a:r>
           </a:p>
         </p:txBody>
@@ -32711,21 +36723,21 @@
               <a:spcAft>
                 <a:spcPts val="400"/>
               </a:spcAft>
-              <a:defRPr sz="1200">
-                <a:solidFill>
-                  <a:srgbClr val="1E2733"/>
-                </a:solidFill>
-                <a:latin typeface="Noto Sans TC"/>
-              </a:defRPr>
-            </a:pPr>
-            <a:r>
-              <a:rPr sz="1200" b="0">
-                <a:solidFill>
-                  <a:srgbClr val="1E2733"/>
-                </a:solidFill>
-                <a:latin typeface="Noto Sans TC"/>
-              </a:rPr>
-              <a:t>• 目前推薦排序是 counterfactual simulation</a:t>
+              <a:defRPr sz="1100">
+                <a:solidFill>
+                  <a:srgbClr val="1E2733"/>
+                </a:solidFill>
+                <a:latin typeface="Noto Sans TC"/>
+              </a:defRPr>
+            </a:pPr>
+            <a:r>
+              <a:rPr sz="1100" b="0">
+                <a:solidFill>
+                  <a:srgbClr val="1E2733"/>
+                </a:solidFill>
+                <a:latin typeface="Noto Sans TC"/>
+              </a:rPr>
+              <a:t>• S 是推薦評估的 sample scope 或目標區域</a:t>
             </a:r>
           </a:p>
           <a:p>
@@ -32736,21 +36748,57 @@
               <a:spcAft>
                 <a:spcPts val="400"/>
               </a:spcAft>
-              <a:defRPr sz="1200">
-                <a:solidFill>
-                  <a:srgbClr val="1E2733"/>
-                </a:solidFill>
-                <a:latin typeface="Noto Sans TC"/>
-              </a:defRPr>
-            </a:pPr>
-            <a:r>
-              <a:rPr sz="1200" b="0">
-                <a:solidFill>
-                  <a:srgbClr val="1E2733"/>
-                </a:solidFill>
-                <a:latin typeface="Noto Sans TC"/>
-              </a:rPr>
-              <a:t>• 它是模型預測下的改善，不等於已證明因果效果</a:t>
+              <a:defRPr sz="1100">
+                <a:solidFill>
+                  <a:srgbClr val="1E2733"/>
+                </a:solidFill>
+                <a:latin typeface="Noto Sans TC"/>
+              </a:defRPr>
+            </a:pPr>
+            <a:r>
+              <a:rPr sz="1100" b="0">
+                <a:solidFill>
+                  <a:srgbClr val="1E2733"/>
+                </a:solidFill>
+                <a:latin typeface="Noto Sans TC"/>
+              </a:rPr>
+              <a:t>• g</a:t>
+            </a:r>
+            <a:r>
+              <a:rPr sz="800" baseline="-25000">
+                <a:solidFill>
+                  <a:srgbClr val="1E2733"/>
+                </a:solidFill>
+                <a:latin typeface="Noto Sans TC"/>
+              </a:rPr>
+              <a:t>m</a:t>
+            </a:r>
+            <a:r>
+              <a:rPr sz="1100" b="0">
+                <a:solidFill>
+                  <a:srgbClr val="1E2733"/>
+                </a:solidFill>
+                <a:latin typeface="Noto Sans TC"/>
+              </a:rPr>
+              <a:t> 是目標值，δ</a:t>
+            </a:r>
+            <a:r>
+              <a:rPr sz="800" baseline="-25000">
+                <a:solidFill>
+                  <a:srgbClr val="1E2733"/>
+                </a:solidFill>
+                <a:latin typeface="Noto Sans TC"/>
+              </a:rPr>
+              <a:t>m</a:t>
+            </a:r>
+            <a:r>
+              <a:rPr sz="1100" b="0">
+                <a:solidFill>
+                  <a:srgbClr val="1E2733"/>
+                </a:solidFill>
+                <a:latin typeface="Noto Sans TC"/>
+              </a:rPr>
+              <a:t> 是容許範圍</a:t>
             </a:r>
           </a:p>
           <a:p>
@@ -32761,21 +36809,21 @@
               <a:spcAft>
                 <a:spcPts val="400"/>
               </a:spcAft>
-              <a:defRPr sz="1200">
-                <a:solidFill>
-                  <a:srgbClr val="1E2733"/>
-                </a:solidFill>
-                <a:latin typeface="Noto Sans TC"/>
-              </a:defRPr>
-            </a:pPr>
-            <a:r>
-              <a:rPr sz="1200" b="0">
-                <a:solidFill>
-                  <a:srgbClr val="1E2733"/>
-                </a:solidFill>
-                <a:latin typeface="Noto Sans TC"/>
-              </a:rPr>
-              <a:t>• 真正驗證需做 before/after intervention</a:t>
+              <a:defRPr sz="1100">
+                <a:solidFill>
+                  <a:srgbClr val="1E2733"/>
+                </a:solidFill>
+                <a:latin typeface="Noto Sans TC"/>
+              </a:defRPr>
+            </a:pPr>
+            <a:r>
+              <a:rPr sz="1100" b="0">
+                <a:solidFill>
+                  <a:srgbClr val="1E2733"/>
+                </a:solidFill>
+                <a:latin typeface="Noto Sans TC"/>
+              </a:rPr>
+              <a:t>• 目前推薦排序是 counterfactual simulation</a:t>
             </a:r>
           </a:p>
           <a:p>
@@ -32786,21 +36834,21 @@
               <a:spcAft>
                 <a:spcPts val="400"/>
               </a:spcAft>
-              <a:defRPr sz="1200">
-                <a:solidFill>
-                  <a:srgbClr val="1E2733"/>
-                </a:solidFill>
-                <a:latin typeface="Noto Sans TC"/>
-              </a:defRPr>
-            </a:pPr>
-            <a:r>
-              <a:rPr sz="1200" b="0">
-                <a:solidFill>
-                  <a:srgbClr val="1E2733"/>
-                </a:solidFill>
-                <a:latin typeface="Noto Sans TC"/>
-              </a:rPr>
-              <a:t>• 比較實際 comfort penalty reduction 與預測改善是否一致</a:t>
+              <a:defRPr sz="1100">
+                <a:solidFill>
+                  <a:srgbClr val="1E2733"/>
+                </a:solidFill>
+                <a:latin typeface="Noto Sans TC"/>
+              </a:defRPr>
+            </a:pPr>
+            <a:r>
+              <a:rPr sz="1100" b="0">
+                <a:solidFill>
+                  <a:srgbClr val="1E2733"/>
+                </a:solidFill>
+                <a:latin typeface="Noto Sans TC"/>
+              </a:rPr>
+              <a:t>• 真正驗證需做 before/after intervention</a:t>
             </a:r>
           </a:p>
           <a:p>
@@ -32811,21 +36859,82 @@
               <a:spcAft>
                 <a:spcPts val="400"/>
               </a:spcAft>
-              <a:defRPr sz="1200">
-                <a:solidFill>
-                  <a:srgbClr val="1E2733"/>
-                </a:solidFill>
-                <a:latin typeface="Noto Sans TC"/>
-              </a:defRPr>
-            </a:pPr>
-            <a:r>
-              <a:rPr sz="1200" b="0">
-                <a:solidFill>
-                  <a:srgbClr val="1E2733"/>
-                </a:solidFill>
-                <a:latin typeface="Noto Sans TC"/>
-              </a:rPr>
-              <a:t>• demo 可以呈現比較流程，但不能替代實測介入驗證</a:t>
+              <a:defRPr sz="1100">
+                <a:solidFill>
+                  <a:srgbClr val="1E2733"/>
+                </a:solidFill>
+                <a:latin typeface="Noto Sans TC"/>
+              </a:defRPr>
+            </a:pPr>
+            <a:r>
+              <a:rPr sz="1100" b="0">
+                <a:solidFill>
+                  <a:srgbClr val="1E2733"/>
+                </a:solidFill>
+                <a:latin typeface="Noto Sans TC"/>
+              </a:rPr>
+              <a:t>• 比較實際 comfort penalty reduction 與預測改善是否一致</a:t>
+            </a:r>
+          </a:p>
+          <a:p>
+            <a:pPr>
+              <a:lnSpc>
+                <a:spcPct val="114000"/>
+              </a:lnSpc>
+              <a:spcAft>
+                <a:spcPts val="400"/>
+              </a:spcAft>
+              <a:defRPr sz="1100">
+                <a:solidFill>
+                  <a:srgbClr val="1E2733"/>
+                </a:solidFill>
+                <a:latin typeface="Noto Sans TC"/>
+              </a:defRPr>
+            </a:pPr>
+            <a:r>
+              <a:rPr sz="1100" b="0">
+                <a:solidFill>
+                  <a:srgbClr val="1E2733"/>
+                </a:solidFill>
+                <a:latin typeface="Noto Sans TC"/>
+              </a:rPr>
+              <a:t>• 數值例：q</a:t>
+            </a:r>
+            <a:r>
+              <a:rPr sz="800" baseline="-25000">
+                <a:solidFill>
+                  <a:srgbClr val="1E2733"/>
+                </a:solidFill>
+                <a:latin typeface="Noto Sans TC"/>
+              </a:rPr>
+              <a:t>base</a:t>
+            </a:r>
+            <a:r>
+              <a:rPr sz="1100" b="0">
+                <a:solidFill>
+                  <a:srgbClr val="1E2733"/>
+                </a:solidFill>
+                <a:latin typeface="Noto Sans TC"/>
+              </a:rPr>
+              <a:t>=30,g=26,δ=2 → P=1；q</a:t>
+            </a:r>
+            <a:r>
+              <a:rPr sz="800" baseline="-25000">
+                <a:solidFill>
+                  <a:srgbClr val="1E2733"/>
+                </a:solidFill>
+                <a:latin typeface="Noto Sans TC"/>
+              </a:rPr>
+              <a:t>a</a:t>
+            </a:r>
+            <a:r>
+              <a:rPr sz="1100" b="0">
+                <a:solidFill>
+                  <a:srgbClr val="1E2733"/>
+                </a:solidFill>
+                <a:latin typeface="Noto Sans TC"/>
+              </a:rPr>
+              <a:t>=27 → P=0；Score=1</a:t>
             </a:r>
           </a:p>
         </p:txBody>

--- a/docs/papers/thesis/thesis_presentation_zh.pptx
+++ b/docs/papers/thesis/thesis_presentation_zh.pptx
@@ -3434,8 +3434,8 @@
         </p:blipFill>
         <p:spPr>
           <a:xfrm>
-            <a:off x="6126480" y="2080618"/>
-            <a:ext cx="5120640" cy="2971083"/>
+            <a:off x="6126480" y="2132561"/>
+            <a:ext cx="5120640" cy="2867197"/>
           </a:xfrm>
           <a:prstGeom prst="rect">
             <a:avLst/>
@@ -23331,8 +23331,8 @@
         </p:blipFill>
         <p:spPr>
           <a:xfrm>
-            <a:off x="731520" y="2065948"/>
-            <a:ext cx="5486400" cy="3183303"/>
+            <a:off x="731520" y="2121601"/>
+            <a:ext cx="5486400" cy="3071997"/>
           </a:xfrm>
           <a:prstGeom prst="rect">
             <a:avLst/>
@@ -23366,23 +23366,23 @@
                 <a:spcPct val="112000"/>
               </a:lnSpc>
               <a:spcAft>
-                <a:spcPts val="765"/>
+                <a:spcPts val="720"/>
               </a:spcAft>
-              <a:defRPr sz="1700">
-                <a:solidFill>
-                  <a:srgbClr val="1E2733"/>
-                </a:solidFill>
-                <a:latin typeface="Noto Sans TC"/>
-              </a:defRPr>
-            </a:pPr>
-            <a:r>
-              <a:rPr sz="1700" b="0">
-                <a:solidFill>
-                  <a:srgbClr val="1E2733"/>
-                </a:solidFill>
-                <a:latin typeface="Noto Sans TC"/>
-              </a:rPr>
-              <a:t>• 入口分成使用者互動層與 AI 工具呼叫層</a:t>
+              <a:defRPr sz="1600">
+                <a:solidFill>
+                  <a:srgbClr val="1E2733"/>
+                </a:solidFill>
+                <a:latin typeface="Noto Sans TC"/>
+              </a:defRPr>
+            </a:pPr>
+            <a:r>
+              <a:rPr sz="1600" b="0">
+                <a:solidFill>
+                  <a:srgbClr val="1E2733"/>
+                </a:solidFill>
+                <a:latin typeface="Noto Sans TC"/>
+              </a:rPr>
+              <a:t>• top-down tree 先區分三個責任域</a:t>
             </a:r>
           </a:p>
           <a:p>
@@ -23391,23 +23391,23 @@
                 <a:spcPct val="112000"/>
               </a:lnSpc>
               <a:spcAft>
-                <a:spcPts val="765"/>
+                <a:spcPts val="720"/>
               </a:spcAft>
-              <a:defRPr sz="1700">
-                <a:solidFill>
-                  <a:srgbClr val="1E2733"/>
-                </a:solidFill>
-                <a:latin typeface="Noto Sans TC"/>
-              </a:defRPr>
-            </a:pPr>
-            <a:r>
-              <a:rPr sz="1700" b="0">
-                <a:solidFill>
-                  <a:srgbClr val="1E2733"/>
-                </a:solidFill>
-                <a:latin typeface="Noto Sans TC"/>
-              </a:rPr>
-              <a:t>• 所有請求都先進入服務編排層</a:t>
+              <a:defRPr sz="1600">
+                <a:solidFill>
+                  <a:srgbClr val="1E2733"/>
+                </a:solidFill>
+                <a:latin typeface="Noto Sans TC"/>
+              </a:defRPr>
+            </a:pPr>
+            <a:r>
+              <a:rPr sz="1600" b="0">
+                <a:solidFill>
+                  <a:srgbClr val="1E2733"/>
+                </a:solidFill>
+                <a:latin typeface="Noto Sans TC"/>
+              </a:rPr>
+              <a:t>• 情境與觀測層整理房間、8 點感測與外部邊界</a:t>
             </a:r>
           </a:p>
           <a:p>
@@ -23416,23 +23416,23 @@
                 <a:spcPct val="112000"/>
               </a:lnSpc>
               <a:spcAft>
-                <a:spcPts val="765"/>
+                <a:spcPts val="720"/>
               </a:spcAft>
-              <a:defRPr sz="1700">
-                <a:solidFill>
-                  <a:srgbClr val="1E2733"/>
-                </a:solidFill>
-                <a:latin typeface="Noto Sans TC"/>
-              </a:defRPr>
-            </a:pPr>
-            <a:r>
-              <a:rPr sz="1700" b="0">
-                <a:solidFill>
-                  <a:srgbClr val="1E2733"/>
-                </a:solidFill>
-                <a:latin typeface="Noto Sans TC"/>
-              </a:rPr>
-              <a:t>• 後端主體為環境數位孿生核心與校正學習層</a:t>
+              <a:defRPr sz="1600">
+                <a:solidFill>
+                  <a:srgbClr val="1E2733"/>
+                </a:solidFill>
+                <a:latin typeface="Noto Sans TC"/>
+              </a:defRPr>
+            </a:pPr>
+            <a:r>
+              <a:rPr sz="1600" b="0">
+                <a:solidFill>
+                  <a:srgbClr val="1E2733"/>
+                </a:solidFill>
+                <a:latin typeface="Noto Sans TC"/>
+              </a:rPr>
+              <a:t>• 估測與學習層負責 T/H/L field model、校正與 residual</a:t>
             </a:r>
           </a:p>
           <a:p>
@@ -23441,23 +23441,23 @@
                 <a:spcPct val="112000"/>
               </a:lnSpc>
               <a:spcAft>
-                <a:spcPts val="765"/>
+                <a:spcPts val="720"/>
               </a:spcAft>
-              <a:defRPr sz="1700">
-                <a:solidFill>
-                  <a:srgbClr val="1E2733"/>
-                </a:solidFill>
-                <a:latin typeface="Noto Sans TC"/>
-              </a:defRPr>
-            </a:pPr>
-            <a:r>
-              <a:rPr sz="1700" b="0">
-                <a:solidFill>
-                  <a:srgbClr val="1E2733"/>
-                </a:solidFill>
-                <a:latin typeface="Noto Sans TC"/>
-              </a:rPr>
-              <a:t>• hybrid residual 只作為 optional 第二層修正器</a:t>
+              <a:defRPr sz="1600">
+                <a:solidFill>
+                  <a:srgbClr val="1E2733"/>
+                </a:solidFill>
+                <a:latin typeface="Noto Sans TC"/>
+              </a:defRPr>
+            </a:pPr>
+            <a:r>
+              <a:rPr sz="1600" b="0">
+                <a:solidFill>
+                  <a:srgbClr val="1E2733"/>
+                </a:solidFill>
+                <a:latin typeface="Noto Sans TC"/>
+              </a:rPr>
+              <a:t>• 服務與決策層才包含 scripts、Web、MCP/Gemma 與 action ranking</a:t>
             </a:r>
           </a:p>
         </p:txBody>
